--- a/methode_ia_lcl.pptx
+++ b/methode_ia_lcl.pptx
@@ -3576,28 +3576,42 @@
       </p:sp>
       <p:sp>
         <p:nvSpPr>
-          <p:cNvPr id="10" name="Shape 8"/>
-          <p:cNvSpPr/>
-          <p:nvPr/>
-        </p:nvSpPr>
-        <p:spPr>
-          <a:xfrm rot="1800000">
-            <a:off x="3200400" y="3685032"/>
-            <a:ext cx="182880" cy="219456"/>
-          </a:xfrm>
-          <a:prstGeom prst="right_triangle">
-            <a:avLst/>
-          </a:prstGeom>
-          <a:solidFill>
-            <a:srgbClr val="F5B700"/>
-          </a:solidFill>
-          <a:ln w="12700">
-            <a:solidFill>
-              <a:srgbClr val="F5B700"/>
-            </a:solidFill>
-            <a:prstDash val="solid"/>
-          </a:ln>
-        </p:spPr>
+          <p:cNvPr id="10" name="Text 8"/>
+          <p:cNvSpPr txBox="1"/>
+          <p:nvPr/>
+        </p:nvSpPr>
+        <p:spPr>
+          <a:xfrm>
+            <a:off x="3136392" y="3474720"/>
+            <a:ext cx="320040" cy="640080"/>
+          </a:xfrm>
+          <a:prstGeom prst="rect">
+            <a:avLst/>
+          </a:prstGeom>
+          <a:noFill/>
+          <a:ln/>
+        </p:spPr>
+        <p:txBody>
+          <a:bodyPr wrap="square" lIns="0" tIns="0" rIns="0" bIns="0" rtlCol="0" anchor="ctr"/>
+          <a:lstStyle/>
+          <a:p>
+            <a:pPr algn="ctr" indent="0" marL="0">
+              <a:buNone/>
+            </a:pPr>
+            <a:r>
+              <a:rPr lang="en-US" sz="4000" b="1" dirty="0">
+                <a:solidFill>
+                  <a:srgbClr val="F5B700"/>
+                </a:solidFill>
+                <a:latin typeface="Arial" pitchFamily="34" charset="0"/>
+                <a:ea typeface="Arial" pitchFamily="34" charset="-122"/>
+                <a:cs typeface="Arial" pitchFamily="34" charset="-120"/>
+              </a:rPr>
+              <a:t>›</a:t>
+            </a:r>
+            <a:endParaRPr lang="en-US" sz="4000" dirty="0"/>
+          </a:p>
+        </p:txBody>
       </p:sp>
       <p:sp>
         <p:nvSpPr>
@@ -3768,28 +3782,42 @@
       </p:sp>
       <p:sp>
         <p:nvSpPr>
-          <p:cNvPr id="16" name="Shape 14"/>
-          <p:cNvSpPr/>
-          <p:nvPr/>
-        </p:nvSpPr>
-        <p:spPr>
-          <a:xfrm rot="1800000">
-            <a:off x="5989320" y="3685032"/>
-            <a:ext cx="182880" cy="219456"/>
-          </a:xfrm>
-          <a:prstGeom prst="right_triangle">
-            <a:avLst/>
-          </a:prstGeom>
-          <a:solidFill>
-            <a:srgbClr val="F5B700"/>
-          </a:solidFill>
-          <a:ln w="12700">
-            <a:solidFill>
-              <a:srgbClr val="F5B700"/>
-            </a:solidFill>
-            <a:prstDash val="solid"/>
-          </a:ln>
-        </p:spPr>
+          <p:cNvPr id="16" name="Text 14"/>
+          <p:cNvSpPr txBox="1"/>
+          <p:nvPr/>
+        </p:nvSpPr>
+        <p:spPr>
+          <a:xfrm>
+            <a:off x="5925312" y="3474720"/>
+            <a:ext cx="320040" cy="640080"/>
+          </a:xfrm>
+          <a:prstGeom prst="rect">
+            <a:avLst/>
+          </a:prstGeom>
+          <a:noFill/>
+          <a:ln/>
+        </p:spPr>
+        <p:txBody>
+          <a:bodyPr wrap="square" lIns="0" tIns="0" rIns="0" bIns="0" rtlCol="0" anchor="ctr"/>
+          <a:lstStyle/>
+          <a:p>
+            <a:pPr algn="ctr" indent="0" marL="0">
+              <a:buNone/>
+            </a:pPr>
+            <a:r>
+              <a:rPr lang="en-US" sz="4000" b="1" dirty="0">
+                <a:solidFill>
+                  <a:srgbClr val="F5B700"/>
+                </a:solidFill>
+                <a:latin typeface="Arial" pitchFamily="34" charset="0"/>
+                <a:ea typeface="Arial" pitchFamily="34" charset="-122"/>
+                <a:cs typeface="Arial" pitchFamily="34" charset="-120"/>
+              </a:rPr>
+              <a:t>›</a:t>
+            </a:r>
+            <a:endParaRPr lang="en-US" sz="4000" dirty="0"/>
+          </a:p>
+        </p:txBody>
       </p:sp>
       <p:sp>
         <p:nvSpPr>
@@ -3960,28 +3988,42 @@
       </p:sp>
       <p:sp>
         <p:nvSpPr>
-          <p:cNvPr id="22" name="Shape 20"/>
-          <p:cNvSpPr/>
-          <p:nvPr/>
-        </p:nvSpPr>
-        <p:spPr>
-          <a:xfrm rot="1800000">
-            <a:off x="8778240" y="3685032"/>
-            <a:ext cx="182880" cy="219456"/>
-          </a:xfrm>
-          <a:prstGeom prst="right_triangle">
-            <a:avLst/>
-          </a:prstGeom>
-          <a:solidFill>
-            <a:srgbClr val="F5B700"/>
-          </a:solidFill>
-          <a:ln w="12700">
-            <a:solidFill>
-              <a:srgbClr val="F5B700"/>
-            </a:solidFill>
-            <a:prstDash val="solid"/>
-          </a:ln>
-        </p:spPr>
+          <p:cNvPr id="22" name="Text 20"/>
+          <p:cNvSpPr txBox="1"/>
+          <p:nvPr/>
+        </p:nvSpPr>
+        <p:spPr>
+          <a:xfrm>
+            <a:off x="8714232" y="3474720"/>
+            <a:ext cx="320040" cy="640080"/>
+          </a:xfrm>
+          <a:prstGeom prst="rect">
+            <a:avLst/>
+          </a:prstGeom>
+          <a:noFill/>
+          <a:ln/>
+        </p:spPr>
+        <p:txBody>
+          <a:bodyPr wrap="square" lIns="0" tIns="0" rIns="0" bIns="0" rtlCol="0" anchor="ctr"/>
+          <a:lstStyle/>
+          <a:p>
+            <a:pPr algn="ctr" indent="0" marL="0">
+              <a:buNone/>
+            </a:pPr>
+            <a:r>
+              <a:rPr lang="en-US" sz="4000" b="1" dirty="0">
+                <a:solidFill>
+                  <a:srgbClr val="F5B700"/>
+                </a:solidFill>
+                <a:latin typeface="Arial" pitchFamily="34" charset="0"/>
+                <a:ea typeface="Arial" pitchFamily="34" charset="-122"/>
+                <a:cs typeface="Arial" pitchFamily="34" charset="-120"/>
+              </a:rPr>
+              <a:t>›</a:t>
+            </a:r>
+            <a:endParaRPr lang="en-US" sz="4000" dirty="0"/>
+          </a:p>
+        </p:txBody>
       </p:sp>
       <p:sp>
         <p:nvSpPr>
@@ -7055,28 +7097,42 @@
       </p:sp>
       <p:sp>
         <p:nvSpPr>
-          <p:cNvPr id="18" name="Shape 16"/>
-          <p:cNvSpPr/>
-          <p:nvPr/>
-        </p:nvSpPr>
-        <p:spPr>
-          <a:xfrm rot="1800000">
-            <a:off x="5989320" y="3931920"/>
-            <a:ext cx="365760" cy="457200"/>
-          </a:xfrm>
-          <a:prstGeom prst="right_triangle">
-            <a:avLst/>
-          </a:prstGeom>
-          <a:solidFill>
-            <a:srgbClr val="F5B700"/>
-          </a:solidFill>
-          <a:ln w="12700">
-            <a:solidFill>
-              <a:srgbClr val="F5B700"/>
-            </a:solidFill>
-            <a:prstDash val="solid"/>
-          </a:ln>
-        </p:spPr>
+          <p:cNvPr id="18" name="Text 16"/>
+          <p:cNvSpPr txBox="1"/>
+          <p:nvPr/>
+        </p:nvSpPr>
+        <p:spPr>
+          <a:xfrm>
+            <a:off x="5943600" y="3794760"/>
+            <a:ext cx="457200" cy="731520"/>
+          </a:xfrm>
+          <a:prstGeom prst="rect">
+            <a:avLst/>
+          </a:prstGeom>
+          <a:noFill/>
+          <a:ln/>
+        </p:spPr>
+        <p:txBody>
+          <a:bodyPr wrap="square" lIns="0" tIns="0" rIns="0" bIns="0" rtlCol="0" anchor="ctr"/>
+          <a:lstStyle/>
+          <a:p>
+            <a:pPr algn="ctr" indent="0" marL="0">
+              <a:buNone/>
+            </a:pPr>
+            <a:r>
+              <a:rPr lang="en-US" sz="5400" b="1" dirty="0">
+                <a:solidFill>
+                  <a:srgbClr val="F5B700"/>
+                </a:solidFill>
+                <a:latin typeface="Arial" pitchFamily="34" charset="0"/>
+                <a:ea typeface="Arial" pitchFamily="34" charset="-122"/>
+                <a:cs typeface="Arial" pitchFamily="34" charset="-120"/>
+              </a:rPr>
+              <a:t>›</a:t>
+            </a:r>
+            <a:endParaRPr lang="en-US" sz="5400" dirty="0"/>
+          </a:p>
+        </p:txBody>
       </p:sp>
       <p:sp>
         <p:nvSpPr>

--- a/methode_ia_lcl.pptx
+++ b/methode_ia_lcl.pptx
@@ -15,9 +15,10 @@
     <p:sldId id="263" r:id="rId9"/>
     <p:sldId id="264" r:id="rId10"/>
     <p:sldId id="265" r:id="rId11"/>
+    <p:sldId id="266" r:id="rId12"/>
   </p:sldIdLst>
   <p:notesMasterIdLst>
-    <p:notesMasterId r:id="rId12"/>
+    <p:notesMasterId r:id="rId13"/>
   </p:notesMasterIdLst>
   <p:sldSz cx="12192000" cy="6858000"/>
   <p:notesSz cx="6858000" cy="12192000"/>
@@ -511,7 +512,7 @@
           <a:p>
             <a:r>
               <a:rPr lang="en-US" dirty="0"/>
-              <a:t>Slide d'ouverture. Poser le sujet en 15 secondes : je vous présente une méthode de montée en compétence que j'ai mise au point en utilisant l'IA générative comme levier d'assimilation, appliquée à notre stack hybride Java / mainframe. L'objectif de cette présentation est double : partager le retour d'expérience et proposer un passage à l'échelle possible pour l'équipe.</a:t>
+              <a:t>Slide d'ouverture. Poser le sujet en 15 secondes.</a:t>
             </a:r>
             <a:endParaRPr lang="en-US" dirty="0"/>
           </a:p>
@@ -599,7 +600,7 @@
           <a:p>
             <a:r>
               <a:rPr lang="en-US" dirty="0"/>
-              <a:t>Slide de clôture. Ne pas relire — laisser la salle lire. Trois secondes de silence, puis : « Je suis preneur de vos retours et de vos questions ». Éviter de finir sur « Merci » seul, c'est faible. Le dernier mot doit être une invitation à l'échange. Si le comité pose la question du ROI chiffré, renvoyer honnêtement au retour d'expérience à 6 mois — c'est cohérent avec la roadmap présentée.</a:t>
+              <a:t>ROI collectif. Onboarding = pain point classique des DSI bancaires.</a:t>
             </a:r>
             <a:endParaRPr lang="en-US" dirty="0"/>
           </a:p>
@@ -623,6 +624,94 @@
             <a:fld id="{F7021451-1387-4CA6-816F-3879F97B5CBC}" type="slidenum">
               <a:rPr lang="en-US"/>
               <a:t>10</a:t>
+            </a:fld>
+            <a:endParaRPr lang="en-US"/>
+          </a:p>
+        </p:txBody>
+      </p:sp>
+    </p:spTree>
+    <p:extLst>
+      <p:ext uri="{BB962C8B-B14F-4D97-AF65-F5344CB8AC3E}">
+        <p14:creationId xmlns:p14="http://schemas.microsoft.com/office/powerpoint/2010/main" val="1024086991"/>
+      </p:ext>
+    </p:extLst>
+  </p:cSld>
+  <p:clrMapOvr>
+    <a:masterClrMapping/>
+  </p:clrMapOvr>
+</p:notes>
+</file>
+
+<file path=ppt/notesSlides/notesSlide11.xml><?xml version="1.0" encoding="utf-8"?>
+<p:notes xmlns:a="http://schemas.openxmlformats.org/drawingml/2006/main" xmlns:r="http://schemas.openxmlformats.org/officeDocument/2006/relationships" xmlns:p="http://schemas.openxmlformats.org/presentationml/2006/main">
+  <p:cSld>
+    <p:spTree>
+      <p:nvGrpSpPr>
+        <p:cNvPr id="1" name=""/>
+        <p:cNvGrpSpPr/>
+        <p:nvPr/>
+      </p:nvGrpSpPr>
+      <p:grpSpPr>
+        <a:xfrm>
+          <a:off x="0" y="0"/>
+          <a:ext cx="0" cy="0"/>
+          <a:chOff x="0" y="0"/>
+          <a:chExt cx="0" cy="0"/>
+        </a:xfrm>
+      </p:grpSpPr>
+      <p:sp>
+        <p:nvSpPr>
+          <p:cNvPr id="2" name="Slide Image Placeholder 1"/>
+          <p:cNvSpPr>
+            <a:spLocks noGrp="1" noRot="1" noChangeAspect="1"/>
+          </p:cNvSpPr>
+          <p:nvPr>
+            <p:ph type="sldImg"/>
+          </p:nvPr>
+        </p:nvSpPr>
+        <p:spPr/>
+      </p:sp>
+      <p:sp>
+        <p:nvSpPr>
+          <p:cNvPr id="3" name="Notes Placeholder 2"/>
+          <p:cNvSpPr>
+            <a:spLocks noGrp="1"/>
+          </p:cNvSpPr>
+          <p:nvPr>
+            <p:ph type="body" idx="1"/>
+          </p:nvPr>
+        </p:nvSpPr>
+        <p:spPr/>
+        <p:txBody>
+          <a:bodyPr/>
+          <a:lstStyle/>
+          <a:p>
+            <a:r>
+              <a:rPr lang="en-US" dirty="0"/>
+              <a:t>Slide de clôture. 3 secondes de silence puis invitation à l'échange.</a:t>
+            </a:r>
+            <a:endParaRPr lang="en-US" dirty="0"/>
+          </a:p>
+        </p:txBody>
+      </p:sp>
+      <p:sp>
+        <p:nvSpPr>
+          <p:cNvPr id="4" name="Slide Number Placeholder 3"/>
+          <p:cNvSpPr>
+            <a:spLocks noGrp="1"/>
+          </p:cNvSpPr>
+          <p:nvPr>
+            <p:ph type="sldNum" sz="quarter" idx="10"/>
+          </p:nvPr>
+        </p:nvSpPr>
+        <p:spPr/>
+        <p:txBody>
+          <a:bodyPr/>
+          <a:lstStyle/>
+          <a:p>
+            <a:fld id="{F7021451-1387-4CA6-816F-3879F97B5CBC}" type="slidenum">
+              <a:rPr lang="en-US"/>
+              <a:t>11</a:t>
             </a:fld>
             <a:endParaRPr lang="en-US"/>
           </a:p>
@@ -687,7 +776,7 @@
           <a:p>
             <a:r>
               <a:rPr lang="en-US" dirty="0"/>
-              <a:t>Poser le décor sans dramatiser. Trois faits factuels à gauche : notre environnement est hybride, la doc IBM est dense, les formations coûtent cher. À droite : la question structurante. On ne remplace pas la formation, on l'augmente. Insister sur le mot « rigueur bancaire » : c'est le signal que la méthode est compatible avec nos exigences.</a:t>
+              <a:t>Poser le décor factuellement. Insister sur « rigueur bancaire ».</a:t>
             </a:r>
             <a:endParaRPr lang="en-US" dirty="0"/>
           </a:p>
@@ -775,7 +864,7 @@
           <a:p>
             <a:r>
               <a:rPr lang="en-US" dirty="0"/>
-              <a:t>La slide-clé de la présentation. Passer 90 secondes dessus. Insister sur trois points : (1) la source reste maîtresse, l'IA ne remplace pas la doc, elle la digère ; (2) le prompt structuré est le vrai savoir-faire — c'est là que se joue la qualité du résultat ; (3) le livrable est un artefact durable, pas une conversation jetable. C'est cette dernière partie qui change tout : on capitalise au lieu de reformer à chaque fois.</a:t>
+              <a:t>Slide-clé. 90 secondes. Trois points : source maîtresse, prompt = savoir-faire, livrable durable.</a:t>
             </a:r>
             <a:endParaRPr lang="en-US" dirty="0"/>
           </a:p>
@@ -863,7 +952,7 @@
           <a:p>
             <a:r>
               <a:rPr lang="en-US" dirty="0"/>
-              <a:t>Ces quatre principes sont ce qui distingue notre méthode d'un simple « je demande à ChatGPT ». Le principe 3, anti-hallucination, est crucial en banque : on préfère un trou explicite dans la fiche à une invention plausible. Le principe 4, capitalisation, est celui qui parle au management : ce n'est pas de la productivité individuelle, c'est un actif d'équipe.</a:t>
+              <a:t>Ce qui distingue la méthode d'un simple usage naïf de ChatGPT.</a:t>
             </a:r>
             <a:endParaRPr lang="en-US" dirty="0"/>
           </a:p>
@@ -951,7 +1040,7 @@
           <a:p>
             <a:r>
               <a:rPr lang="en-US" dirty="0"/>
-              <a:t>Slide plus technique. Public tech : ils vont apprécier de voir un vrai prompt. Public management : ils retiennent qu'il y a une méthode, un savoir-faire, ce n'est pas du bricolage. Message clé : le prompt engineering est une compétence en soi, un actif transférable. On peut construire une bibliothèque de prompts par domaine (CICS, Kafka, Spring, VOP…) réutilisables par toute l'équipe.</a:t>
+              <a:t>Slide de référence sur la structure. 60 secondes. Nommer les 6 blocs. Insister sur blocs 4 (fidélité) et 5 (structure) : les plus discriminants. Un prompt qui saute ces deux blocs produit un texte fluide mais non exploitable. Enchaîner sur la slide suivante avec un exemple complet.</a:t>
             </a:r>
             <a:endParaRPr lang="en-US" dirty="0"/>
           </a:p>
@@ -1039,7 +1128,7 @@
           <a:p>
             <a:r>
               <a:rPr lang="en-US" dirty="0"/>
-              <a:t>La slide impact. Chiffres à préciser selon ton propre retour d'expérience réel : ne pas gonfler. Si tu n'as pas encore les mesures exactes, dis-le honnêtement : « ordres de grandeur observés sur mes premières fiches ». La crédibilité vaut mieux que le wow-factor. Un manager expérimenté sentira tout de suite un chiffre gonflé.</a:t>
+              <a:t>Slide « preuve ». Ne pas lire le prompt à voix haute. Inviter la salle à le regarder pendant que tu commentes les 5 annotations à droite. Message clé : ce prompt est réutilisable pour n'importe quel autre Redpaper — seule la ligne URL change. C'est ça, un actif transférable.</a:t>
             </a:r>
             <a:endParaRPr lang="en-US" dirty="0"/>
           </a:p>
@@ -1127,7 +1216,7 @@
           <a:p>
             <a:r>
               <a:rPr lang="en-US" dirty="0"/>
-              <a:t>Ancrer dans le concret : c'est mon propre parcours en cours, pas un cas théorique. Nommer les Redbooks précis rassure sur le sérieux de la démarche. Insister sur le fait que toutes les sources sont publiques et gratuites — l'IA fait le tri et la digestion, pas de contenu IBM piraté ou de formation contournée.</a:t>
+              <a:t>Chiffres à ajuster selon retour d'expérience réel.</a:t>
             </a:r>
             <a:endParaRPr lang="en-US" dirty="0"/>
           </a:p>
@@ -1215,7 +1304,7 @@
           <a:p>
             <a:r>
               <a:rPr lang="en-US" dirty="0"/>
-              <a:t>Slide indispensable en banque. Le manager et surtout le comité élargi vont attendre ce point. Message : nous avons anticipé les risques, nous ne sommes pas naïfs. Le dernier point de la colonne conformité — validation avec la politique IA groupe — est un appel à collaboration, pas une case cochée. Cela montre qu'on veut faire les choses proprement, pas contourner. Si LCL a déjà une politique IA formalisée, la citer ici.</a:t>
+              <a:t>Ancrer dans le concret : parcours en cours. Sources publiques et gratuites.</a:t>
             </a:r>
             <a:endParaRPr lang="en-US" dirty="0"/>
           </a:p>
@@ -1303,7 +1392,7 @@
           <a:p>
             <a:r>
               <a:rPr lang="en-US" dirty="0"/>
-              <a:t>Slide qui parle directement au management : ROI collectif, pas individuel. Trois piliers à mentionner brièvement. Insister sur l'onboarding : c'est un pain point classique des DSI bancaires, un nouvel arrivant met souvent 3 à 6 mois avant d'être productif sur une stack mainframe/Java. Réduire cela de moitié, c'est un chiffre qui parle. Ne pas s'engager sur des pourcentages précis sans expérimentation.</a:t>
+              <a:t>Slide indispensable en banque. Anticipation des risques.</a:t>
             </a:r>
             <a:endParaRPr lang="en-US" dirty="0"/>
           </a:p>
@@ -1910,6 +1999,745 @@
     <p:bg>
       <p:bgPr>
         <a:solidFill>
+          <a:srgbClr val="FFFFFF"/>
+        </a:solidFill>
+      </p:bgPr>
+    </p:bg>
+    <p:spTree>
+      <p:nvGrpSpPr>
+        <p:cNvPr id="1" name=""/>
+        <p:cNvGrpSpPr/>
+        <p:nvPr/>
+      </p:nvGrpSpPr>
+      <p:grpSpPr>
+        <a:xfrm>
+          <a:off x="0" y="0"/>
+          <a:ext cx="0" cy="0"/>
+          <a:chOff x="0" y="0"/>
+          <a:chExt cx="0" cy="0"/>
+        </a:xfrm>
+      </p:grpSpPr>
+      <p:sp>
+        <p:nvSpPr>
+          <p:cNvPr id="2" name="Shape 0"/>
+          <p:cNvSpPr/>
+          <p:nvPr/>
+        </p:nvSpPr>
+        <p:spPr>
+          <a:xfrm>
+            <a:off x="457200" y="457200"/>
+            <a:ext cx="137160" cy="365760"/>
+          </a:xfrm>
+          <a:prstGeom prst="rect">
+            <a:avLst/>
+          </a:prstGeom>
+          <a:solidFill>
+            <a:srgbClr val="F5B700"/>
+          </a:solidFill>
+          <a:ln w="12700">
+            <a:solidFill>
+              <a:srgbClr val="F5B700"/>
+            </a:solidFill>
+            <a:prstDash val="solid"/>
+          </a:ln>
+        </p:spPr>
+      </p:sp>
+      <p:sp>
+        <p:nvSpPr>
+          <p:cNvPr id="3" name="Text 1"/>
+          <p:cNvSpPr txBox="1"/>
+          <p:nvPr/>
+        </p:nvSpPr>
+        <p:spPr>
+          <a:xfrm>
+            <a:off x="685800" y="457200"/>
+            <a:ext cx="7315200" cy="365760"/>
+          </a:xfrm>
+          <a:prstGeom prst="rect">
+            <a:avLst/>
+          </a:prstGeom>
+          <a:noFill/>
+          <a:ln/>
+        </p:spPr>
+        <p:txBody>
+          <a:bodyPr wrap="square" lIns="0" tIns="0" rIns="0" bIns="0" rtlCol="0" anchor="ctr"/>
+          <a:lstStyle/>
+          <a:p>
+            <a:pPr indent="0" marL="0">
+              <a:buNone/>
+            </a:pPr>
+            <a:r>
+              <a:rPr lang="en-US" sz="1100" b="1" spc="400" kern="0" dirty="0">
+                <a:solidFill>
+                  <a:srgbClr val="003876"/>
+                </a:solidFill>
+                <a:latin typeface="Calibri" pitchFamily="34" charset="0"/>
+                <a:ea typeface="Calibri" pitchFamily="34" charset="-122"/>
+                <a:cs typeface="Calibri" pitchFamily="34" charset="-120"/>
+              </a:rPr>
+              <a:t>09  ·  PASSAGE À L'ÉCHELLE</a:t>
+            </a:r>
+            <a:endParaRPr lang="en-US" sz="1100" dirty="0"/>
+          </a:p>
+        </p:txBody>
+      </p:sp>
+      <p:sp>
+        <p:nvSpPr>
+          <p:cNvPr id="4" name="Text 2"/>
+          <p:cNvSpPr txBox="1"/>
+          <p:nvPr/>
+        </p:nvSpPr>
+        <p:spPr>
+          <a:xfrm>
+            <a:off x="457200" y="914400"/>
+            <a:ext cx="11247120" cy="731520"/>
+          </a:xfrm>
+          <a:prstGeom prst="rect">
+            <a:avLst/>
+          </a:prstGeom>
+          <a:noFill/>
+          <a:ln/>
+        </p:spPr>
+        <p:txBody>
+          <a:bodyPr wrap="square" lIns="0" tIns="0" rIns="0" bIns="0" rtlCol="0" anchor="ctr"/>
+          <a:lstStyle/>
+          <a:p>
+            <a:pPr indent="0" marL="0">
+              <a:buNone/>
+            </a:pPr>
+            <a:r>
+              <a:rPr lang="en-US" sz="3200" b="1" dirty="0">
+                <a:solidFill>
+                  <a:srgbClr val="003876"/>
+                </a:solidFill>
+                <a:latin typeface="Cambria" pitchFamily="34" charset="0"/>
+                <a:ea typeface="Cambria" pitchFamily="34" charset="-122"/>
+                <a:cs typeface="Cambria" pitchFamily="34" charset="-120"/>
+              </a:rPr>
+              <a:t>D'un usage individuel à un actif d'équipe</a:t>
+            </a:r>
+            <a:endParaRPr lang="en-US" sz="3200" dirty="0"/>
+          </a:p>
+        </p:txBody>
+      </p:sp>
+      <p:sp>
+        <p:nvSpPr>
+          <p:cNvPr id="5" name="Shape 3"/>
+          <p:cNvSpPr/>
+          <p:nvPr/>
+        </p:nvSpPr>
+        <p:spPr>
+          <a:xfrm>
+            <a:off x="457200" y="1965960"/>
+            <a:ext cx="3657600" cy="4297680"/>
+          </a:xfrm>
+          <a:prstGeom prst="rect">
+            <a:avLst/>
+          </a:prstGeom>
+          <a:solidFill>
+            <a:srgbClr val="FFFFFF"/>
+          </a:solidFill>
+          <a:ln w="25400">
+            <a:solidFill>
+              <a:srgbClr val="003876"/>
+            </a:solidFill>
+            <a:prstDash val="solid"/>
+          </a:ln>
+        </p:spPr>
+      </p:sp>
+      <p:sp>
+        <p:nvSpPr>
+          <p:cNvPr id="6" name="Text 4"/>
+          <p:cNvSpPr txBox="1"/>
+          <p:nvPr/>
+        </p:nvSpPr>
+        <p:spPr>
+          <a:xfrm>
+            <a:off x="731520" y="2331720"/>
+            <a:ext cx="3108960" cy="365760"/>
+          </a:xfrm>
+          <a:prstGeom prst="rect">
+            <a:avLst/>
+          </a:prstGeom>
+          <a:noFill/>
+          <a:ln/>
+        </p:spPr>
+        <p:txBody>
+          <a:bodyPr wrap="square" lIns="0" tIns="0" rIns="0" bIns="0" rtlCol="0" anchor="ctr"/>
+          <a:lstStyle/>
+          <a:p>
+            <a:pPr indent="0" marL="0">
+              <a:buNone/>
+            </a:pPr>
+            <a:r>
+              <a:rPr lang="en-US" sz="1100" b="1" spc="400" kern="0" dirty="0">
+                <a:solidFill>
+                  <a:srgbClr val="F5B700"/>
+                </a:solidFill>
+                <a:latin typeface="Calibri" pitchFamily="34" charset="0"/>
+                <a:ea typeface="Calibri" pitchFamily="34" charset="-122"/>
+                <a:cs typeface="Calibri" pitchFamily="34" charset="-120"/>
+              </a:rPr>
+              <a:t>BIBLIOTHÈQUE</a:t>
+            </a:r>
+            <a:endParaRPr lang="en-US" sz="1100" dirty="0"/>
+          </a:p>
+        </p:txBody>
+      </p:sp>
+      <p:sp>
+        <p:nvSpPr>
+          <p:cNvPr id="7" name="Shape 5"/>
+          <p:cNvSpPr/>
+          <p:nvPr/>
+        </p:nvSpPr>
+        <p:spPr>
+          <a:xfrm>
+            <a:off x="731520" y="2743200"/>
+            <a:ext cx="457200" cy="45720"/>
+          </a:xfrm>
+          <a:prstGeom prst="rect">
+            <a:avLst/>
+          </a:prstGeom>
+          <a:solidFill>
+            <a:srgbClr val="F5B700"/>
+          </a:solidFill>
+          <a:ln w="12700">
+            <a:solidFill>
+              <a:srgbClr val="F5B700"/>
+            </a:solidFill>
+            <a:prstDash val="solid"/>
+          </a:ln>
+        </p:spPr>
+      </p:sp>
+      <p:sp>
+        <p:nvSpPr>
+          <p:cNvPr id="8" name="Text 6"/>
+          <p:cNvSpPr txBox="1"/>
+          <p:nvPr/>
+        </p:nvSpPr>
+        <p:spPr>
+          <a:xfrm>
+            <a:off x="731520" y="2880360"/>
+            <a:ext cx="3108960" cy="822960"/>
+          </a:xfrm>
+          <a:prstGeom prst="rect">
+            <a:avLst/>
+          </a:prstGeom>
+          <a:noFill/>
+          <a:ln/>
+        </p:spPr>
+        <p:txBody>
+          <a:bodyPr wrap="square" lIns="0" tIns="0" rIns="0" bIns="0" rtlCol="0" anchor="ctr"/>
+          <a:lstStyle/>
+          <a:p>
+            <a:pPr indent="0" marL="0">
+              <a:buNone/>
+            </a:pPr>
+            <a:r>
+              <a:rPr lang="en-US" sz="2200" b="1" dirty="0">
+                <a:solidFill>
+                  <a:srgbClr val="003876"/>
+                </a:solidFill>
+                <a:latin typeface="Cambria" pitchFamily="34" charset="0"/>
+                <a:ea typeface="Cambria" pitchFamily="34" charset="-122"/>
+                <a:cs typeface="Cambria" pitchFamily="34" charset="-120"/>
+              </a:rPr>
+              <a:t>Prompts partagés</a:t>
+            </a:r>
+            <a:endParaRPr lang="en-US" sz="2200" dirty="0"/>
+          </a:p>
+        </p:txBody>
+      </p:sp>
+      <p:sp>
+        <p:nvSpPr>
+          <p:cNvPr id="9" name="Text 7"/>
+          <p:cNvSpPr txBox="1"/>
+          <p:nvPr/>
+        </p:nvSpPr>
+        <p:spPr>
+          <a:xfrm>
+            <a:off x="731520" y="3977640"/>
+            <a:ext cx="3108960" cy="2103120"/>
+          </a:xfrm>
+          <a:prstGeom prst="rect">
+            <a:avLst/>
+          </a:prstGeom>
+          <a:noFill/>
+          <a:ln/>
+        </p:spPr>
+        <p:txBody>
+          <a:bodyPr wrap="square" lIns="0" tIns="0" rIns="0" bIns="0" rtlCol="0" anchor="ctr"/>
+          <a:lstStyle/>
+          <a:p>
+            <a:pPr indent="0" marL="0">
+              <a:buNone/>
+            </a:pPr>
+            <a:r>
+              <a:rPr lang="en-US" sz="1300" dirty="0">
+                <a:solidFill>
+                  <a:srgbClr val="3A4552"/>
+                </a:solidFill>
+                <a:latin typeface="Calibri" pitchFamily="34" charset="0"/>
+                <a:ea typeface="Calibri" pitchFamily="34" charset="-122"/>
+                <a:cs typeface="Calibri" pitchFamily="34" charset="-120"/>
+              </a:rPr>
+              <a:t>Catalogue de prompts optimisés par domaine — CICS, Kafka, Spring Boot, VOP, SEPA. Réutilisables, améliorables collectivement.</a:t>
+            </a:r>
+            <a:endParaRPr lang="en-US" sz="1300" dirty="0"/>
+          </a:p>
+        </p:txBody>
+      </p:sp>
+      <p:sp>
+        <p:nvSpPr>
+          <p:cNvPr id="10" name="Shape 8"/>
+          <p:cNvSpPr/>
+          <p:nvPr/>
+        </p:nvSpPr>
+        <p:spPr>
+          <a:xfrm>
+            <a:off x="4361688" y="1965960"/>
+            <a:ext cx="3657600" cy="4297680"/>
+          </a:xfrm>
+          <a:prstGeom prst="rect">
+            <a:avLst/>
+          </a:prstGeom>
+          <a:solidFill>
+            <a:srgbClr val="FFFFFF"/>
+          </a:solidFill>
+          <a:ln w="25400">
+            <a:solidFill>
+              <a:srgbClr val="003876"/>
+            </a:solidFill>
+            <a:prstDash val="solid"/>
+          </a:ln>
+        </p:spPr>
+      </p:sp>
+      <p:sp>
+        <p:nvSpPr>
+          <p:cNvPr id="11" name="Text 9"/>
+          <p:cNvSpPr txBox="1"/>
+          <p:nvPr/>
+        </p:nvSpPr>
+        <p:spPr>
+          <a:xfrm>
+            <a:off x="4636008" y="2331720"/>
+            <a:ext cx="3108960" cy="365760"/>
+          </a:xfrm>
+          <a:prstGeom prst="rect">
+            <a:avLst/>
+          </a:prstGeom>
+          <a:noFill/>
+          <a:ln/>
+        </p:spPr>
+        <p:txBody>
+          <a:bodyPr wrap="square" lIns="0" tIns="0" rIns="0" bIns="0" rtlCol="0" anchor="ctr"/>
+          <a:lstStyle/>
+          <a:p>
+            <a:pPr indent="0" marL="0">
+              <a:buNone/>
+            </a:pPr>
+            <a:r>
+              <a:rPr lang="en-US" sz="1100" b="1" spc="400" kern="0" dirty="0">
+                <a:solidFill>
+                  <a:srgbClr val="F5B700"/>
+                </a:solidFill>
+                <a:latin typeface="Calibri" pitchFamily="34" charset="0"/>
+                <a:ea typeface="Calibri" pitchFamily="34" charset="-122"/>
+                <a:cs typeface="Calibri" pitchFamily="34" charset="-120"/>
+              </a:rPr>
+              <a:t>CORPUS</a:t>
+            </a:r>
+            <a:endParaRPr lang="en-US" sz="1100" dirty="0"/>
+          </a:p>
+        </p:txBody>
+      </p:sp>
+      <p:sp>
+        <p:nvSpPr>
+          <p:cNvPr id="12" name="Shape 10"/>
+          <p:cNvSpPr/>
+          <p:nvPr/>
+        </p:nvSpPr>
+        <p:spPr>
+          <a:xfrm>
+            <a:off x="4636008" y="2743200"/>
+            <a:ext cx="457200" cy="45720"/>
+          </a:xfrm>
+          <a:prstGeom prst="rect">
+            <a:avLst/>
+          </a:prstGeom>
+          <a:solidFill>
+            <a:srgbClr val="F5B700"/>
+          </a:solidFill>
+          <a:ln w="12700">
+            <a:solidFill>
+              <a:srgbClr val="F5B700"/>
+            </a:solidFill>
+            <a:prstDash val="solid"/>
+          </a:ln>
+        </p:spPr>
+      </p:sp>
+      <p:sp>
+        <p:nvSpPr>
+          <p:cNvPr id="13" name="Text 11"/>
+          <p:cNvSpPr txBox="1"/>
+          <p:nvPr/>
+        </p:nvSpPr>
+        <p:spPr>
+          <a:xfrm>
+            <a:off x="4636008" y="2880360"/>
+            <a:ext cx="3108960" cy="822960"/>
+          </a:xfrm>
+          <a:prstGeom prst="rect">
+            <a:avLst/>
+          </a:prstGeom>
+          <a:noFill/>
+          <a:ln/>
+        </p:spPr>
+        <p:txBody>
+          <a:bodyPr wrap="square" lIns="0" tIns="0" rIns="0" bIns="0" rtlCol="0" anchor="ctr"/>
+          <a:lstStyle/>
+          <a:p>
+            <a:pPr indent="0" marL="0">
+              <a:buNone/>
+            </a:pPr>
+            <a:r>
+              <a:rPr lang="en-US" sz="2200" b="1" dirty="0">
+                <a:solidFill>
+                  <a:srgbClr val="003876"/>
+                </a:solidFill>
+                <a:latin typeface="Cambria" pitchFamily="34" charset="0"/>
+                <a:ea typeface="Cambria" pitchFamily="34" charset="-122"/>
+                <a:cs typeface="Cambria" pitchFamily="34" charset="-120"/>
+              </a:rPr>
+              <a:t>Fiches versionnées</a:t>
+            </a:r>
+            <a:endParaRPr lang="en-US" sz="2200" dirty="0"/>
+          </a:p>
+        </p:txBody>
+      </p:sp>
+      <p:sp>
+        <p:nvSpPr>
+          <p:cNvPr id="14" name="Text 12"/>
+          <p:cNvSpPr txBox="1"/>
+          <p:nvPr/>
+        </p:nvSpPr>
+        <p:spPr>
+          <a:xfrm>
+            <a:off x="4636008" y="3977640"/>
+            <a:ext cx="3108960" cy="2103120"/>
+          </a:xfrm>
+          <a:prstGeom prst="rect">
+            <a:avLst/>
+          </a:prstGeom>
+          <a:noFill/>
+          <a:ln/>
+        </p:spPr>
+        <p:txBody>
+          <a:bodyPr wrap="square" lIns="0" tIns="0" rIns="0" bIns="0" rtlCol="0" anchor="ctr"/>
+          <a:lstStyle/>
+          <a:p>
+            <a:pPr indent="0" marL="0">
+              <a:buNone/>
+            </a:pPr>
+            <a:r>
+              <a:rPr lang="en-US" sz="1300" dirty="0">
+                <a:solidFill>
+                  <a:srgbClr val="3A4552"/>
+                </a:solidFill>
+                <a:latin typeface="Calibri" pitchFamily="34" charset="0"/>
+                <a:ea typeface="Calibri" pitchFamily="34" charset="-122"/>
+                <a:cs typeface="Calibri" pitchFamily="34" charset="-120"/>
+              </a:rPr>
+              <a:t>Repository Git interne de fiches Markdown. Recherche transverse, mise à jour continue, capitalisation entre équipes.</a:t>
+            </a:r>
+            <a:endParaRPr lang="en-US" sz="1300" dirty="0"/>
+          </a:p>
+        </p:txBody>
+      </p:sp>
+      <p:sp>
+        <p:nvSpPr>
+          <p:cNvPr id="15" name="Shape 13"/>
+          <p:cNvSpPr/>
+          <p:nvPr/>
+        </p:nvSpPr>
+        <p:spPr>
+          <a:xfrm>
+            <a:off x="8275320" y="1965960"/>
+            <a:ext cx="3657600" cy="4297680"/>
+          </a:xfrm>
+          <a:prstGeom prst="rect">
+            <a:avLst/>
+          </a:prstGeom>
+          <a:solidFill>
+            <a:srgbClr val="FFFFFF"/>
+          </a:solidFill>
+          <a:ln w="25400">
+            <a:solidFill>
+              <a:srgbClr val="003876"/>
+            </a:solidFill>
+            <a:prstDash val="solid"/>
+          </a:ln>
+        </p:spPr>
+      </p:sp>
+      <p:sp>
+        <p:nvSpPr>
+          <p:cNvPr id="16" name="Text 14"/>
+          <p:cNvSpPr txBox="1"/>
+          <p:nvPr/>
+        </p:nvSpPr>
+        <p:spPr>
+          <a:xfrm>
+            <a:off x="8549640" y="2331720"/>
+            <a:ext cx="3108960" cy="365760"/>
+          </a:xfrm>
+          <a:prstGeom prst="rect">
+            <a:avLst/>
+          </a:prstGeom>
+          <a:noFill/>
+          <a:ln/>
+        </p:spPr>
+        <p:txBody>
+          <a:bodyPr wrap="square" lIns="0" tIns="0" rIns="0" bIns="0" rtlCol="0" anchor="ctr"/>
+          <a:lstStyle/>
+          <a:p>
+            <a:pPr indent="0" marL="0">
+              <a:buNone/>
+            </a:pPr>
+            <a:r>
+              <a:rPr lang="en-US" sz="1100" b="1" spc="400" kern="0" dirty="0">
+                <a:solidFill>
+                  <a:srgbClr val="F5B700"/>
+                </a:solidFill>
+                <a:latin typeface="Calibri" pitchFamily="34" charset="0"/>
+                <a:ea typeface="Calibri" pitchFamily="34" charset="-122"/>
+                <a:cs typeface="Calibri" pitchFamily="34" charset="-120"/>
+              </a:rPr>
+              <a:t>ONBOARDING</a:t>
+            </a:r>
+            <a:endParaRPr lang="en-US" sz="1100" dirty="0"/>
+          </a:p>
+        </p:txBody>
+      </p:sp>
+      <p:sp>
+        <p:nvSpPr>
+          <p:cNvPr id="17" name="Shape 15"/>
+          <p:cNvSpPr/>
+          <p:nvPr/>
+        </p:nvSpPr>
+        <p:spPr>
+          <a:xfrm>
+            <a:off x="8549640" y="2743200"/>
+            <a:ext cx="457200" cy="45720"/>
+          </a:xfrm>
+          <a:prstGeom prst="rect">
+            <a:avLst/>
+          </a:prstGeom>
+          <a:solidFill>
+            <a:srgbClr val="F5B700"/>
+          </a:solidFill>
+          <a:ln w="12700">
+            <a:solidFill>
+              <a:srgbClr val="F5B700"/>
+            </a:solidFill>
+            <a:prstDash val="solid"/>
+          </a:ln>
+        </p:spPr>
+      </p:sp>
+      <p:sp>
+        <p:nvSpPr>
+          <p:cNvPr id="18" name="Text 16"/>
+          <p:cNvSpPr txBox="1"/>
+          <p:nvPr/>
+        </p:nvSpPr>
+        <p:spPr>
+          <a:xfrm>
+            <a:off x="8549640" y="2880360"/>
+            <a:ext cx="3108960" cy="822960"/>
+          </a:xfrm>
+          <a:prstGeom prst="rect">
+            <a:avLst/>
+          </a:prstGeom>
+          <a:noFill/>
+          <a:ln/>
+        </p:spPr>
+        <p:txBody>
+          <a:bodyPr wrap="square" lIns="0" tIns="0" rIns="0" bIns="0" rtlCol="0" anchor="ctr"/>
+          <a:lstStyle/>
+          <a:p>
+            <a:pPr indent="0" marL="0">
+              <a:buNone/>
+            </a:pPr>
+            <a:r>
+              <a:rPr lang="en-US" sz="2200" b="1" dirty="0">
+                <a:solidFill>
+                  <a:srgbClr val="003876"/>
+                </a:solidFill>
+                <a:latin typeface="Cambria" pitchFamily="34" charset="0"/>
+                <a:ea typeface="Cambria" pitchFamily="34" charset="-122"/>
+                <a:cs typeface="Cambria" pitchFamily="34" charset="-120"/>
+              </a:rPr>
+              <a:t>Accélération nouveaux</a:t>
+            </a:r>
+            <a:endParaRPr lang="en-US" sz="2200" dirty="0"/>
+          </a:p>
+        </p:txBody>
+      </p:sp>
+      <p:sp>
+        <p:nvSpPr>
+          <p:cNvPr id="19" name="Text 17"/>
+          <p:cNvSpPr txBox="1"/>
+          <p:nvPr/>
+        </p:nvSpPr>
+        <p:spPr>
+          <a:xfrm>
+            <a:off x="8549640" y="3977640"/>
+            <a:ext cx="3108960" cy="2103120"/>
+          </a:xfrm>
+          <a:prstGeom prst="rect">
+            <a:avLst/>
+          </a:prstGeom>
+          <a:noFill/>
+          <a:ln/>
+        </p:spPr>
+        <p:txBody>
+          <a:bodyPr wrap="square" lIns="0" tIns="0" rIns="0" bIns="0" rtlCol="0" anchor="ctr"/>
+          <a:lstStyle/>
+          <a:p>
+            <a:pPr indent="0" marL="0">
+              <a:buNone/>
+            </a:pPr>
+            <a:r>
+              <a:rPr lang="en-US" sz="1300" dirty="0">
+                <a:solidFill>
+                  <a:srgbClr val="3A4552"/>
+                </a:solidFill>
+                <a:latin typeface="Calibri" pitchFamily="34" charset="0"/>
+                <a:ea typeface="Calibri" pitchFamily="34" charset="-122"/>
+                <a:cs typeface="Calibri" pitchFamily="34" charset="-120"/>
+              </a:rPr>
+              <a:t>Un nouvel arrivant accède au corpus dès le premier jour. Réduction significative du délai de montée en compétence.</a:t>
+            </a:r>
+            <a:endParaRPr lang="en-US" sz="1300" dirty="0"/>
+          </a:p>
+        </p:txBody>
+      </p:sp>
+      <p:sp>
+        <p:nvSpPr>
+          <p:cNvPr id="20" name="Shape 18"/>
+          <p:cNvSpPr/>
+          <p:nvPr/>
+        </p:nvSpPr>
+        <p:spPr>
+          <a:xfrm>
+            <a:off x="0" y="6629400"/>
+            <a:ext cx="12161520" cy="18288"/>
+          </a:xfrm>
+          <a:prstGeom prst="rect">
+            <a:avLst/>
+          </a:prstGeom>
+          <a:solidFill>
+            <a:srgbClr val="E5E8EC"/>
+          </a:solidFill>
+          <a:ln w="12700">
+            <a:solidFill>
+              <a:srgbClr val="E5E8EC"/>
+            </a:solidFill>
+            <a:prstDash val="solid"/>
+          </a:ln>
+        </p:spPr>
+      </p:sp>
+      <p:sp>
+        <p:nvSpPr>
+          <p:cNvPr id="21" name="Text 19"/>
+          <p:cNvSpPr txBox="1"/>
+          <p:nvPr/>
+        </p:nvSpPr>
+        <p:spPr>
+          <a:xfrm>
+            <a:off x="457200" y="6656832"/>
+            <a:ext cx="8229600" cy="228600"/>
+          </a:xfrm>
+          <a:prstGeom prst="rect">
+            <a:avLst/>
+          </a:prstGeom>
+          <a:noFill/>
+          <a:ln/>
+        </p:spPr>
+        <p:txBody>
+          <a:bodyPr wrap="square" lIns="0" tIns="0" rIns="0" bIns="0" rtlCol="0" anchor="ctr"/>
+          <a:lstStyle/>
+          <a:p>
+            <a:pPr indent="0" marL="0">
+              <a:buNone/>
+            </a:pPr>
+            <a:r>
+              <a:rPr lang="en-US" sz="900" dirty="0">
+                <a:solidFill>
+                  <a:srgbClr val="6B7683"/>
+                </a:solidFill>
+                <a:latin typeface="Calibri" pitchFamily="34" charset="0"/>
+                <a:ea typeface="Calibri" pitchFamily="34" charset="-122"/>
+                <a:cs typeface="Calibri" pitchFamily="34" charset="-120"/>
+              </a:rPr>
+              <a:t>LCL — Paiements  •  Méthode d'apprentissage augmentée par IA</a:t>
+            </a:r>
+            <a:endParaRPr lang="en-US" sz="900" dirty="0"/>
+          </a:p>
+        </p:txBody>
+      </p:sp>
+      <p:sp>
+        <p:nvSpPr>
+          <p:cNvPr id="22" name="Text 20"/>
+          <p:cNvSpPr txBox="1"/>
+          <p:nvPr/>
+        </p:nvSpPr>
+        <p:spPr>
+          <a:xfrm>
+            <a:off x="11247120" y="6656832"/>
+            <a:ext cx="548640" cy="228600"/>
+          </a:xfrm>
+          <a:prstGeom prst="rect">
+            <a:avLst/>
+          </a:prstGeom>
+          <a:noFill/>
+          <a:ln/>
+        </p:spPr>
+        <p:txBody>
+          <a:bodyPr wrap="square" lIns="0" tIns="0" rIns="0" bIns="0" rtlCol="0" anchor="ctr"/>
+          <a:lstStyle/>
+          <a:p>
+            <a:pPr algn="r" indent="0" marL="0">
+              <a:buNone/>
+            </a:pPr>
+            <a:r>
+              <a:rPr lang="en-US" sz="900" dirty="0">
+                <a:solidFill>
+                  <a:srgbClr val="6B7683"/>
+                </a:solidFill>
+                <a:latin typeface="Calibri" pitchFamily="34" charset="0"/>
+                <a:ea typeface="Calibri" pitchFamily="34" charset="-122"/>
+                <a:cs typeface="Calibri" pitchFamily="34" charset="-120"/>
+              </a:rPr>
+              <a:t>10 / 11</a:t>
+            </a:r>
+            <a:endParaRPr lang="en-US" sz="900" dirty="0"/>
+          </a:p>
+        </p:txBody>
+      </p:sp>
+    </p:spTree>
+  </p:cSld>
+  <p:clrMapOvr>
+    <a:masterClrMapping/>
+  </p:clrMapOvr>
+</p:sld>
+</file>
+
+<file path=ppt/slides/slide11.xml><?xml version="1.0" encoding="utf-8"?>
+<p:sld xmlns:a="http://schemas.openxmlformats.org/drawingml/2006/main" xmlns:r="http://schemas.openxmlformats.org/officeDocument/2006/relationships" xmlns:p="http://schemas.openxmlformats.org/presentationml/2006/main">
+  <p:cSld name="Slide 11">
+    <p:bg>
+      <p:bgPr>
+        <a:solidFill>
           <a:srgbClr val="003876"/>
         </a:solidFill>
       </p:bgPr>
@@ -2534,7 +3362,7 @@
         <p:spPr>
           <a:xfrm>
             <a:off x="685800" y="457200"/>
-            <a:ext cx="5486400" cy="365760"/>
+            <a:ext cx="7315200" cy="365760"/>
           </a:xfrm>
           <a:prstGeom prst="rect">
             <a:avLst/>
@@ -3266,7 +4094,7 @@
                 <a:ea typeface="Calibri" pitchFamily="34" charset="-122"/>
                 <a:cs typeface="Calibri" pitchFamily="34" charset="-120"/>
               </a:rPr>
-              <a:t>2 / 10</a:t>
+              <a:t>2 / 11</a:t>
             </a:r>
             <a:endParaRPr lang="en-US" sz="900" dirty="0"/>
           </a:p>
@@ -3338,7 +4166,7 @@
         <p:spPr>
           <a:xfrm>
             <a:off x="685800" y="457200"/>
-            <a:ext cx="5486400" cy="365760"/>
+            <a:ext cx="7315200" cy="365760"/>
           </a:xfrm>
           <a:prstGeom prst="rect">
             <a:avLst/>
@@ -4392,7 +5220,7 @@
                 <a:ea typeface="Calibri" pitchFamily="34" charset="-122"/>
                 <a:cs typeface="Calibri" pitchFamily="34" charset="-120"/>
               </a:rPr>
-              <a:t>3 / 10</a:t>
+              <a:t>3 / 11</a:t>
             </a:r>
             <a:endParaRPr lang="en-US" sz="900" dirty="0"/>
           </a:p>
@@ -4464,7 +5292,7 @@
         <p:spPr>
           <a:xfrm>
             <a:off x="685800" y="457200"/>
-            <a:ext cx="5486400" cy="365760"/>
+            <a:ext cx="7315200" cy="365760"/>
           </a:xfrm>
           <a:prstGeom prst="rect">
             <a:avLst/>
@@ -5298,7 +6126,7 @@
                 <a:ea typeface="Calibri" pitchFamily="34" charset="-122"/>
                 <a:cs typeface="Calibri" pitchFamily="34" charset="-120"/>
               </a:rPr>
-              <a:t>4 / 10</a:t>
+              <a:t>4 / 11</a:t>
             </a:r>
             <a:endParaRPr lang="en-US" sz="900" dirty="0"/>
           </a:p>
@@ -5370,7 +6198,7 @@
         <p:spPr>
           <a:xfrm>
             <a:off x="685800" y="457200"/>
-            <a:ext cx="5486400" cy="365760"/>
+            <a:ext cx="7315200" cy="365760"/>
           </a:xfrm>
           <a:prstGeom prst="rect">
             <a:avLst/>
@@ -5394,7 +6222,7 @@
                 <a:ea typeface="Calibri" pitchFamily="34" charset="-122"/>
                 <a:cs typeface="Calibri" pitchFamily="34" charset="-120"/>
               </a:rPr>
-              <a:t>04  ·  PROMPT</a:t>
+              <a:t>04  ·  STRUCTURE DU PROMPT</a:t>
             </a:r>
             <a:endParaRPr lang="en-US" sz="1100" dirty="0"/>
           </a:p>
@@ -5433,7 +6261,7 @@
                 <a:ea typeface="Cambria" pitchFamily="34" charset="-122"/>
                 <a:cs typeface="Cambria" pitchFamily="34" charset="-120"/>
               </a:rPr>
-              <a:t>Anatomie d'un prompt qui produit une fiche exploitable</a:t>
+              <a:t>Six blocs qui font un prompt professionnel</a:t>
             </a:r>
             <a:endParaRPr lang="en-US" sz="3200" dirty="0"/>
           </a:p>
@@ -5447,18 +6275,18 @@
         </p:nvSpPr>
         <p:spPr>
           <a:xfrm>
-            <a:off x="457200" y="1920240"/>
-            <a:ext cx="109728" cy="731520"/>
+            <a:off x="457200" y="1874520"/>
+            <a:ext cx="640080" cy="1463040"/>
           </a:xfrm>
           <a:prstGeom prst="rect">
             <a:avLst/>
           </a:prstGeom>
           <a:solidFill>
-            <a:srgbClr val="F5B700"/>
+            <a:srgbClr val="003876"/>
           </a:solidFill>
           <a:ln w="12700">
             <a:solidFill>
-              <a:srgbClr val="F5B700"/>
+              <a:srgbClr val="003876"/>
             </a:solidFill>
             <a:prstDash val="solid"/>
           </a:ln>
@@ -5472,96 +6300,57 @@
         </p:nvSpPr>
         <p:spPr>
           <a:xfrm>
-            <a:off x="685800" y="1920240"/>
-            <a:ext cx="5029200" cy="320040"/>
-          </a:xfrm>
-          <a:prstGeom prst="rect">
-            <a:avLst/>
-          </a:prstGeom>
-          <a:noFill/>
-          <a:ln/>
-        </p:spPr>
-        <p:txBody>
-          <a:bodyPr wrap="square" lIns="0" tIns="0" rIns="0" bIns="0" rtlCol="0" anchor="ctr"/>
-          <a:lstStyle/>
-          <a:p>
-            <a:pPr indent="0" marL="0">
-              <a:buNone/>
-            </a:pPr>
-            <a:r>
-              <a:rPr lang="en-US" sz="1200" b="1" spc="300" kern="0" dirty="0">
-                <a:solidFill>
-                  <a:srgbClr val="003876"/>
-                </a:solidFill>
-                <a:latin typeface="Calibri" pitchFamily="34" charset="0"/>
-                <a:ea typeface="Calibri" pitchFamily="34" charset="-122"/>
-                <a:cs typeface="Calibri" pitchFamily="34" charset="-120"/>
-              </a:rPr>
-              <a:t>RÔLE</a:t>
-            </a:r>
-            <a:endParaRPr lang="en-US" sz="1200" dirty="0"/>
-          </a:p>
-        </p:txBody>
-      </p:sp>
-      <p:sp>
-        <p:nvSpPr>
-          <p:cNvPr id="7" name="Text 5"/>
-          <p:cNvSpPr txBox="1"/>
-          <p:nvPr/>
-        </p:nvSpPr>
-        <p:spPr>
-          <a:xfrm>
-            <a:off x="685800" y="2212848"/>
-            <a:ext cx="5029200" cy="457200"/>
-          </a:xfrm>
-          <a:prstGeom prst="rect">
-            <a:avLst/>
-          </a:prstGeom>
-          <a:noFill/>
-          <a:ln/>
-        </p:spPr>
-        <p:txBody>
-          <a:bodyPr wrap="square" lIns="0" tIns="0" rIns="0" bIns="0" rtlCol="0" anchor="ctr"/>
-          <a:lstStyle/>
-          <a:p>
-            <a:pPr indent="0" marL="0">
-              <a:buNone/>
-            </a:pPr>
-            <a:r>
-              <a:rPr lang="en-US" sz="1200" dirty="0">
-                <a:solidFill>
-                  <a:srgbClr val="3A4552"/>
-                </a:solidFill>
-                <a:latin typeface="Calibri" pitchFamily="34" charset="0"/>
-                <a:ea typeface="Calibri" pitchFamily="34" charset="-122"/>
-                <a:cs typeface="Calibri" pitchFamily="34" charset="-120"/>
-              </a:rPr>
-              <a:t>Expert senior ciblé et contextualisé (ex. architecte CICS/Java en banque FR).</a:t>
-            </a:r>
-            <a:endParaRPr lang="en-US" sz="1200" dirty="0"/>
-          </a:p>
-        </p:txBody>
-      </p:sp>
-      <p:sp>
-        <p:nvSpPr>
-          <p:cNvPr id="8" name="Shape 6"/>
+            <a:off x="457200" y="1965960"/>
+            <a:ext cx="640080" cy="457200"/>
+          </a:xfrm>
+          <a:prstGeom prst="rect">
+            <a:avLst/>
+          </a:prstGeom>
+          <a:noFill/>
+          <a:ln/>
+        </p:spPr>
+        <p:txBody>
+          <a:bodyPr wrap="square" lIns="0" tIns="0" rIns="0" bIns="0" rtlCol="0" anchor="ctr"/>
+          <a:lstStyle/>
+          <a:p>
+            <a:pPr algn="ctr" indent="0" marL="0">
+              <a:buNone/>
+            </a:pPr>
+            <a:r>
+              <a:rPr lang="en-US" sz="1800" b="1" dirty="0">
+                <a:solidFill>
+                  <a:srgbClr val="F5B700"/>
+                </a:solidFill>
+                <a:latin typeface="Cambria" pitchFamily="34" charset="0"/>
+                <a:ea typeface="Cambria" pitchFamily="34" charset="-122"/>
+                <a:cs typeface="Cambria" pitchFamily="34" charset="-120"/>
+              </a:rPr>
+              <a:t>01</a:t>
+            </a:r>
+            <a:endParaRPr lang="en-US" sz="1800" dirty="0"/>
+          </a:p>
+        </p:txBody>
+      </p:sp>
+      <p:sp>
+        <p:nvSpPr>
+          <p:cNvPr id="7" name="Shape 5"/>
           <p:cNvSpPr/>
           <p:nvPr/>
         </p:nvSpPr>
         <p:spPr>
           <a:xfrm>
-            <a:off x="457200" y="2788920"/>
-            <a:ext cx="109728" cy="731520"/>
+            <a:off x="1097280" y="1874520"/>
+            <a:ext cx="4754880" cy="1463040"/>
           </a:xfrm>
           <a:prstGeom prst="rect">
             <a:avLst/>
           </a:prstGeom>
           <a:solidFill>
-            <a:srgbClr val="F5B700"/>
+            <a:srgbClr val="F8F9FB"/>
           </a:solidFill>
           <a:ln w="12700">
             <a:solidFill>
-              <a:srgbClr val="F5B700"/>
+              <a:srgbClr val="E5E8EC"/>
             </a:solidFill>
             <a:prstDash val="solid"/>
           </a:ln>
@@ -5569,38 +6358,77 @@
       </p:sp>
       <p:sp>
         <p:nvSpPr>
+          <p:cNvPr id="8" name="Text 6"/>
+          <p:cNvSpPr txBox="1"/>
+          <p:nvPr/>
+        </p:nvSpPr>
+        <p:spPr>
+          <a:xfrm>
+            <a:off x="1280160" y="2011680"/>
+            <a:ext cx="4480560" cy="320040"/>
+          </a:xfrm>
+          <a:prstGeom prst="rect">
+            <a:avLst/>
+          </a:prstGeom>
+          <a:noFill/>
+          <a:ln/>
+        </p:spPr>
+        <p:txBody>
+          <a:bodyPr wrap="square" lIns="0" tIns="0" rIns="0" bIns="0" rtlCol="0" anchor="ctr"/>
+          <a:lstStyle/>
+          <a:p>
+            <a:pPr indent="0" marL="0">
+              <a:buNone/>
+            </a:pPr>
+            <a:r>
+              <a:rPr lang="en-US" sz="1200" b="1" spc="300" kern="0" dirty="0">
+                <a:solidFill>
+                  <a:srgbClr val="003876"/>
+                </a:solidFill>
+                <a:latin typeface="Calibri" pitchFamily="34" charset="0"/>
+                <a:ea typeface="Calibri" pitchFamily="34" charset="-122"/>
+                <a:cs typeface="Calibri" pitchFamily="34" charset="-120"/>
+              </a:rPr>
+              <a:t>RÔLE</a:t>
+            </a:r>
+            <a:endParaRPr lang="en-US" sz="1200" dirty="0"/>
+          </a:p>
+        </p:txBody>
+      </p:sp>
+      <p:sp>
+        <p:nvSpPr>
           <p:cNvPr id="9" name="Text 7"/>
           <p:cNvSpPr txBox="1"/>
           <p:nvPr/>
         </p:nvSpPr>
         <p:spPr>
           <a:xfrm>
-            <a:off x="685800" y="2788920"/>
-            <a:ext cx="5029200" cy="320040"/>
-          </a:xfrm>
-          <a:prstGeom prst="rect">
-            <a:avLst/>
-          </a:prstGeom>
-          <a:noFill/>
-          <a:ln/>
-        </p:spPr>
-        <p:txBody>
-          <a:bodyPr wrap="square" lIns="0" tIns="0" rIns="0" bIns="0" rtlCol="0" anchor="ctr"/>
-          <a:lstStyle/>
-          <a:p>
-            <a:pPr indent="0" marL="0">
-              <a:buNone/>
-            </a:pPr>
-            <a:r>
-              <a:rPr lang="en-US" sz="1200" b="1" spc="300" kern="0" dirty="0">
-                <a:solidFill>
-                  <a:srgbClr val="003876"/>
-                </a:solidFill>
-                <a:latin typeface="Calibri" pitchFamily="34" charset="0"/>
-                <a:ea typeface="Calibri" pitchFamily="34" charset="-122"/>
-                <a:cs typeface="Calibri" pitchFamily="34" charset="-120"/>
-              </a:rPr>
-              <a:t>CONTEXTE</a:t>
+            <a:off x="1280160" y="2331720"/>
+            <a:ext cx="4480560" cy="365760"/>
+          </a:xfrm>
+          <a:prstGeom prst="rect">
+            <a:avLst/>
+          </a:prstGeom>
+          <a:noFill/>
+          <a:ln/>
+        </p:spPr>
+        <p:txBody>
+          <a:bodyPr wrap="square" lIns="0" tIns="0" rIns="0" bIns="0" rtlCol="0" anchor="ctr"/>
+          <a:lstStyle/>
+          <a:p>
+            <a:pPr indent="0" marL="0">
+              <a:buNone/>
+            </a:pPr>
+            <a:r>
+              <a:rPr lang="en-US" sz="1200" dirty="0">
+                <a:solidFill>
+                  <a:srgbClr val="3A4552"/>
+                </a:solidFill>
+                <a:latin typeface="Calibri" pitchFamily="34" charset="0"/>
+                <a:ea typeface="Calibri" pitchFamily="34" charset="-122"/>
+                <a:cs typeface="Calibri" pitchFamily="34" charset="-120"/>
+              </a:rPr>
+              <a:t>Définit l'expertise et le registre attendu.</a:t>
             </a:r>
             <a:endParaRPr lang="en-US" sz="1200" dirty="0"/>
           </a:p>
@@ -5614,34 +6442,34 @@
         </p:nvSpPr>
         <p:spPr>
           <a:xfrm>
-            <a:off x="685800" y="3081528"/>
-            <a:ext cx="5029200" cy="457200"/>
-          </a:xfrm>
-          <a:prstGeom prst="rect">
-            <a:avLst/>
-          </a:prstGeom>
-          <a:noFill/>
-          <a:ln/>
-        </p:spPr>
-        <p:txBody>
-          <a:bodyPr wrap="square" lIns="0" tIns="0" rIns="0" bIns="0" rtlCol="0" anchor="ctr"/>
-          <a:lstStyle/>
-          <a:p>
-            <a:pPr indent="0" marL="0">
-              <a:buNone/>
-            </a:pPr>
-            <a:r>
-              <a:rPr lang="en-US" sz="1200" dirty="0">
-                <a:solidFill>
-                  <a:srgbClr val="3A4552"/>
-                </a:solidFill>
-                <a:latin typeface="Calibri" pitchFamily="34" charset="0"/>
-                <a:ea typeface="Calibri" pitchFamily="34" charset="-122"/>
-                <a:cs typeface="Calibri" pitchFamily="34" charset="-120"/>
-              </a:rPr>
-              <a:t>Environnement métier, contraintes réglementaires, stack existante.</a:t>
-            </a:r>
-            <a:endParaRPr lang="en-US" sz="1200" dirty="0"/>
+            <a:off x="1280160" y="2743200"/>
+            <a:ext cx="4480560" cy="502920"/>
+          </a:xfrm>
+          <a:prstGeom prst="rect">
+            <a:avLst/>
+          </a:prstGeom>
+          <a:noFill/>
+          <a:ln/>
+        </p:spPr>
+        <p:txBody>
+          <a:bodyPr wrap="square" lIns="0" tIns="0" rIns="0" bIns="0" rtlCol="0" anchor="ctr"/>
+          <a:lstStyle/>
+          <a:p>
+            <a:pPr indent="0" marL="0">
+              <a:buNone/>
+            </a:pPr>
+            <a:r>
+              <a:rPr lang="en-US" sz="1100" i="1" dirty="0">
+                <a:solidFill>
+                  <a:srgbClr val="6B7683"/>
+                </a:solidFill>
+                <a:latin typeface="Calibri" pitchFamily="34" charset="0"/>
+                <a:ea typeface="Calibri" pitchFamily="34" charset="-122"/>
+                <a:cs typeface="Calibri" pitchFamily="34" charset="-120"/>
+              </a:rPr>
+              <a:t>Ex : « Architecte senior CICS/Java en banque française. »</a:t>
+            </a:r>
+            <a:endParaRPr lang="en-US" sz="1100" dirty="0"/>
           </a:p>
         </p:txBody>
       </p:sp>
@@ -5653,18 +6481,18 @@
         </p:nvSpPr>
         <p:spPr>
           <a:xfrm>
-            <a:off x="457200" y="3657600"/>
-            <a:ext cx="109728" cy="731520"/>
+            <a:off x="457200" y="3429000"/>
+            <a:ext cx="640080" cy="1463040"/>
           </a:xfrm>
           <a:prstGeom prst="rect">
             <a:avLst/>
           </a:prstGeom>
           <a:solidFill>
-            <a:srgbClr val="F5B700"/>
+            <a:srgbClr val="003876"/>
           </a:solidFill>
           <a:ln w="12700">
             <a:solidFill>
-              <a:srgbClr val="F5B700"/>
+              <a:srgbClr val="003876"/>
             </a:solidFill>
             <a:prstDash val="solid"/>
           </a:ln>
@@ -5678,96 +6506,57 @@
         </p:nvSpPr>
         <p:spPr>
           <a:xfrm>
-            <a:off x="685800" y="3657600"/>
-            <a:ext cx="5029200" cy="320040"/>
-          </a:xfrm>
-          <a:prstGeom prst="rect">
-            <a:avLst/>
-          </a:prstGeom>
-          <a:noFill/>
-          <a:ln/>
-        </p:spPr>
-        <p:txBody>
-          <a:bodyPr wrap="square" lIns="0" tIns="0" rIns="0" bIns="0" rtlCol="0" anchor="ctr"/>
-          <a:lstStyle/>
-          <a:p>
-            <a:pPr indent="0" marL="0">
-              <a:buNone/>
-            </a:pPr>
-            <a:r>
-              <a:rPr lang="en-US" sz="1200" b="1" spc="300" kern="0" dirty="0">
-                <a:solidFill>
-                  <a:srgbClr val="003876"/>
-                </a:solidFill>
-                <a:latin typeface="Calibri" pitchFamily="34" charset="0"/>
-                <a:ea typeface="Calibri" pitchFamily="34" charset="-122"/>
-                <a:cs typeface="Calibri" pitchFamily="34" charset="-120"/>
-              </a:rPr>
-              <a:t>RÈGLES DE FIDÉLITÉ</a:t>
-            </a:r>
-            <a:endParaRPr lang="en-US" sz="1200" dirty="0"/>
-          </a:p>
-        </p:txBody>
-      </p:sp>
-      <p:sp>
-        <p:nvSpPr>
-          <p:cNvPr id="13" name="Text 11"/>
-          <p:cNvSpPr txBox="1"/>
-          <p:nvPr/>
-        </p:nvSpPr>
-        <p:spPr>
-          <a:xfrm>
-            <a:off x="685800" y="3950208"/>
-            <a:ext cx="5029200" cy="457200"/>
-          </a:xfrm>
-          <a:prstGeom prst="rect">
-            <a:avLst/>
-          </a:prstGeom>
-          <a:noFill/>
-          <a:ln/>
-        </p:spPr>
-        <p:txBody>
-          <a:bodyPr wrap="square" lIns="0" tIns="0" rIns="0" bIns="0" rtlCol="0" anchor="ctr"/>
-          <a:lstStyle/>
-          <a:p>
-            <a:pPr indent="0" marL="0">
-              <a:buNone/>
-            </a:pPr>
-            <a:r>
-              <a:rPr lang="en-US" sz="1200" dirty="0">
-                <a:solidFill>
-                  <a:srgbClr val="3A4552"/>
-                </a:solidFill>
-                <a:latin typeface="Calibri" pitchFamily="34" charset="0"/>
-                <a:ea typeface="Calibri" pitchFamily="34" charset="-122"/>
-                <a:cs typeface="Calibri" pitchFamily="34" charset="-120"/>
-              </a:rPr>
-              <a:t>Interdiction d'inventer, citations obligatoires, gestion des sources contradictoires.</a:t>
-            </a:r>
-            <a:endParaRPr lang="en-US" sz="1200" dirty="0"/>
-          </a:p>
-        </p:txBody>
-      </p:sp>
-      <p:sp>
-        <p:nvSpPr>
-          <p:cNvPr id="14" name="Shape 12"/>
+            <a:off x="457200" y="3520440"/>
+            <a:ext cx="640080" cy="457200"/>
+          </a:xfrm>
+          <a:prstGeom prst="rect">
+            <a:avLst/>
+          </a:prstGeom>
+          <a:noFill/>
+          <a:ln/>
+        </p:spPr>
+        <p:txBody>
+          <a:bodyPr wrap="square" lIns="0" tIns="0" rIns="0" bIns="0" rtlCol="0" anchor="ctr"/>
+          <a:lstStyle/>
+          <a:p>
+            <a:pPr algn="ctr" indent="0" marL="0">
+              <a:buNone/>
+            </a:pPr>
+            <a:r>
+              <a:rPr lang="en-US" sz="1800" b="1" dirty="0">
+                <a:solidFill>
+                  <a:srgbClr val="F5B700"/>
+                </a:solidFill>
+                <a:latin typeface="Cambria" pitchFamily="34" charset="0"/>
+                <a:ea typeface="Cambria" pitchFamily="34" charset="-122"/>
+                <a:cs typeface="Cambria" pitchFamily="34" charset="-120"/>
+              </a:rPr>
+              <a:t>02</a:t>
+            </a:r>
+            <a:endParaRPr lang="en-US" sz="1800" dirty="0"/>
+          </a:p>
+        </p:txBody>
+      </p:sp>
+      <p:sp>
+        <p:nvSpPr>
+          <p:cNvPr id="13" name="Shape 11"/>
           <p:cNvSpPr/>
           <p:nvPr/>
         </p:nvSpPr>
         <p:spPr>
           <a:xfrm>
-            <a:off x="457200" y="4526280"/>
-            <a:ext cx="109728" cy="731520"/>
+            <a:off x="1097280" y="3429000"/>
+            <a:ext cx="4754880" cy="1463040"/>
           </a:xfrm>
           <a:prstGeom prst="rect">
             <a:avLst/>
           </a:prstGeom>
           <a:solidFill>
-            <a:srgbClr val="F5B700"/>
+            <a:srgbClr val="F8F9FB"/>
           </a:solidFill>
           <a:ln w="12700">
             <a:solidFill>
-              <a:srgbClr val="F5B700"/>
+              <a:srgbClr val="E5E8EC"/>
             </a:solidFill>
             <a:prstDash val="solid"/>
           </a:ln>
@@ -5775,38 +6564,77 @@
       </p:sp>
       <p:sp>
         <p:nvSpPr>
+          <p:cNvPr id="14" name="Text 12"/>
+          <p:cNvSpPr txBox="1"/>
+          <p:nvPr/>
+        </p:nvSpPr>
+        <p:spPr>
+          <a:xfrm>
+            <a:off x="1280160" y="3566160"/>
+            <a:ext cx="4480560" cy="320040"/>
+          </a:xfrm>
+          <a:prstGeom prst="rect">
+            <a:avLst/>
+          </a:prstGeom>
+          <a:noFill/>
+          <a:ln/>
+        </p:spPr>
+        <p:txBody>
+          <a:bodyPr wrap="square" lIns="0" tIns="0" rIns="0" bIns="0" rtlCol="0" anchor="ctr"/>
+          <a:lstStyle/>
+          <a:p>
+            <a:pPr indent="0" marL="0">
+              <a:buNone/>
+            </a:pPr>
+            <a:r>
+              <a:rPr lang="en-US" sz="1200" b="1" spc="300" kern="0" dirty="0">
+                <a:solidFill>
+                  <a:srgbClr val="003876"/>
+                </a:solidFill>
+                <a:latin typeface="Calibri" pitchFamily="34" charset="0"/>
+                <a:ea typeface="Calibri" pitchFamily="34" charset="-122"/>
+                <a:cs typeface="Calibri" pitchFamily="34" charset="-120"/>
+              </a:rPr>
+              <a:t>CONTEXTE</a:t>
+            </a:r>
+            <a:endParaRPr lang="en-US" sz="1200" dirty="0"/>
+          </a:p>
+        </p:txBody>
+      </p:sp>
+      <p:sp>
+        <p:nvSpPr>
           <p:cNvPr id="15" name="Text 13"/>
           <p:cNvSpPr txBox="1"/>
           <p:nvPr/>
         </p:nvSpPr>
         <p:spPr>
           <a:xfrm>
-            <a:off x="685800" y="4526280"/>
-            <a:ext cx="5029200" cy="320040"/>
-          </a:xfrm>
-          <a:prstGeom prst="rect">
-            <a:avLst/>
-          </a:prstGeom>
-          <a:noFill/>
-          <a:ln/>
-        </p:spPr>
-        <p:txBody>
-          <a:bodyPr wrap="square" lIns="0" tIns="0" rIns="0" bIns="0" rtlCol="0" anchor="ctr"/>
-          <a:lstStyle/>
-          <a:p>
-            <a:pPr indent="0" marL="0">
-              <a:buNone/>
-            </a:pPr>
-            <a:r>
-              <a:rPr lang="en-US" sz="1200" b="1" spc="300" kern="0" dirty="0">
-                <a:solidFill>
-                  <a:srgbClr val="003876"/>
-                </a:solidFill>
-                <a:latin typeface="Calibri" pitchFamily="34" charset="0"/>
-                <a:ea typeface="Calibri" pitchFamily="34" charset="-122"/>
-                <a:cs typeface="Calibri" pitchFamily="34" charset="-120"/>
-              </a:rPr>
-              <a:t>STRUCTURE DE SORTIE</a:t>
+            <a:off x="1280160" y="3886200"/>
+            <a:ext cx="4480560" cy="365760"/>
+          </a:xfrm>
+          <a:prstGeom prst="rect">
+            <a:avLst/>
+          </a:prstGeom>
+          <a:noFill/>
+          <a:ln/>
+        </p:spPr>
+        <p:txBody>
+          <a:bodyPr wrap="square" lIns="0" tIns="0" rIns="0" bIns="0" rtlCol="0" anchor="ctr"/>
+          <a:lstStyle/>
+          <a:p>
+            <a:pPr indent="0" marL="0">
+              <a:buNone/>
+            </a:pPr>
+            <a:r>
+              <a:rPr lang="en-US" sz="1200" dirty="0">
+                <a:solidFill>
+                  <a:srgbClr val="3A4552"/>
+                </a:solidFill>
+                <a:latin typeface="Calibri" pitchFamily="34" charset="0"/>
+                <a:ea typeface="Calibri" pitchFamily="34" charset="-122"/>
+                <a:cs typeface="Calibri" pitchFamily="34" charset="-120"/>
+              </a:rPr>
+              <a:t>Environnement métier, stack, contraintes.</a:t>
             </a:r>
             <a:endParaRPr lang="en-US" sz="1200" dirty="0"/>
           </a:p>
@@ -5820,34 +6648,34 @@
         </p:nvSpPr>
         <p:spPr>
           <a:xfrm>
-            <a:off x="685800" y="4818888"/>
-            <a:ext cx="5029200" cy="457200"/>
-          </a:xfrm>
-          <a:prstGeom prst="rect">
-            <a:avLst/>
-          </a:prstGeom>
-          <a:noFill/>
-          <a:ln/>
-        </p:spPr>
-        <p:txBody>
-          <a:bodyPr wrap="square" lIns="0" tIns="0" rIns="0" bIns="0" rtlCol="0" anchor="ctr"/>
-          <a:lstStyle/>
-          <a:p>
-            <a:pPr indent="0" marL="0">
-              <a:buNone/>
-            </a:pPr>
-            <a:r>
-              <a:rPr lang="en-US" sz="1200" dirty="0">
-                <a:solidFill>
-                  <a:srgbClr val="3A4552"/>
-                </a:solidFill>
-                <a:latin typeface="Calibri" pitchFamily="34" charset="0"/>
-                <a:ea typeface="Calibri" pitchFamily="34" charset="-122"/>
-                <a:cs typeface="Calibri" pitchFamily="34" charset="-120"/>
-              </a:rPr>
-              <a:t>Sections imposées en Markdown : synthèse, concepts, pièges, cheat-sheet.</a:t>
-            </a:r>
-            <a:endParaRPr lang="en-US" sz="1200" dirty="0"/>
+            <a:off x="1280160" y="4297680"/>
+            <a:ext cx="4480560" cy="502920"/>
+          </a:xfrm>
+          <a:prstGeom prst="rect">
+            <a:avLst/>
+          </a:prstGeom>
+          <a:noFill/>
+          <a:ln/>
+        </p:spPr>
+        <p:txBody>
+          <a:bodyPr wrap="square" lIns="0" tIns="0" rIns="0" bIns="0" rtlCol="0" anchor="ctr"/>
+          <a:lstStyle/>
+          <a:p>
+            <a:pPr indent="0" marL="0">
+              <a:buNone/>
+            </a:pPr>
+            <a:r>
+              <a:rPr lang="en-US" sz="1100" i="1" dirty="0">
+                <a:solidFill>
+                  <a:srgbClr val="6B7683"/>
+                </a:solidFill>
+                <a:latin typeface="Calibri" pitchFamily="34" charset="0"/>
+                <a:ea typeface="Calibri" pitchFamily="34" charset="-122"/>
+                <a:cs typeface="Calibri" pitchFamily="34" charset="-120"/>
+              </a:rPr>
+              <a:t>Ex : « Domaine Paiements SEPA, régulé PCI-DSS. »</a:t>
+            </a:r>
+            <a:endParaRPr lang="en-US" sz="1100" dirty="0"/>
           </a:p>
         </p:txBody>
       </p:sp>
@@ -5859,18 +6687,18 @@
         </p:nvSpPr>
         <p:spPr>
           <a:xfrm>
-            <a:off x="457200" y="5394960"/>
-            <a:ext cx="109728" cy="731520"/>
+            <a:off x="457200" y="4983480"/>
+            <a:ext cx="640080" cy="1463040"/>
           </a:xfrm>
           <a:prstGeom prst="rect">
             <a:avLst/>
           </a:prstGeom>
           <a:solidFill>
-            <a:srgbClr val="F5B700"/>
+            <a:srgbClr val="003876"/>
           </a:solidFill>
           <a:ln w="12700">
             <a:solidFill>
-              <a:srgbClr val="F5B700"/>
+              <a:srgbClr val="003876"/>
             </a:solidFill>
             <a:prstDash val="solid"/>
           </a:ln>
@@ -5884,96 +6712,57 @@
         </p:nvSpPr>
         <p:spPr>
           <a:xfrm>
-            <a:off x="685800" y="5394960"/>
-            <a:ext cx="5029200" cy="320040"/>
-          </a:xfrm>
-          <a:prstGeom prst="rect">
-            <a:avLst/>
-          </a:prstGeom>
-          <a:noFill/>
-          <a:ln/>
-        </p:spPr>
-        <p:txBody>
-          <a:bodyPr wrap="square" lIns="0" tIns="0" rIns="0" bIns="0" rtlCol="0" anchor="ctr"/>
-          <a:lstStyle/>
-          <a:p>
-            <a:pPr indent="0" marL="0">
-              <a:buNone/>
-            </a:pPr>
-            <a:r>
-              <a:rPr lang="en-US" sz="1200" b="1" spc="300" kern="0" dirty="0">
-                <a:solidFill>
-                  <a:srgbClr val="003876"/>
-                </a:solidFill>
-                <a:latin typeface="Calibri" pitchFamily="34" charset="0"/>
-                <a:ea typeface="Calibri" pitchFamily="34" charset="-122"/>
-                <a:cs typeface="Calibri" pitchFamily="34" charset="-120"/>
-              </a:rPr>
-              <a:t>CONTRAINTES DE STYLE</a:t>
-            </a:r>
-            <a:endParaRPr lang="en-US" sz="1200" dirty="0"/>
-          </a:p>
-        </p:txBody>
-      </p:sp>
-      <p:sp>
-        <p:nvSpPr>
-          <p:cNvPr id="19" name="Text 17"/>
-          <p:cNvSpPr txBox="1"/>
-          <p:nvPr/>
-        </p:nvSpPr>
-        <p:spPr>
-          <a:xfrm>
-            <a:off x="685800" y="5687568"/>
-            <a:ext cx="5029200" cy="457200"/>
-          </a:xfrm>
-          <a:prstGeom prst="rect">
-            <a:avLst/>
-          </a:prstGeom>
-          <a:noFill/>
-          <a:ln/>
-        </p:spPr>
-        <p:txBody>
-          <a:bodyPr wrap="square" lIns="0" tIns="0" rIns="0" bIns="0" rtlCol="0" anchor="ctr"/>
-          <a:lstStyle/>
-          <a:p>
-            <a:pPr indent="0" marL="0">
-              <a:buNone/>
-            </a:pPr>
-            <a:r>
-              <a:rPr lang="en-US" sz="1200" dirty="0">
-                <a:solidFill>
-                  <a:srgbClr val="3A4552"/>
-                </a:solidFill>
-                <a:latin typeface="Calibri" pitchFamily="34" charset="0"/>
-                <a:ea typeface="Calibri" pitchFamily="34" charset="-122"/>
-                <a:cs typeface="Calibri" pitchFamily="34" charset="-120"/>
-              </a:rPr>
-              <a:t>Densité, français technique, code en blocs, acronymes développés une fois.</a:t>
-            </a:r>
-            <a:endParaRPr lang="en-US" sz="1200" dirty="0"/>
-          </a:p>
-        </p:txBody>
-      </p:sp>
-      <p:sp>
-        <p:nvSpPr>
-          <p:cNvPr id="20" name="Shape 18"/>
+            <a:off x="457200" y="5074920"/>
+            <a:ext cx="640080" cy="457200"/>
+          </a:xfrm>
+          <a:prstGeom prst="rect">
+            <a:avLst/>
+          </a:prstGeom>
+          <a:noFill/>
+          <a:ln/>
+        </p:spPr>
+        <p:txBody>
+          <a:bodyPr wrap="square" lIns="0" tIns="0" rIns="0" bIns="0" rtlCol="0" anchor="ctr"/>
+          <a:lstStyle/>
+          <a:p>
+            <a:pPr algn="ctr" indent="0" marL="0">
+              <a:buNone/>
+            </a:pPr>
+            <a:r>
+              <a:rPr lang="en-US" sz="1800" b="1" dirty="0">
+                <a:solidFill>
+                  <a:srgbClr val="F5B700"/>
+                </a:solidFill>
+                <a:latin typeface="Cambria" pitchFamily="34" charset="0"/>
+                <a:ea typeface="Cambria" pitchFamily="34" charset="-122"/>
+                <a:cs typeface="Cambria" pitchFamily="34" charset="-120"/>
+              </a:rPr>
+              <a:t>03</a:t>
+            </a:r>
+            <a:endParaRPr lang="en-US" sz="1800" dirty="0"/>
+          </a:p>
+        </p:txBody>
+      </p:sp>
+      <p:sp>
+        <p:nvSpPr>
+          <p:cNvPr id="19" name="Shape 17"/>
           <p:cNvSpPr/>
           <p:nvPr/>
         </p:nvSpPr>
         <p:spPr>
           <a:xfrm>
-            <a:off x="6400800" y="1920240"/>
-            <a:ext cx="5303520" cy="4480560"/>
+            <a:off x="1097280" y="4983480"/>
+            <a:ext cx="4754880" cy="1463040"/>
           </a:xfrm>
           <a:prstGeom prst="rect">
             <a:avLst/>
           </a:prstGeom>
           <a:solidFill>
-            <a:srgbClr val="002456"/>
+            <a:srgbClr val="F8F9FB"/>
           </a:solidFill>
           <a:ln w="12700">
             <a:solidFill>
-              <a:srgbClr val="002456"/>
+              <a:srgbClr val="E5E8EC"/>
             </a:solidFill>
             <a:prstDash val="solid"/>
           </a:ln>
@@ -5981,392 +6770,742 @@
       </p:sp>
       <p:sp>
         <p:nvSpPr>
+          <p:cNvPr id="20" name="Text 18"/>
+          <p:cNvSpPr txBox="1"/>
+          <p:nvPr/>
+        </p:nvSpPr>
+        <p:spPr>
+          <a:xfrm>
+            <a:off x="1280160" y="5120640"/>
+            <a:ext cx="4480560" cy="320040"/>
+          </a:xfrm>
+          <a:prstGeom prst="rect">
+            <a:avLst/>
+          </a:prstGeom>
+          <a:noFill/>
+          <a:ln/>
+        </p:spPr>
+        <p:txBody>
+          <a:bodyPr wrap="square" lIns="0" tIns="0" rIns="0" bIns="0" rtlCol="0" anchor="ctr"/>
+          <a:lstStyle/>
+          <a:p>
+            <a:pPr indent="0" marL="0">
+              <a:buNone/>
+            </a:pPr>
+            <a:r>
+              <a:rPr lang="en-US" sz="1200" b="1" spc="300" kern="0" dirty="0">
+                <a:solidFill>
+                  <a:srgbClr val="003876"/>
+                </a:solidFill>
+                <a:latin typeface="Calibri" pitchFamily="34" charset="0"/>
+                <a:ea typeface="Calibri" pitchFamily="34" charset="-122"/>
+                <a:cs typeface="Calibri" pitchFamily="34" charset="-120"/>
+              </a:rPr>
+              <a:t>MISSION</a:t>
+            </a:r>
+            <a:endParaRPr lang="en-US" sz="1200" dirty="0"/>
+          </a:p>
+        </p:txBody>
+      </p:sp>
+      <p:sp>
+        <p:nvSpPr>
           <p:cNvPr id="21" name="Text 19"/>
           <p:cNvSpPr txBox="1"/>
           <p:nvPr/>
         </p:nvSpPr>
         <p:spPr>
           <a:xfrm>
-            <a:off x="6675120" y="2057400"/>
-            <a:ext cx="4754880" cy="274320"/>
-          </a:xfrm>
-          <a:prstGeom prst="rect">
-            <a:avLst/>
-          </a:prstGeom>
-          <a:noFill/>
-          <a:ln/>
-        </p:spPr>
-        <p:txBody>
-          <a:bodyPr wrap="square" lIns="0" tIns="0" rIns="0" bIns="0" rtlCol="0" anchor="ctr"/>
-          <a:lstStyle/>
-          <a:p>
-            <a:pPr indent="0" marL="0">
-              <a:buNone/>
-            </a:pPr>
-            <a:r>
-              <a:rPr lang="en-US" sz="1000" b="1" spc="300" kern="0" dirty="0">
+            <a:off x="1280160" y="5440680"/>
+            <a:ext cx="4480560" cy="365760"/>
+          </a:xfrm>
+          <a:prstGeom prst="rect">
+            <a:avLst/>
+          </a:prstGeom>
+          <a:noFill/>
+          <a:ln/>
+        </p:spPr>
+        <p:txBody>
+          <a:bodyPr wrap="square" lIns="0" tIns="0" rIns="0" bIns="0" rtlCol="0" anchor="ctr"/>
+          <a:lstStyle/>
+          <a:p>
+            <a:pPr indent="0" marL="0">
+              <a:buNone/>
+            </a:pPr>
+            <a:r>
+              <a:rPr lang="en-US" sz="1200" dirty="0">
+                <a:solidFill>
+                  <a:srgbClr val="3A4552"/>
+                </a:solidFill>
+                <a:latin typeface="Calibri" pitchFamily="34" charset="0"/>
+                <a:ea typeface="Calibri" pitchFamily="34" charset="-122"/>
+                <a:cs typeface="Calibri" pitchFamily="34" charset="-120"/>
+              </a:rPr>
+              <a:t>Action précise attendue, source à traiter.</a:t>
+            </a:r>
+            <a:endParaRPr lang="en-US" sz="1200" dirty="0"/>
+          </a:p>
+        </p:txBody>
+      </p:sp>
+      <p:sp>
+        <p:nvSpPr>
+          <p:cNvPr id="22" name="Text 20"/>
+          <p:cNvSpPr txBox="1"/>
+          <p:nvPr/>
+        </p:nvSpPr>
+        <p:spPr>
+          <a:xfrm>
+            <a:off x="1280160" y="5852160"/>
+            <a:ext cx="4480560" cy="502920"/>
+          </a:xfrm>
+          <a:prstGeom prst="rect">
+            <a:avLst/>
+          </a:prstGeom>
+          <a:noFill/>
+          <a:ln/>
+        </p:spPr>
+        <p:txBody>
+          <a:bodyPr wrap="square" lIns="0" tIns="0" rIns="0" bIns="0" rtlCol="0" anchor="ctr"/>
+          <a:lstStyle/>
+          <a:p>
+            <a:pPr indent="0" marL="0">
+              <a:buNone/>
+            </a:pPr>
+            <a:r>
+              <a:rPr lang="en-US" sz="1100" i="1" dirty="0">
+                <a:solidFill>
+                  <a:srgbClr val="6B7683"/>
+                </a:solidFill>
+                <a:latin typeface="Calibri" pitchFamily="34" charset="0"/>
+                <a:ea typeface="Calibri" pitchFamily="34" charset="-122"/>
+                <a:cs typeface="Calibri" pitchFamily="34" charset="-120"/>
+              </a:rPr>
+              <a:t>Ex : « Lis ce Redpaper et produis une fiche. »</a:t>
+            </a:r>
+            <a:endParaRPr lang="en-US" sz="1100" dirty="0"/>
+          </a:p>
+        </p:txBody>
+      </p:sp>
+      <p:sp>
+        <p:nvSpPr>
+          <p:cNvPr id="23" name="Shape 21"/>
+          <p:cNvSpPr/>
+          <p:nvPr/>
+        </p:nvSpPr>
+        <p:spPr>
+          <a:xfrm>
+            <a:off x="6309360" y="1874520"/>
+            <a:ext cx="640080" cy="1463040"/>
+          </a:xfrm>
+          <a:prstGeom prst="rect">
+            <a:avLst/>
+          </a:prstGeom>
+          <a:solidFill>
+            <a:srgbClr val="003876"/>
+          </a:solidFill>
+          <a:ln w="12700">
+            <a:solidFill>
+              <a:srgbClr val="003876"/>
+            </a:solidFill>
+            <a:prstDash val="solid"/>
+          </a:ln>
+        </p:spPr>
+      </p:sp>
+      <p:sp>
+        <p:nvSpPr>
+          <p:cNvPr id="24" name="Text 22"/>
+          <p:cNvSpPr txBox="1"/>
+          <p:nvPr/>
+        </p:nvSpPr>
+        <p:spPr>
+          <a:xfrm>
+            <a:off x="6309360" y="1965960"/>
+            <a:ext cx="640080" cy="457200"/>
+          </a:xfrm>
+          <a:prstGeom prst="rect">
+            <a:avLst/>
+          </a:prstGeom>
+          <a:noFill/>
+          <a:ln/>
+        </p:spPr>
+        <p:txBody>
+          <a:bodyPr wrap="square" lIns="0" tIns="0" rIns="0" bIns="0" rtlCol="0" anchor="ctr"/>
+          <a:lstStyle/>
+          <a:p>
+            <a:pPr algn="ctr" indent="0" marL="0">
+              <a:buNone/>
+            </a:pPr>
+            <a:r>
+              <a:rPr lang="en-US" sz="1800" b="1" dirty="0">
                 <a:solidFill>
                   <a:srgbClr val="F5B700"/>
                 </a:solidFill>
-                <a:latin typeface="Calibri" pitchFamily="34" charset="0"/>
-                <a:ea typeface="Calibri" pitchFamily="34" charset="-122"/>
-                <a:cs typeface="Calibri" pitchFamily="34" charset="-120"/>
-              </a:rPr>
-              <a:t>EXTRAIT — prompt réel</a:t>
-            </a:r>
-            <a:endParaRPr lang="en-US" sz="1000" dirty="0"/>
-          </a:p>
-        </p:txBody>
-      </p:sp>
-      <p:sp>
-        <p:nvSpPr>
-          <p:cNvPr id="22" name="Text 20"/>
-          <p:cNvSpPr txBox="1"/>
-          <p:nvPr/>
-        </p:nvSpPr>
-        <p:spPr>
-          <a:xfrm>
-            <a:off x="6675120" y="2423160"/>
-            <a:ext cx="4754880" cy="3886200"/>
-          </a:xfrm>
-          <a:prstGeom prst="rect">
-            <a:avLst/>
-          </a:prstGeom>
-          <a:noFill/>
-          <a:ln/>
-        </p:spPr>
-        <p:txBody>
-          <a:bodyPr wrap="square" lIns="0" tIns="0" rIns="0" bIns="0" rtlCol="0" anchor="t"/>
-          <a:lstStyle/>
-          <a:p>
-            <a:pPr indent="0" marL="0">
-              <a:buNone/>
-            </a:pPr>
-            <a:r>
-              <a:rPr lang="en-US" sz="1100" dirty="0">
-                <a:solidFill>
-                  <a:srgbClr val="CADCFC"/>
-                </a:solidFill>
-                <a:latin typeface="Courier New" pitchFamily="34" charset="0"/>
-                <a:ea typeface="Courier New" pitchFamily="34" charset="-122"/>
-                <a:cs typeface="Courier New" pitchFamily="34" charset="-120"/>
-              </a:rPr>
-              <a:t># RÔLE</a:t>
+                <a:latin typeface="Cambria" pitchFamily="34" charset="0"/>
+                <a:ea typeface="Cambria" pitchFamily="34" charset="-122"/>
+                <a:cs typeface="Cambria" pitchFamily="34" charset="-120"/>
+              </a:rPr>
+              <a:t>04</a:t>
+            </a:r>
+            <a:endParaRPr lang="en-US" sz="1800" dirty="0"/>
+          </a:p>
+        </p:txBody>
+      </p:sp>
+      <p:sp>
+        <p:nvSpPr>
+          <p:cNvPr id="25" name="Shape 23"/>
+          <p:cNvSpPr/>
+          <p:nvPr/>
+        </p:nvSpPr>
+        <p:spPr>
+          <a:xfrm>
+            <a:off x="6949440" y="1874520"/>
+            <a:ext cx="4754880" cy="1463040"/>
+          </a:xfrm>
+          <a:prstGeom prst="rect">
+            <a:avLst/>
+          </a:prstGeom>
+          <a:solidFill>
+            <a:srgbClr val="F8F9FB"/>
+          </a:solidFill>
+          <a:ln w="12700">
+            <a:solidFill>
+              <a:srgbClr val="E5E8EC"/>
+            </a:solidFill>
+            <a:prstDash val="solid"/>
+          </a:ln>
+        </p:spPr>
+      </p:sp>
+      <p:sp>
+        <p:nvSpPr>
+          <p:cNvPr id="26" name="Text 24"/>
+          <p:cNvSpPr txBox="1"/>
+          <p:nvPr/>
+        </p:nvSpPr>
+        <p:spPr>
+          <a:xfrm>
+            <a:off x="7132320" y="2011680"/>
+            <a:ext cx="4480560" cy="320040"/>
+          </a:xfrm>
+          <a:prstGeom prst="rect">
+            <a:avLst/>
+          </a:prstGeom>
+          <a:noFill/>
+          <a:ln/>
+        </p:spPr>
+        <p:txBody>
+          <a:bodyPr wrap="square" lIns="0" tIns="0" rIns="0" bIns="0" rtlCol="0" anchor="ctr"/>
+          <a:lstStyle/>
+          <a:p>
+            <a:pPr indent="0" marL="0">
+              <a:buNone/>
+            </a:pPr>
+            <a:r>
+              <a:rPr lang="en-US" sz="1200" b="1" spc="300" kern="0" dirty="0">
+                <a:solidFill>
+                  <a:srgbClr val="003876"/>
+                </a:solidFill>
+                <a:latin typeface="Calibri" pitchFamily="34" charset="0"/>
+                <a:ea typeface="Calibri" pitchFamily="34" charset="-122"/>
+                <a:cs typeface="Calibri" pitchFamily="34" charset="-120"/>
+              </a:rPr>
+              <a:t>RÈGLES DE FIDÉLITÉ</a:t>
+            </a:r>
+            <a:endParaRPr lang="en-US" sz="1200" dirty="0"/>
+          </a:p>
+        </p:txBody>
+      </p:sp>
+      <p:sp>
+        <p:nvSpPr>
+          <p:cNvPr id="27" name="Text 25"/>
+          <p:cNvSpPr txBox="1"/>
+          <p:nvPr/>
+        </p:nvSpPr>
+        <p:spPr>
+          <a:xfrm>
+            <a:off x="7132320" y="2331720"/>
+            <a:ext cx="4480560" cy="365760"/>
+          </a:xfrm>
+          <a:prstGeom prst="rect">
+            <a:avLst/>
+          </a:prstGeom>
+          <a:noFill/>
+          <a:ln/>
+        </p:spPr>
+        <p:txBody>
+          <a:bodyPr wrap="square" lIns="0" tIns="0" rIns="0" bIns="0" rtlCol="0" anchor="ctr"/>
+          <a:lstStyle/>
+          <a:p>
+            <a:pPr indent="0" marL="0">
+              <a:buNone/>
+            </a:pPr>
+            <a:r>
+              <a:rPr lang="en-US" sz="1200" dirty="0">
+                <a:solidFill>
+                  <a:srgbClr val="3A4552"/>
+                </a:solidFill>
+                <a:latin typeface="Calibri" pitchFamily="34" charset="0"/>
+                <a:ea typeface="Calibri" pitchFamily="34" charset="-122"/>
+                <a:cs typeface="Calibri" pitchFamily="34" charset="-120"/>
+              </a:rPr>
+              <a:t>Anti-hallucination, citations, sources.</a:t>
+            </a:r>
+            <a:endParaRPr lang="en-US" sz="1200" dirty="0"/>
+          </a:p>
+        </p:txBody>
+      </p:sp>
+      <p:sp>
+        <p:nvSpPr>
+          <p:cNvPr id="28" name="Text 26"/>
+          <p:cNvSpPr txBox="1"/>
+          <p:nvPr/>
+        </p:nvSpPr>
+        <p:spPr>
+          <a:xfrm>
+            <a:off x="7132320" y="2743200"/>
+            <a:ext cx="4480560" cy="502920"/>
+          </a:xfrm>
+          <a:prstGeom prst="rect">
+            <a:avLst/>
+          </a:prstGeom>
+          <a:noFill/>
+          <a:ln/>
+        </p:spPr>
+        <p:txBody>
+          <a:bodyPr wrap="square" lIns="0" tIns="0" rIns="0" bIns="0" rtlCol="0" anchor="ctr"/>
+          <a:lstStyle/>
+          <a:p>
+            <a:pPr indent="0" marL="0">
+              <a:buNone/>
+            </a:pPr>
+            <a:r>
+              <a:rPr lang="en-US" sz="1100" i="1" dirty="0">
+                <a:solidFill>
+                  <a:srgbClr val="6B7683"/>
+                </a:solidFill>
+                <a:latin typeface="Calibri" pitchFamily="34" charset="0"/>
+                <a:ea typeface="Calibri" pitchFamily="34" charset="-122"/>
+                <a:cs typeface="Calibri" pitchFamily="34" charset="-120"/>
+              </a:rPr>
+              <a:t>Ex : « Aucune invention. [Non précisé] sinon. »</a:t>
             </a:r>
             <a:endParaRPr lang="en-US" sz="1100" dirty="0"/>
           </a:p>
-          <a:p>
-            <a:pPr indent="0" marL="0">
-              <a:buNone/>
-            </a:pPr>
-            <a:r>
-              <a:rPr lang="en-US" sz="1100" dirty="0">
-                <a:solidFill>
-                  <a:srgbClr val="CADCFC"/>
-                </a:solidFill>
-                <a:latin typeface="Courier New" pitchFamily="34" charset="0"/>
-                <a:ea typeface="Courier New" pitchFamily="34" charset="-122"/>
-                <a:cs typeface="Courier New" pitchFamily="34" charset="-120"/>
-              </a:rPr>
-              <a:t>Tu es un architecte senior CICS/Java</a:t>
+        </p:txBody>
+      </p:sp>
+      <p:sp>
+        <p:nvSpPr>
+          <p:cNvPr id="29" name="Shape 27"/>
+          <p:cNvSpPr/>
+          <p:nvPr/>
+        </p:nvSpPr>
+        <p:spPr>
+          <a:xfrm>
+            <a:off x="6309360" y="3429000"/>
+            <a:ext cx="640080" cy="1463040"/>
+          </a:xfrm>
+          <a:prstGeom prst="rect">
+            <a:avLst/>
+          </a:prstGeom>
+          <a:solidFill>
+            <a:srgbClr val="003876"/>
+          </a:solidFill>
+          <a:ln w="12700">
+            <a:solidFill>
+              <a:srgbClr val="003876"/>
+            </a:solidFill>
+            <a:prstDash val="solid"/>
+          </a:ln>
+        </p:spPr>
+      </p:sp>
+      <p:sp>
+        <p:nvSpPr>
+          <p:cNvPr id="30" name="Text 28"/>
+          <p:cNvSpPr txBox="1"/>
+          <p:nvPr/>
+        </p:nvSpPr>
+        <p:spPr>
+          <a:xfrm>
+            <a:off x="6309360" y="3520440"/>
+            <a:ext cx="640080" cy="457200"/>
+          </a:xfrm>
+          <a:prstGeom prst="rect">
+            <a:avLst/>
+          </a:prstGeom>
+          <a:noFill/>
+          <a:ln/>
+        </p:spPr>
+        <p:txBody>
+          <a:bodyPr wrap="square" lIns="0" tIns="0" rIns="0" bIns="0" rtlCol="0" anchor="ctr"/>
+          <a:lstStyle/>
+          <a:p>
+            <a:pPr algn="ctr" indent="0" marL="0">
+              <a:buNone/>
+            </a:pPr>
+            <a:r>
+              <a:rPr lang="en-US" sz="1800" b="1" dirty="0">
+                <a:solidFill>
+                  <a:srgbClr val="F5B700"/>
+                </a:solidFill>
+                <a:latin typeface="Cambria" pitchFamily="34" charset="0"/>
+                <a:ea typeface="Cambria" pitchFamily="34" charset="-122"/>
+                <a:cs typeface="Cambria" pitchFamily="34" charset="-120"/>
+              </a:rPr>
+              <a:t>05</a:t>
+            </a:r>
+            <a:endParaRPr lang="en-US" sz="1800" dirty="0"/>
+          </a:p>
+        </p:txBody>
+      </p:sp>
+      <p:sp>
+        <p:nvSpPr>
+          <p:cNvPr id="31" name="Shape 29"/>
+          <p:cNvSpPr/>
+          <p:nvPr/>
+        </p:nvSpPr>
+        <p:spPr>
+          <a:xfrm>
+            <a:off x="6949440" y="3429000"/>
+            <a:ext cx="4754880" cy="1463040"/>
+          </a:xfrm>
+          <a:prstGeom prst="rect">
+            <a:avLst/>
+          </a:prstGeom>
+          <a:solidFill>
+            <a:srgbClr val="F8F9FB"/>
+          </a:solidFill>
+          <a:ln w="12700">
+            <a:solidFill>
+              <a:srgbClr val="E5E8EC"/>
+            </a:solidFill>
+            <a:prstDash val="solid"/>
+          </a:ln>
+        </p:spPr>
+      </p:sp>
+      <p:sp>
+        <p:nvSpPr>
+          <p:cNvPr id="32" name="Text 30"/>
+          <p:cNvSpPr txBox="1"/>
+          <p:nvPr/>
+        </p:nvSpPr>
+        <p:spPr>
+          <a:xfrm>
+            <a:off x="7132320" y="3566160"/>
+            <a:ext cx="4480560" cy="320040"/>
+          </a:xfrm>
+          <a:prstGeom prst="rect">
+            <a:avLst/>
+          </a:prstGeom>
+          <a:noFill/>
+          <a:ln/>
+        </p:spPr>
+        <p:txBody>
+          <a:bodyPr wrap="square" lIns="0" tIns="0" rIns="0" bIns="0" rtlCol="0" anchor="ctr"/>
+          <a:lstStyle/>
+          <a:p>
+            <a:pPr indent="0" marL="0">
+              <a:buNone/>
+            </a:pPr>
+            <a:r>
+              <a:rPr lang="en-US" sz="1200" b="1" spc="300" kern="0" dirty="0">
+                <a:solidFill>
+                  <a:srgbClr val="003876"/>
+                </a:solidFill>
+                <a:latin typeface="Calibri" pitchFamily="34" charset="0"/>
+                <a:ea typeface="Calibri" pitchFamily="34" charset="-122"/>
+                <a:cs typeface="Calibri" pitchFamily="34" charset="-120"/>
+              </a:rPr>
+              <a:t>STRUCTURE DE SORTIE</a:t>
+            </a:r>
+            <a:endParaRPr lang="en-US" sz="1200" dirty="0"/>
+          </a:p>
+        </p:txBody>
+      </p:sp>
+      <p:sp>
+        <p:nvSpPr>
+          <p:cNvPr id="33" name="Text 31"/>
+          <p:cNvSpPr txBox="1"/>
+          <p:nvPr/>
+        </p:nvSpPr>
+        <p:spPr>
+          <a:xfrm>
+            <a:off x="7132320" y="3886200"/>
+            <a:ext cx="4480560" cy="365760"/>
+          </a:xfrm>
+          <a:prstGeom prst="rect">
+            <a:avLst/>
+          </a:prstGeom>
+          <a:noFill/>
+          <a:ln/>
+        </p:spPr>
+        <p:txBody>
+          <a:bodyPr wrap="square" lIns="0" tIns="0" rIns="0" bIns="0" rtlCol="0" anchor="ctr"/>
+          <a:lstStyle/>
+          <a:p>
+            <a:pPr indent="0" marL="0">
+              <a:buNone/>
+            </a:pPr>
+            <a:r>
+              <a:rPr lang="en-US" sz="1200" dirty="0">
+                <a:solidFill>
+                  <a:srgbClr val="3A4552"/>
+                </a:solidFill>
+                <a:latin typeface="Calibri" pitchFamily="34" charset="0"/>
+                <a:ea typeface="Calibri" pitchFamily="34" charset="-122"/>
+                <a:cs typeface="Calibri" pitchFamily="34" charset="-120"/>
+              </a:rPr>
+              <a:t>Sections imposées, format, hiérarchie.</a:t>
+            </a:r>
+            <a:endParaRPr lang="en-US" sz="1200" dirty="0"/>
+          </a:p>
+        </p:txBody>
+      </p:sp>
+      <p:sp>
+        <p:nvSpPr>
+          <p:cNvPr id="34" name="Text 32"/>
+          <p:cNvSpPr txBox="1"/>
+          <p:nvPr/>
+        </p:nvSpPr>
+        <p:spPr>
+          <a:xfrm>
+            <a:off x="7132320" y="4297680"/>
+            <a:ext cx="4480560" cy="502920"/>
+          </a:xfrm>
+          <a:prstGeom prst="rect">
+            <a:avLst/>
+          </a:prstGeom>
+          <a:noFill/>
+          <a:ln/>
+        </p:spPr>
+        <p:txBody>
+          <a:bodyPr wrap="square" lIns="0" tIns="0" rIns="0" bIns="0" rtlCol="0" anchor="ctr"/>
+          <a:lstStyle/>
+          <a:p>
+            <a:pPr indent="0" marL="0">
+              <a:buNone/>
+            </a:pPr>
+            <a:r>
+              <a:rPr lang="en-US" sz="1100" i="1" dirty="0">
+                <a:solidFill>
+                  <a:srgbClr val="6B7683"/>
+                </a:solidFill>
+                <a:latin typeface="Calibri" pitchFamily="34" charset="0"/>
+                <a:ea typeface="Calibri" pitchFamily="34" charset="-122"/>
+                <a:cs typeface="Calibri" pitchFamily="34" charset="-120"/>
+              </a:rPr>
+              <a:t>Ex : « ## Synthèse  ## Concepts  ## Pièges. »</a:t>
             </a:r>
             <a:endParaRPr lang="en-US" sz="1100" dirty="0"/>
           </a:p>
-          <a:p>
-            <a:pPr indent="0" marL="0">
-              <a:buNone/>
-            </a:pPr>
-            <a:r>
-              <a:rPr lang="en-US" sz="1100" dirty="0">
-                <a:solidFill>
-                  <a:srgbClr val="CADCFC"/>
-                </a:solidFill>
-                <a:latin typeface="Courier New" pitchFamily="34" charset="0"/>
-                <a:ea typeface="Courier New" pitchFamily="34" charset="-122"/>
-                <a:cs typeface="Courier New" pitchFamily="34" charset="-120"/>
-              </a:rPr>
-              <a:t>en banque française.</a:t>
+        </p:txBody>
+      </p:sp>
+      <p:sp>
+        <p:nvSpPr>
+          <p:cNvPr id="35" name="Shape 33"/>
+          <p:cNvSpPr/>
+          <p:nvPr/>
+        </p:nvSpPr>
+        <p:spPr>
+          <a:xfrm>
+            <a:off x="6309360" y="4983480"/>
+            <a:ext cx="640080" cy="1463040"/>
+          </a:xfrm>
+          <a:prstGeom prst="rect">
+            <a:avLst/>
+          </a:prstGeom>
+          <a:solidFill>
+            <a:srgbClr val="003876"/>
+          </a:solidFill>
+          <a:ln w="12700">
+            <a:solidFill>
+              <a:srgbClr val="003876"/>
+            </a:solidFill>
+            <a:prstDash val="solid"/>
+          </a:ln>
+        </p:spPr>
+      </p:sp>
+      <p:sp>
+        <p:nvSpPr>
+          <p:cNvPr id="36" name="Text 34"/>
+          <p:cNvSpPr txBox="1"/>
+          <p:nvPr/>
+        </p:nvSpPr>
+        <p:spPr>
+          <a:xfrm>
+            <a:off x="6309360" y="5074920"/>
+            <a:ext cx="640080" cy="457200"/>
+          </a:xfrm>
+          <a:prstGeom prst="rect">
+            <a:avLst/>
+          </a:prstGeom>
+          <a:noFill/>
+          <a:ln/>
+        </p:spPr>
+        <p:txBody>
+          <a:bodyPr wrap="square" lIns="0" tIns="0" rIns="0" bIns="0" rtlCol="0" anchor="ctr"/>
+          <a:lstStyle/>
+          <a:p>
+            <a:pPr algn="ctr" indent="0" marL="0">
+              <a:buNone/>
+            </a:pPr>
+            <a:r>
+              <a:rPr lang="en-US" sz="1800" b="1" dirty="0">
+                <a:solidFill>
+                  <a:srgbClr val="F5B700"/>
+                </a:solidFill>
+                <a:latin typeface="Cambria" pitchFamily="34" charset="0"/>
+                <a:ea typeface="Cambria" pitchFamily="34" charset="-122"/>
+                <a:cs typeface="Cambria" pitchFamily="34" charset="-120"/>
+              </a:rPr>
+              <a:t>06</a:t>
+            </a:r>
+            <a:endParaRPr lang="en-US" sz="1800" dirty="0"/>
+          </a:p>
+        </p:txBody>
+      </p:sp>
+      <p:sp>
+        <p:nvSpPr>
+          <p:cNvPr id="37" name="Shape 35"/>
+          <p:cNvSpPr/>
+          <p:nvPr/>
+        </p:nvSpPr>
+        <p:spPr>
+          <a:xfrm>
+            <a:off x="6949440" y="4983480"/>
+            <a:ext cx="4754880" cy="1463040"/>
+          </a:xfrm>
+          <a:prstGeom prst="rect">
+            <a:avLst/>
+          </a:prstGeom>
+          <a:solidFill>
+            <a:srgbClr val="F8F9FB"/>
+          </a:solidFill>
+          <a:ln w="12700">
+            <a:solidFill>
+              <a:srgbClr val="E5E8EC"/>
+            </a:solidFill>
+            <a:prstDash val="solid"/>
+          </a:ln>
+        </p:spPr>
+      </p:sp>
+      <p:sp>
+        <p:nvSpPr>
+          <p:cNvPr id="38" name="Text 36"/>
+          <p:cNvSpPr txBox="1"/>
+          <p:nvPr/>
+        </p:nvSpPr>
+        <p:spPr>
+          <a:xfrm>
+            <a:off x="7132320" y="5120640"/>
+            <a:ext cx="4480560" cy="320040"/>
+          </a:xfrm>
+          <a:prstGeom prst="rect">
+            <a:avLst/>
+          </a:prstGeom>
+          <a:noFill/>
+          <a:ln/>
+        </p:spPr>
+        <p:txBody>
+          <a:bodyPr wrap="square" lIns="0" tIns="0" rIns="0" bIns="0" rtlCol="0" anchor="ctr"/>
+          <a:lstStyle/>
+          <a:p>
+            <a:pPr indent="0" marL="0">
+              <a:buNone/>
+            </a:pPr>
+            <a:r>
+              <a:rPr lang="en-US" sz="1200" b="1" spc="300" kern="0" dirty="0">
+                <a:solidFill>
+                  <a:srgbClr val="003876"/>
+                </a:solidFill>
+                <a:latin typeface="Calibri" pitchFamily="34" charset="0"/>
+                <a:ea typeface="Calibri" pitchFamily="34" charset="-122"/>
+                <a:cs typeface="Calibri" pitchFamily="34" charset="-120"/>
+              </a:rPr>
+              <a:t>CONTRAINTES DE STYLE</a:t>
+            </a:r>
+            <a:endParaRPr lang="en-US" sz="1200" dirty="0"/>
+          </a:p>
+        </p:txBody>
+      </p:sp>
+      <p:sp>
+        <p:nvSpPr>
+          <p:cNvPr id="39" name="Text 37"/>
+          <p:cNvSpPr txBox="1"/>
+          <p:nvPr/>
+        </p:nvSpPr>
+        <p:spPr>
+          <a:xfrm>
+            <a:off x="7132320" y="5440680"/>
+            <a:ext cx="4480560" cy="365760"/>
+          </a:xfrm>
+          <a:prstGeom prst="rect">
+            <a:avLst/>
+          </a:prstGeom>
+          <a:noFill/>
+          <a:ln/>
+        </p:spPr>
+        <p:txBody>
+          <a:bodyPr wrap="square" lIns="0" tIns="0" rIns="0" bIns="0" rtlCol="0" anchor="ctr"/>
+          <a:lstStyle/>
+          <a:p>
+            <a:pPr indent="0" marL="0">
+              <a:buNone/>
+            </a:pPr>
+            <a:r>
+              <a:rPr lang="en-US" sz="1200" dirty="0">
+                <a:solidFill>
+                  <a:srgbClr val="3A4552"/>
+                </a:solidFill>
+                <a:latin typeface="Calibri" pitchFamily="34" charset="0"/>
+                <a:ea typeface="Calibri" pitchFamily="34" charset="-122"/>
+                <a:cs typeface="Calibri" pitchFamily="34" charset="-120"/>
+              </a:rPr>
+              <a:t>Langue, densité, code, glossaire.</a:t>
+            </a:r>
+            <a:endParaRPr lang="en-US" sz="1200" dirty="0"/>
+          </a:p>
+        </p:txBody>
+      </p:sp>
+      <p:sp>
+        <p:nvSpPr>
+          <p:cNvPr id="40" name="Text 38"/>
+          <p:cNvSpPr txBox="1"/>
+          <p:nvPr/>
+        </p:nvSpPr>
+        <p:spPr>
+          <a:xfrm>
+            <a:off x="7132320" y="5852160"/>
+            <a:ext cx="4480560" cy="502920"/>
+          </a:xfrm>
+          <a:prstGeom prst="rect">
+            <a:avLst/>
+          </a:prstGeom>
+          <a:noFill/>
+          <a:ln/>
+        </p:spPr>
+        <p:txBody>
+          <a:bodyPr wrap="square" lIns="0" tIns="0" rIns="0" bIns="0" rtlCol="0" anchor="ctr"/>
+          <a:lstStyle/>
+          <a:p>
+            <a:pPr indent="0" marL="0">
+              <a:buNone/>
+            </a:pPr>
+            <a:r>
+              <a:rPr lang="en-US" sz="1100" i="1" dirty="0">
+                <a:solidFill>
+                  <a:srgbClr val="6B7683"/>
+                </a:solidFill>
+                <a:latin typeface="Calibri" pitchFamily="34" charset="0"/>
+                <a:ea typeface="Calibri" pitchFamily="34" charset="-122"/>
+                <a:cs typeface="Calibri" pitchFamily="34" charset="-120"/>
+              </a:rPr>
+              <a:t>Ex : « Français technique, blocs code, dense. »</a:t>
             </a:r>
             <a:endParaRPr lang="en-US" sz="1100" dirty="0"/>
           </a:p>
-          <a:p>
-            <a:pPr indent="0" marL="0">
-              <a:buNone/>
-            </a:pPr>
-            <a:endParaRPr lang="en-US" sz="1100" dirty="0"/>
-          </a:p>
-          <a:p>
-            <a:pPr indent="0" marL="0">
-              <a:buNone/>
-            </a:pPr>
-            <a:r>
-              <a:rPr lang="en-US" sz="1100" dirty="0">
-                <a:solidFill>
-                  <a:srgbClr val="CADCFC"/>
-                </a:solidFill>
-                <a:latin typeface="Courier New" pitchFamily="34" charset="0"/>
-                <a:ea typeface="Courier New" pitchFamily="34" charset="-122"/>
-                <a:cs typeface="Courier New" pitchFamily="34" charset="-120"/>
-              </a:rPr>
-              <a:t># MISSION</a:t>
-            </a:r>
-            <a:endParaRPr lang="en-US" sz="1100" dirty="0"/>
-          </a:p>
-          <a:p>
-            <a:pPr indent="0" marL="0">
-              <a:buNone/>
-            </a:pPr>
-            <a:r>
-              <a:rPr lang="en-US" sz="1100" dirty="0">
-                <a:solidFill>
-                  <a:srgbClr val="CADCFC"/>
-                </a:solidFill>
-                <a:latin typeface="Courier New" pitchFamily="34" charset="0"/>
-                <a:ea typeface="Courier New" pitchFamily="34" charset="-122"/>
-                <a:cs typeface="Courier New" pitchFamily="34" charset="-120"/>
-              </a:rPr>
-              <a:t>Lis le Redpaper via web_fetch.</a:t>
-            </a:r>
-            <a:endParaRPr lang="en-US" sz="1100" dirty="0"/>
-          </a:p>
-          <a:p>
-            <a:pPr indent="0" marL="0">
-              <a:buNone/>
-            </a:pPr>
-            <a:r>
-              <a:rPr lang="en-US" sz="1100" dirty="0">
-                <a:solidFill>
-                  <a:srgbClr val="CADCFC"/>
-                </a:solidFill>
-                <a:latin typeface="Courier New" pitchFamily="34" charset="0"/>
-                <a:ea typeface="Courier New" pitchFamily="34" charset="-122"/>
-                <a:cs typeface="Courier New" pitchFamily="34" charset="-120"/>
-              </a:rPr>
-              <a:t>Produis une fiche technique en</a:t>
-            </a:r>
-            <a:endParaRPr lang="en-US" sz="1100" dirty="0"/>
-          </a:p>
-          <a:p>
-            <a:pPr indent="0" marL="0">
-              <a:buNone/>
-            </a:pPr>
-            <a:r>
-              <a:rPr lang="en-US" sz="1100" dirty="0">
-                <a:solidFill>
-                  <a:srgbClr val="CADCFC"/>
-                </a:solidFill>
-                <a:latin typeface="Courier New" pitchFamily="34" charset="0"/>
-                <a:ea typeface="Courier New" pitchFamily="34" charset="-122"/>
-                <a:cs typeface="Courier New" pitchFamily="34" charset="-120"/>
-              </a:rPr>
-              <a:t>français, dense, exploitable.</a:t>
-            </a:r>
-            <a:endParaRPr lang="en-US" sz="1100" dirty="0"/>
-          </a:p>
-          <a:p>
-            <a:pPr indent="0" marL="0">
-              <a:buNone/>
-            </a:pPr>
-            <a:endParaRPr lang="en-US" sz="1100" dirty="0"/>
-          </a:p>
-          <a:p>
-            <a:pPr indent="0" marL="0">
-              <a:buNone/>
-            </a:pPr>
-            <a:r>
-              <a:rPr lang="en-US" sz="1100" dirty="0">
-                <a:solidFill>
-                  <a:srgbClr val="CADCFC"/>
-                </a:solidFill>
-                <a:latin typeface="Courier New" pitchFamily="34" charset="0"/>
-                <a:ea typeface="Courier New" pitchFamily="34" charset="-122"/>
-                <a:cs typeface="Courier New" pitchFamily="34" charset="-120"/>
-              </a:rPr>
-              <a:t># RÈGLES DE FIDÉLITÉ</a:t>
-            </a:r>
-            <a:endParaRPr lang="en-US" sz="1100" dirty="0"/>
-          </a:p>
-          <a:p>
-            <a:pPr indent="0" marL="0">
-              <a:buNone/>
-            </a:pPr>
-            <a:r>
-              <a:rPr lang="en-US" sz="1100" dirty="0">
-                <a:solidFill>
-                  <a:srgbClr val="CADCFC"/>
-                </a:solidFill>
-                <a:latin typeface="Courier New" pitchFamily="34" charset="0"/>
-                <a:ea typeface="Courier New" pitchFamily="34" charset="-122"/>
-                <a:cs typeface="Courier New" pitchFamily="34" charset="-120"/>
-              </a:rPr>
-              <a:t>1. Aucune invention. Si une info</a:t>
-            </a:r>
-            <a:endParaRPr lang="en-US" sz="1100" dirty="0"/>
-          </a:p>
-          <a:p>
-            <a:pPr indent="0" marL="0">
-              <a:buNone/>
-            </a:pPr>
-            <a:r>
-              <a:rPr lang="en-US" sz="1100" dirty="0">
-                <a:solidFill>
-                  <a:srgbClr val="CADCFC"/>
-                </a:solidFill>
-                <a:latin typeface="Courier New" pitchFamily="34" charset="0"/>
-                <a:ea typeface="Courier New" pitchFamily="34" charset="-122"/>
-                <a:cs typeface="Courier New" pitchFamily="34" charset="-120"/>
-              </a:rPr>
-              <a:t>   manque : "[Non précisé]".</a:t>
-            </a:r>
-            <a:endParaRPr lang="en-US" sz="1100" dirty="0"/>
-          </a:p>
-          <a:p>
-            <a:pPr indent="0" marL="0">
-              <a:buNone/>
-            </a:pPr>
-            <a:r>
-              <a:rPr lang="en-US" sz="1100" dirty="0">
-                <a:solidFill>
-                  <a:srgbClr val="CADCFC"/>
-                </a:solidFill>
-                <a:latin typeface="Courier New" pitchFamily="34" charset="0"/>
-                <a:ea typeface="Courier New" pitchFamily="34" charset="-122"/>
-                <a:cs typeface="Courier New" pitchFamily="34" charset="-120"/>
-              </a:rPr>
-              <a:t>2. Cite les sections (§ 3.2).</a:t>
-            </a:r>
-            <a:endParaRPr lang="en-US" sz="1100" dirty="0"/>
-          </a:p>
-          <a:p>
-            <a:pPr indent="0" marL="0">
-              <a:buNone/>
-            </a:pPr>
-            <a:r>
-              <a:rPr lang="en-US" sz="1100" dirty="0">
-                <a:solidFill>
-                  <a:srgbClr val="CADCFC"/>
-                </a:solidFill>
-                <a:latin typeface="Courier New" pitchFamily="34" charset="0"/>
-                <a:ea typeface="Courier New" pitchFamily="34" charset="-122"/>
-                <a:cs typeface="Courier New" pitchFamily="34" charset="-120"/>
-              </a:rPr>
-              <a:t>3. Signale les divergences</a:t>
-            </a:r>
-            <a:endParaRPr lang="en-US" sz="1100" dirty="0"/>
-          </a:p>
-          <a:p>
-            <a:pPr indent="0" marL="0">
-              <a:buNone/>
-            </a:pPr>
-            <a:r>
-              <a:rPr lang="en-US" sz="1100" dirty="0">
-                <a:solidFill>
-                  <a:srgbClr val="CADCFC"/>
-                </a:solidFill>
-                <a:latin typeface="Courier New" pitchFamily="34" charset="0"/>
-                <a:ea typeface="Courier New" pitchFamily="34" charset="-122"/>
-                <a:cs typeface="Courier New" pitchFamily="34" charset="-120"/>
-              </a:rPr>
-              <a:t>   slide / transcript.</a:t>
-            </a:r>
-            <a:endParaRPr lang="en-US" sz="1100" dirty="0"/>
-          </a:p>
-          <a:p>
-            <a:pPr indent="0" marL="0">
-              <a:buNone/>
-            </a:pPr>
-            <a:endParaRPr lang="en-US" sz="1100" dirty="0"/>
-          </a:p>
-          <a:p>
-            <a:pPr indent="0" marL="0">
-              <a:buNone/>
-            </a:pPr>
-            <a:r>
-              <a:rPr lang="en-US" sz="1100" dirty="0">
-                <a:solidFill>
-                  <a:srgbClr val="CADCFC"/>
-                </a:solidFill>
-                <a:latin typeface="Courier New" pitchFamily="34" charset="0"/>
-                <a:ea typeface="Courier New" pitchFamily="34" charset="-122"/>
-                <a:cs typeface="Courier New" pitchFamily="34" charset="-120"/>
-              </a:rPr>
-              <a:t># STRUCTURE</a:t>
-            </a:r>
-            <a:endParaRPr lang="en-US" sz="1100" dirty="0"/>
-          </a:p>
-          <a:p>
-            <a:pPr indent="0" marL="0">
-              <a:buNone/>
-            </a:pPr>
-            <a:r>
-              <a:rPr lang="en-US" sz="1100" dirty="0">
-                <a:solidFill>
-                  <a:srgbClr val="CADCFC"/>
-                </a:solidFill>
-                <a:latin typeface="Courier New" pitchFamily="34" charset="0"/>
-                <a:ea typeface="Courier New" pitchFamily="34" charset="-122"/>
-                <a:cs typeface="Courier New" pitchFamily="34" charset="-120"/>
-              </a:rPr>
-              <a:t>## Synthèse exécutive</a:t>
-            </a:r>
-            <a:endParaRPr lang="en-US" sz="1100" dirty="0"/>
-          </a:p>
-          <a:p>
-            <a:pPr indent="0" marL="0">
-              <a:buNone/>
-            </a:pPr>
-            <a:r>
-              <a:rPr lang="en-US" sz="1100" dirty="0">
-                <a:solidFill>
-                  <a:srgbClr val="CADCFC"/>
-                </a:solidFill>
-                <a:latin typeface="Courier New" pitchFamily="34" charset="0"/>
-                <a:ea typeface="Courier New" pitchFamily="34" charset="-122"/>
-                <a:cs typeface="Courier New" pitchFamily="34" charset="-120"/>
-              </a:rPr>
-              <a:t>## Concepts fondamentaux</a:t>
-            </a:r>
-            <a:endParaRPr lang="en-US" sz="1100" dirty="0"/>
-          </a:p>
-          <a:p>
-            <a:pPr indent="0" marL="0">
-              <a:buNone/>
-            </a:pPr>
-            <a:r>
-              <a:rPr lang="en-US" sz="1100" dirty="0">
-                <a:solidFill>
-                  <a:srgbClr val="CADCFC"/>
-                </a:solidFill>
-                <a:latin typeface="Courier New" pitchFamily="34" charset="0"/>
-                <a:ea typeface="Courier New" pitchFamily="34" charset="-122"/>
-                <a:cs typeface="Courier New" pitchFamily="34" charset="-120"/>
-              </a:rPr>
-              <a:t>## Pièges et non-dits</a:t>
-            </a:r>
-            <a:endParaRPr lang="en-US" sz="1100" dirty="0"/>
-          </a:p>
-          <a:p>
-            <a:pPr indent="0" marL="0">
-              <a:buNone/>
-            </a:pPr>
-            <a:r>
-              <a:rPr lang="en-US" sz="1100" dirty="0">
-                <a:solidFill>
-                  <a:srgbClr val="CADCFC"/>
-                </a:solidFill>
-                <a:latin typeface="Courier New" pitchFamily="34" charset="0"/>
-                <a:ea typeface="Courier New" pitchFamily="34" charset="-122"/>
-                <a:cs typeface="Courier New" pitchFamily="34" charset="-120"/>
-              </a:rPr>
-              <a:t>## Cheat-sheet finale</a:t>
-            </a:r>
-            <a:endParaRPr lang="en-US" sz="1100" dirty="0"/>
-          </a:p>
-        </p:txBody>
-      </p:sp>
-      <p:sp>
-        <p:nvSpPr>
-          <p:cNvPr id="23" name="Shape 21"/>
+        </p:txBody>
+      </p:sp>
+      <p:sp>
+        <p:nvSpPr>
+          <p:cNvPr id="41" name="Shape 39"/>
           <p:cNvSpPr/>
           <p:nvPr/>
         </p:nvSpPr>
@@ -6391,7 +7530,7 @@
       </p:sp>
       <p:sp>
         <p:nvSpPr>
-          <p:cNvPr id="24" name="Text 22"/>
+          <p:cNvPr id="42" name="Text 40"/>
           <p:cNvSpPr txBox="1"/>
           <p:nvPr/>
         </p:nvSpPr>
@@ -6430,7 +7569,7 @@
       </p:sp>
       <p:sp>
         <p:nvSpPr>
-          <p:cNvPr id="25" name="Text 23"/>
+          <p:cNvPr id="43" name="Text 41"/>
           <p:cNvSpPr txBox="1"/>
           <p:nvPr/>
         </p:nvSpPr>
@@ -6461,7 +7600,7 @@
                 <a:ea typeface="Calibri" pitchFamily="34" charset="-122"/>
                 <a:cs typeface="Calibri" pitchFamily="34" charset="-120"/>
               </a:rPr>
-              <a:t>5 / 10</a:t>
+              <a:t>5 / 11</a:t>
             </a:r>
             <a:endParaRPr lang="en-US" sz="900" dirty="0"/>
           </a:p>
@@ -6533,7 +7672,7 @@
         <p:spPr>
           <a:xfrm>
             <a:off x="685800" y="457200"/>
-            <a:ext cx="5486400" cy="365760"/>
+            <a:ext cx="7315200" cy="365760"/>
           </a:xfrm>
           <a:prstGeom prst="rect">
             <a:avLst/>
@@ -6557,7 +7696,7 @@
                 <a:ea typeface="Calibri" pitchFamily="34" charset="-122"/>
                 <a:cs typeface="Calibri" pitchFamily="34" charset="-120"/>
               </a:rPr>
-              <a:t>05  ·  DÉMONSTRATION</a:t>
+              <a:t>05  ·  EXEMPLE</a:t>
             </a:r>
             <a:endParaRPr lang="en-US" sz="1100" dirty="0"/>
           </a:p>
@@ -6596,7 +7735,7 @@
                 <a:ea typeface="Cambria" pitchFamily="34" charset="-122"/>
                 <a:cs typeface="Cambria" pitchFamily="34" charset="-120"/>
               </a:rPr>
-              <a:t>Avant / après : le même Redbook, deux expériences</a:t>
+              <a:t>Exemple appliqué : prompt pour un Redpaper CICS</a:t>
             </a:r>
             <a:endParaRPr lang="en-US" sz="3200" dirty="0"/>
           </a:p>
@@ -6610,18 +7749,18 @@
         </p:nvSpPr>
         <p:spPr>
           <a:xfrm>
-            <a:off x="457200" y="1920240"/>
-            <a:ext cx="5486400" cy="4480560"/>
+            <a:off x="457200" y="1828800"/>
+            <a:ext cx="7772400" cy="4572000"/>
           </a:xfrm>
           <a:prstGeom prst="rect">
             <a:avLst/>
           </a:prstGeom>
           <a:solidFill>
-            <a:srgbClr val="F5F5F5"/>
+            <a:srgbClr val="002456"/>
           </a:solidFill>
           <a:ln w="12700">
             <a:solidFill>
-              <a:srgbClr val="E5E8EC"/>
+              <a:srgbClr val="002456"/>
             </a:solidFill>
             <a:prstDash val="solid"/>
           </a:ln>
@@ -6629,531 +7768,24 @@
       </p:sp>
       <p:sp>
         <p:nvSpPr>
-          <p:cNvPr id="6" name="Text 4"/>
-          <p:cNvSpPr txBox="1"/>
-          <p:nvPr/>
-        </p:nvSpPr>
-        <p:spPr>
-          <a:xfrm>
-            <a:off x="731520" y="2103120"/>
-            <a:ext cx="2743200" cy="365760"/>
-          </a:xfrm>
-          <a:prstGeom prst="rect">
-            <a:avLst/>
-          </a:prstGeom>
-          <a:noFill/>
-          <a:ln/>
-        </p:spPr>
-        <p:txBody>
-          <a:bodyPr wrap="square" lIns="0" tIns="0" rIns="0" bIns="0" rtlCol="0" anchor="ctr"/>
-          <a:lstStyle/>
-          <a:p>
-            <a:pPr indent="0" marL="0">
-              <a:buNone/>
-            </a:pPr>
-            <a:r>
-              <a:rPr lang="en-US" sz="1200" b="1" spc="400" kern="0" dirty="0">
-                <a:solidFill>
-                  <a:srgbClr val="6B7683"/>
-                </a:solidFill>
-                <a:latin typeface="Calibri" pitchFamily="34" charset="0"/>
-                <a:ea typeface="Calibri" pitchFamily="34" charset="-122"/>
-                <a:cs typeface="Calibri" pitchFamily="34" charset="-120"/>
-              </a:rPr>
-              <a:t>AVANT</a:t>
-            </a:r>
-            <a:endParaRPr lang="en-US" sz="1200" dirty="0"/>
-          </a:p>
-        </p:txBody>
-      </p:sp>
-      <p:sp>
-        <p:nvSpPr>
-          <p:cNvPr id="7" name="Text 5"/>
-          <p:cNvSpPr txBox="1"/>
-          <p:nvPr/>
-        </p:nvSpPr>
-        <p:spPr>
-          <a:xfrm>
-            <a:off x="731520" y="2468880"/>
-            <a:ext cx="4937760" cy="457200"/>
-          </a:xfrm>
-          <a:prstGeom prst="rect">
-            <a:avLst/>
-          </a:prstGeom>
-          <a:noFill/>
-          <a:ln/>
-        </p:spPr>
-        <p:txBody>
-          <a:bodyPr wrap="square" lIns="0" tIns="0" rIns="0" bIns="0" rtlCol="0" anchor="ctr"/>
-          <a:lstStyle/>
-          <a:p>
-            <a:pPr indent="0" marL="0">
-              <a:buNone/>
-            </a:pPr>
-            <a:r>
-              <a:rPr lang="en-US" sz="2200" b="1" dirty="0">
-                <a:solidFill>
-                  <a:srgbClr val="3A4552"/>
-                </a:solidFill>
-                <a:latin typeface="Cambria" pitchFamily="34" charset="0"/>
-                <a:ea typeface="Cambria" pitchFamily="34" charset="-122"/>
-                <a:cs typeface="Cambria" pitchFamily="34" charset="-120"/>
-              </a:rPr>
-              <a:t>Lecture linéaire</a:t>
-            </a:r>
-            <a:endParaRPr lang="en-US" sz="2200" dirty="0"/>
-          </a:p>
-        </p:txBody>
-      </p:sp>
-      <p:sp>
-        <p:nvSpPr>
-          <p:cNvPr id="8" name="Text 6"/>
-          <p:cNvSpPr txBox="1"/>
-          <p:nvPr/>
-        </p:nvSpPr>
-        <p:spPr>
-          <a:xfrm>
-            <a:off x="731520" y="3200400"/>
-            <a:ext cx="2011680" cy="320040"/>
-          </a:xfrm>
-          <a:prstGeom prst="rect">
-            <a:avLst/>
-          </a:prstGeom>
-          <a:noFill/>
-          <a:ln/>
-        </p:spPr>
-        <p:txBody>
-          <a:bodyPr wrap="square" lIns="0" tIns="0" rIns="0" bIns="0" rtlCol="0" anchor="ctr"/>
-          <a:lstStyle/>
-          <a:p>
-            <a:pPr indent="0" marL="0">
-              <a:buNone/>
-            </a:pPr>
-            <a:r>
-              <a:rPr lang="en-US" sz="1200" dirty="0">
-                <a:solidFill>
-                  <a:srgbClr val="6B7683"/>
-                </a:solidFill>
-                <a:latin typeface="Calibri" pitchFamily="34" charset="0"/>
-                <a:ea typeface="Calibri" pitchFamily="34" charset="-122"/>
-                <a:cs typeface="Calibri" pitchFamily="34" charset="-120"/>
-              </a:rPr>
-              <a:t>Volume</a:t>
-            </a:r>
-            <a:endParaRPr lang="en-US" sz="1200" dirty="0"/>
-          </a:p>
-        </p:txBody>
-      </p:sp>
-      <p:sp>
-        <p:nvSpPr>
-          <p:cNvPr id="9" name="Text 7"/>
-          <p:cNvSpPr txBox="1"/>
-          <p:nvPr/>
-        </p:nvSpPr>
-        <p:spPr>
-          <a:xfrm>
-            <a:off x="2743200" y="3200400"/>
-            <a:ext cx="3017520" cy="320040"/>
-          </a:xfrm>
-          <a:prstGeom prst="rect">
-            <a:avLst/>
-          </a:prstGeom>
-          <a:noFill/>
-          <a:ln/>
-        </p:spPr>
-        <p:txBody>
-          <a:bodyPr wrap="square" lIns="0" tIns="0" rIns="0" bIns="0" rtlCol="0" anchor="ctr"/>
-          <a:lstStyle/>
-          <a:p>
-            <a:pPr indent="0" marL="0">
-              <a:buNone/>
-            </a:pPr>
-            <a:r>
-              <a:rPr lang="en-US" sz="1200" b="1" dirty="0">
-                <a:solidFill>
-                  <a:srgbClr val="3A4552"/>
-                </a:solidFill>
-                <a:latin typeface="Calibri" pitchFamily="34" charset="0"/>
-                <a:ea typeface="Calibri" pitchFamily="34" charset="-122"/>
-                <a:cs typeface="Calibri" pitchFamily="34" charset="-120"/>
-              </a:rPr>
-              <a:t>~250 pages PDF</a:t>
-            </a:r>
-            <a:endParaRPr lang="en-US" sz="1200" dirty="0"/>
-          </a:p>
-        </p:txBody>
-      </p:sp>
-      <p:sp>
-        <p:nvSpPr>
-          <p:cNvPr id="10" name="Text 8"/>
-          <p:cNvSpPr txBox="1"/>
-          <p:nvPr/>
-        </p:nvSpPr>
-        <p:spPr>
-          <a:xfrm>
-            <a:off x="731520" y="3703320"/>
-            <a:ext cx="2011680" cy="320040"/>
-          </a:xfrm>
-          <a:prstGeom prst="rect">
-            <a:avLst/>
-          </a:prstGeom>
-          <a:noFill/>
-          <a:ln/>
-        </p:spPr>
-        <p:txBody>
-          <a:bodyPr wrap="square" lIns="0" tIns="0" rIns="0" bIns="0" rtlCol="0" anchor="ctr"/>
-          <a:lstStyle/>
-          <a:p>
-            <a:pPr indent="0" marL="0">
-              <a:buNone/>
-            </a:pPr>
-            <a:r>
-              <a:rPr lang="en-US" sz="1200" dirty="0">
-                <a:solidFill>
-                  <a:srgbClr val="6B7683"/>
-                </a:solidFill>
-                <a:latin typeface="Calibri" pitchFamily="34" charset="0"/>
-                <a:ea typeface="Calibri" pitchFamily="34" charset="-122"/>
-                <a:cs typeface="Calibri" pitchFamily="34" charset="-120"/>
-              </a:rPr>
-              <a:t>Temps investi</a:t>
-            </a:r>
-            <a:endParaRPr lang="en-US" sz="1200" dirty="0"/>
-          </a:p>
-        </p:txBody>
-      </p:sp>
-      <p:sp>
-        <p:nvSpPr>
-          <p:cNvPr id="11" name="Text 9"/>
-          <p:cNvSpPr txBox="1"/>
-          <p:nvPr/>
-        </p:nvSpPr>
-        <p:spPr>
-          <a:xfrm>
-            <a:off x="2743200" y="3703320"/>
-            <a:ext cx="3017520" cy="320040"/>
-          </a:xfrm>
-          <a:prstGeom prst="rect">
-            <a:avLst/>
-          </a:prstGeom>
-          <a:noFill/>
-          <a:ln/>
-        </p:spPr>
-        <p:txBody>
-          <a:bodyPr wrap="square" lIns="0" tIns="0" rIns="0" bIns="0" rtlCol="0" anchor="ctr"/>
-          <a:lstStyle/>
-          <a:p>
-            <a:pPr indent="0" marL="0">
-              <a:buNone/>
-            </a:pPr>
-            <a:r>
-              <a:rPr lang="en-US" sz="1200" b="1" dirty="0">
-                <a:solidFill>
-                  <a:srgbClr val="3A4552"/>
-                </a:solidFill>
-                <a:latin typeface="Calibri" pitchFamily="34" charset="0"/>
-                <a:ea typeface="Calibri" pitchFamily="34" charset="-122"/>
-                <a:cs typeface="Calibri" pitchFamily="34" charset="-120"/>
-              </a:rPr>
-              <a:t>6 à 8 heures</a:t>
-            </a:r>
-            <a:endParaRPr lang="en-US" sz="1200" dirty="0"/>
-          </a:p>
-        </p:txBody>
-      </p:sp>
-      <p:sp>
-        <p:nvSpPr>
-          <p:cNvPr id="12" name="Text 10"/>
-          <p:cNvSpPr txBox="1"/>
-          <p:nvPr/>
-        </p:nvSpPr>
-        <p:spPr>
-          <a:xfrm>
-            <a:off x="731520" y="4206240"/>
-            <a:ext cx="2011680" cy="320040"/>
-          </a:xfrm>
-          <a:prstGeom prst="rect">
-            <a:avLst/>
-          </a:prstGeom>
-          <a:noFill/>
-          <a:ln/>
-        </p:spPr>
-        <p:txBody>
-          <a:bodyPr wrap="square" lIns="0" tIns="0" rIns="0" bIns="0" rtlCol="0" anchor="ctr"/>
-          <a:lstStyle/>
-          <a:p>
-            <a:pPr indent="0" marL="0">
-              <a:buNone/>
-            </a:pPr>
-            <a:r>
-              <a:rPr lang="en-US" sz="1200" dirty="0">
-                <a:solidFill>
-                  <a:srgbClr val="6B7683"/>
-                </a:solidFill>
-                <a:latin typeface="Calibri" pitchFamily="34" charset="0"/>
-                <a:ea typeface="Calibri" pitchFamily="34" charset="-122"/>
-                <a:cs typeface="Calibri" pitchFamily="34" charset="-120"/>
-              </a:rPr>
-              <a:t>Rétention</a:t>
-            </a:r>
-            <a:endParaRPr lang="en-US" sz="1200" dirty="0"/>
-          </a:p>
-        </p:txBody>
-      </p:sp>
-      <p:sp>
-        <p:nvSpPr>
-          <p:cNvPr id="13" name="Text 11"/>
-          <p:cNvSpPr txBox="1"/>
-          <p:nvPr/>
-        </p:nvSpPr>
-        <p:spPr>
-          <a:xfrm>
-            <a:off x="2743200" y="4206240"/>
-            <a:ext cx="3017520" cy="320040"/>
-          </a:xfrm>
-          <a:prstGeom prst="rect">
-            <a:avLst/>
-          </a:prstGeom>
-          <a:noFill/>
-          <a:ln/>
-        </p:spPr>
-        <p:txBody>
-          <a:bodyPr wrap="square" lIns="0" tIns="0" rIns="0" bIns="0" rtlCol="0" anchor="ctr"/>
-          <a:lstStyle/>
-          <a:p>
-            <a:pPr indent="0" marL="0">
-              <a:buNone/>
-            </a:pPr>
-            <a:r>
-              <a:rPr lang="en-US" sz="1200" b="1" dirty="0">
-                <a:solidFill>
-                  <a:srgbClr val="3A4552"/>
-                </a:solidFill>
-                <a:latin typeface="Calibri" pitchFamily="34" charset="0"/>
-                <a:ea typeface="Calibri" pitchFamily="34" charset="-122"/>
-                <a:cs typeface="Calibri" pitchFamily="34" charset="-120"/>
-              </a:rPr>
-              <a:t>Faible sans prise de notes</a:t>
-            </a:r>
-            <a:endParaRPr lang="en-US" sz="1200" dirty="0"/>
-          </a:p>
-        </p:txBody>
-      </p:sp>
-      <p:sp>
-        <p:nvSpPr>
-          <p:cNvPr id="14" name="Text 12"/>
-          <p:cNvSpPr txBox="1"/>
-          <p:nvPr/>
-        </p:nvSpPr>
-        <p:spPr>
-          <a:xfrm>
-            <a:off x="731520" y="4709160"/>
-            <a:ext cx="2011680" cy="320040"/>
-          </a:xfrm>
-          <a:prstGeom prst="rect">
-            <a:avLst/>
-          </a:prstGeom>
-          <a:noFill/>
-          <a:ln/>
-        </p:spPr>
-        <p:txBody>
-          <a:bodyPr wrap="square" lIns="0" tIns="0" rIns="0" bIns="0" rtlCol="0" anchor="ctr"/>
-          <a:lstStyle/>
-          <a:p>
-            <a:pPr indent="0" marL="0">
-              <a:buNone/>
-            </a:pPr>
-            <a:r>
-              <a:rPr lang="en-US" sz="1200" dirty="0">
-                <a:solidFill>
-                  <a:srgbClr val="6B7683"/>
-                </a:solidFill>
-                <a:latin typeface="Calibri" pitchFamily="34" charset="0"/>
-                <a:ea typeface="Calibri" pitchFamily="34" charset="-122"/>
-                <a:cs typeface="Calibri" pitchFamily="34" charset="-120"/>
-              </a:rPr>
-              <a:t>Réutilisabilité</a:t>
-            </a:r>
-            <a:endParaRPr lang="en-US" sz="1200" dirty="0"/>
-          </a:p>
-        </p:txBody>
-      </p:sp>
-      <p:sp>
-        <p:nvSpPr>
-          <p:cNvPr id="15" name="Text 13"/>
-          <p:cNvSpPr txBox="1"/>
-          <p:nvPr/>
-        </p:nvSpPr>
-        <p:spPr>
-          <a:xfrm>
-            <a:off x="2743200" y="4709160"/>
-            <a:ext cx="3017520" cy="320040"/>
-          </a:xfrm>
-          <a:prstGeom prst="rect">
-            <a:avLst/>
-          </a:prstGeom>
-          <a:noFill/>
-          <a:ln/>
-        </p:spPr>
-        <p:txBody>
-          <a:bodyPr wrap="square" lIns="0" tIns="0" rIns="0" bIns="0" rtlCol="0" anchor="ctr"/>
-          <a:lstStyle/>
-          <a:p>
-            <a:pPr indent="0" marL="0">
-              <a:buNone/>
-            </a:pPr>
-            <a:r>
-              <a:rPr lang="en-US" sz="1200" b="1" dirty="0">
-                <a:solidFill>
-                  <a:srgbClr val="3A4552"/>
-                </a:solidFill>
-                <a:latin typeface="Calibri" pitchFamily="34" charset="0"/>
-                <a:ea typeface="Calibri" pitchFamily="34" charset="-122"/>
-                <a:cs typeface="Calibri" pitchFamily="34" charset="-120"/>
-              </a:rPr>
-              <a:t>Notes personnelles éparses</a:t>
-            </a:r>
-            <a:endParaRPr lang="en-US" sz="1200" dirty="0"/>
-          </a:p>
-        </p:txBody>
-      </p:sp>
-      <p:sp>
-        <p:nvSpPr>
-          <p:cNvPr id="16" name="Text 14"/>
-          <p:cNvSpPr txBox="1"/>
-          <p:nvPr/>
-        </p:nvSpPr>
-        <p:spPr>
-          <a:xfrm>
-            <a:off x="731520" y="5212080"/>
-            <a:ext cx="2011680" cy="320040"/>
-          </a:xfrm>
-          <a:prstGeom prst="rect">
-            <a:avLst/>
-          </a:prstGeom>
-          <a:noFill/>
-          <a:ln/>
-        </p:spPr>
-        <p:txBody>
-          <a:bodyPr wrap="square" lIns="0" tIns="0" rIns="0" bIns="0" rtlCol="0" anchor="ctr"/>
-          <a:lstStyle/>
-          <a:p>
-            <a:pPr indent="0" marL="0">
-              <a:buNone/>
-            </a:pPr>
-            <a:r>
-              <a:rPr lang="en-US" sz="1200" dirty="0">
-                <a:solidFill>
-                  <a:srgbClr val="6B7683"/>
-                </a:solidFill>
-                <a:latin typeface="Calibri" pitchFamily="34" charset="0"/>
-                <a:ea typeface="Calibri" pitchFamily="34" charset="-122"/>
-                <a:cs typeface="Calibri" pitchFamily="34" charset="-120"/>
-              </a:rPr>
-              <a:t>Partage équipe</a:t>
-            </a:r>
-            <a:endParaRPr lang="en-US" sz="1200" dirty="0"/>
-          </a:p>
-        </p:txBody>
-      </p:sp>
-      <p:sp>
-        <p:nvSpPr>
-          <p:cNvPr id="17" name="Text 15"/>
-          <p:cNvSpPr txBox="1"/>
-          <p:nvPr/>
-        </p:nvSpPr>
-        <p:spPr>
-          <a:xfrm>
-            <a:off x="2743200" y="5212080"/>
-            <a:ext cx="3017520" cy="320040"/>
-          </a:xfrm>
-          <a:prstGeom prst="rect">
-            <a:avLst/>
-          </a:prstGeom>
-          <a:noFill/>
-          <a:ln/>
-        </p:spPr>
-        <p:txBody>
-          <a:bodyPr wrap="square" lIns="0" tIns="0" rIns="0" bIns="0" rtlCol="0" anchor="ctr"/>
-          <a:lstStyle/>
-          <a:p>
-            <a:pPr indent="0" marL="0">
-              <a:buNone/>
-            </a:pPr>
-            <a:r>
-              <a:rPr lang="en-US" sz="1200" b="1" dirty="0">
-                <a:solidFill>
-                  <a:srgbClr val="3A4552"/>
-                </a:solidFill>
-                <a:latin typeface="Calibri" pitchFamily="34" charset="0"/>
-                <a:ea typeface="Calibri" pitchFamily="34" charset="-122"/>
-                <a:cs typeface="Calibri" pitchFamily="34" charset="-120"/>
-              </a:rPr>
-              <a:t>Difficile</a:t>
-            </a:r>
-            <a:endParaRPr lang="en-US" sz="1200" dirty="0"/>
-          </a:p>
-        </p:txBody>
-      </p:sp>
-      <p:sp>
-        <p:nvSpPr>
-          <p:cNvPr id="18" name="Text 16"/>
-          <p:cNvSpPr txBox="1"/>
-          <p:nvPr/>
-        </p:nvSpPr>
-        <p:spPr>
-          <a:xfrm>
-            <a:off x="5943600" y="3794760"/>
-            <a:ext cx="457200" cy="731520"/>
-          </a:xfrm>
-          <a:prstGeom prst="rect">
-            <a:avLst/>
-          </a:prstGeom>
-          <a:noFill/>
-          <a:ln/>
-        </p:spPr>
-        <p:txBody>
-          <a:bodyPr wrap="square" lIns="0" tIns="0" rIns="0" bIns="0" rtlCol="0" anchor="ctr"/>
-          <a:lstStyle/>
-          <a:p>
-            <a:pPr algn="ctr" indent="0" marL="0">
-              <a:buNone/>
-            </a:pPr>
-            <a:r>
-              <a:rPr lang="en-US" sz="5400" b="1" dirty="0">
-                <a:solidFill>
-                  <a:srgbClr val="F5B700"/>
-                </a:solidFill>
-                <a:latin typeface="Arial" pitchFamily="34" charset="0"/>
-                <a:ea typeface="Arial" pitchFamily="34" charset="-122"/>
-                <a:cs typeface="Arial" pitchFamily="34" charset="-120"/>
-              </a:rPr>
-              <a:t>›</a:t>
-            </a:r>
-            <a:endParaRPr lang="en-US" sz="5400" dirty="0"/>
-          </a:p>
-        </p:txBody>
-      </p:sp>
-      <p:sp>
-        <p:nvSpPr>
-          <p:cNvPr id="19" name="Shape 17"/>
+          <p:cNvPr id="6" name="Shape 4"/>
           <p:cNvSpPr/>
           <p:nvPr/>
         </p:nvSpPr>
         <p:spPr>
           <a:xfrm>
-            <a:off x="6217920" y="1920240"/>
-            <a:ext cx="5486400" cy="4480560"/>
+            <a:off x="457200" y="1828800"/>
+            <a:ext cx="7772400" cy="365760"/>
           </a:xfrm>
           <a:prstGeom prst="rect">
             <a:avLst/>
           </a:prstGeom>
           <a:solidFill>
-            <a:srgbClr val="003876"/>
+            <a:srgbClr val="001A3D"/>
           </a:solidFill>
           <a:ln w="12700">
             <a:solidFill>
-              <a:srgbClr val="003876"/>
+              <a:srgbClr val="001A3D"/>
             </a:solidFill>
             <a:prstDash val="solid"/>
           </a:ln>
@@ -7161,38 +7793,893 @@
       </p:sp>
       <p:sp>
         <p:nvSpPr>
+          <p:cNvPr id="7" name="Text 5"/>
+          <p:cNvSpPr txBox="1"/>
+          <p:nvPr/>
+        </p:nvSpPr>
+        <p:spPr>
+          <a:xfrm>
+            <a:off x="640080" y="1828800"/>
+            <a:ext cx="7406640" cy="365760"/>
+          </a:xfrm>
+          <a:prstGeom prst="rect">
+            <a:avLst/>
+          </a:prstGeom>
+          <a:noFill/>
+          <a:ln/>
+        </p:spPr>
+        <p:txBody>
+          <a:bodyPr wrap="square" lIns="0" tIns="0" rIns="0" bIns="0" rtlCol="0" anchor="ctr"/>
+          <a:lstStyle/>
+          <a:p>
+            <a:pPr indent="0" marL="0">
+              <a:buNone/>
+            </a:pPr>
+            <a:r>
+              <a:rPr lang="en-US" sz="1000" dirty="0">
+                <a:solidFill>
+                  <a:srgbClr val="CADCFC"/>
+                </a:solidFill>
+                <a:latin typeface="Courier New" pitchFamily="34" charset="0"/>
+                <a:ea typeface="Courier New" pitchFamily="34" charset="-122"/>
+                <a:cs typeface="Courier New" pitchFamily="34" charset="-120"/>
+              </a:rPr>
+              <a:t>prompt-redpaper-cics.md</a:t>
+            </a:r>
+            <a:endParaRPr lang="en-US" sz="1000" dirty="0"/>
+          </a:p>
+        </p:txBody>
+      </p:sp>
+      <p:sp>
+        <p:nvSpPr>
+          <p:cNvPr id="8" name="Text 6"/>
+          <p:cNvSpPr txBox="1"/>
+          <p:nvPr/>
+        </p:nvSpPr>
+        <p:spPr>
+          <a:xfrm>
+            <a:off x="685800" y="2331720"/>
+            <a:ext cx="7315200" cy="4023360"/>
+          </a:xfrm>
+          <a:prstGeom prst="rect">
+            <a:avLst/>
+          </a:prstGeom>
+          <a:noFill/>
+          <a:ln/>
+        </p:spPr>
+        <p:txBody>
+          <a:bodyPr wrap="square" lIns="0" tIns="0" rIns="0" bIns="0" rtlCol="0" anchor="t"/>
+          <a:lstStyle/>
+          <a:p>
+            <a:pPr indent="0" marL="0">
+              <a:buNone/>
+            </a:pPr>
+            <a:r>
+              <a:rPr lang="en-US" sz="900" dirty="0">
+                <a:solidFill>
+                  <a:srgbClr val="E8ECF3"/>
+                </a:solidFill>
+                <a:latin typeface="Courier New" pitchFamily="34" charset="0"/>
+                <a:ea typeface="Courier New" pitchFamily="34" charset="-122"/>
+                <a:cs typeface="Courier New" pitchFamily="34" charset="-120"/>
+              </a:rPr>
+              <a:t># RÔLE</a:t>
+            </a:r>
+            <a:endParaRPr lang="en-US" sz="900" dirty="0"/>
+          </a:p>
+          <a:p>
+            <a:pPr indent="0" marL="0">
+              <a:buNone/>
+            </a:pPr>
+            <a:r>
+              <a:rPr lang="en-US" sz="900" dirty="0">
+                <a:solidFill>
+                  <a:srgbClr val="E8ECF3"/>
+                </a:solidFill>
+                <a:latin typeface="Courier New" pitchFamily="34" charset="0"/>
+                <a:ea typeface="Courier New" pitchFamily="34" charset="-122"/>
+                <a:cs typeface="Courier New" pitchFamily="34" charset="-120"/>
+              </a:rPr>
+              <a:t>Tu es un architecte senior CICS/Java en banque française,</a:t>
+            </a:r>
+            <a:endParaRPr lang="en-US" sz="900" dirty="0"/>
+          </a:p>
+          <a:p>
+            <a:pPr indent="0" marL="0">
+              <a:buNone/>
+            </a:pPr>
+            <a:r>
+              <a:rPr lang="en-US" sz="900" dirty="0">
+                <a:solidFill>
+                  <a:srgbClr val="E8ECF3"/>
+                </a:solidFill>
+                <a:latin typeface="Courier New" pitchFamily="34" charset="0"/>
+                <a:ea typeface="Courier New" pitchFamily="34" charset="-122"/>
+                <a:cs typeface="Courier New" pitchFamily="34" charset="-120"/>
+              </a:rPr>
+              <a:t>avec expertise en intégration mainframe (CTG, JCICS, OSGi).</a:t>
+            </a:r>
+            <a:endParaRPr lang="en-US" sz="900" dirty="0"/>
+          </a:p>
+          <a:p>
+            <a:pPr indent="0" marL="0">
+              <a:buNone/>
+            </a:pPr>
+            <a:endParaRPr lang="en-US" sz="900" dirty="0"/>
+          </a:p>
+          <a:p>
+            <a:pPr indent="0" marL="0">
+              <a:buNone/>
+            </a:pPr>
+            <a:r>
+              <a:rPr lang="en-US" sz="900" dirty="0">
+                <a:solidFill>
+                  <a:srgbClr val="E8ECF3"/>
+                </a:solidFill>
+                <a:latin typeface="Courier New" pitchFamily="34" charset="0"/>
+                <a:ea typeface="Courier New" pitchFamily="34" charset="-122"/>
+                <a:cs typeface="Courier New" pitchFamily="34" charset="-120"/>
+              </a:rPr>
+              <a:t># CONTEXTE</a:t>
+            </a:r>
+            <a:endParaRPr lang="en-US" sz="900" dirty="0"/>
+          </a:p>
+          <a:p>
+            <a:pPr indent="0" marL="0">
+              <a:buNone/>
+            </a:pPr>
+            <a:r>
+              <a:rPr lang="en-US" sz="900" dirty="0">
+                <a:solidFill>
+                  <a:srgbClr val="E8ECF3"/>
+                </a:solidFill>
+                <a:latin typeface="Courier New" pitchFamily="34" charset="0"/>
+                <a:ea typeface="Courier New" pitchFamily="34" charset="-122"/>
+                <a:cs typeface="Courier New" pitchFamily="34" charset="-120"/>
+              </a:rPr>
+              <a:t>Domaine Paiements SEPA, environnement régulé PCI-DSS/RGPD.</a:t>
+            </a:r>
+            <a:endParaRPr lang="en-US" sz="900" dirty="0"/>
+          </a:p>
+          <a:p>
+            <a:pPr indent="0" marL="0">
+              <a:buNone/>
+            </a:pPr>
+            <a:r>
+              <a:rPr lang="en-US" sz="900" dirty="0">
+                <a:solidFill>
+                  <a:srgbClr val="E8ECF3"/>
+                </a:solidFill>
+                <a:latin typeface="Courier New" pitchFamily="34" charset="0"/>
+                <a:ea typeface="Courier New" pitchFamily="34" charset="-122"/>
+                <a:cs typeface="Courier New" pitchFamily="34" charset="-120"/>
+              </a:rPr>
+              <a:t>Stack hybride : Spring Boot 3.x &lt;-&gt; CICS TS via CTG.</a:t>
+            </a:r>
+            <a:endParaRPr lang="en-US" sz="900" dirty="0"/>
+          </a:p>
+          <a:p>
+            <a:pPr indent="0" marL="0">
+              <a:buNone/>
+            </a:pPr>
+            <a:endParaRPr lang="en-US" sz="900" dirty="0"/>
+          </a:p>
+          <a:p>
+            <a:pPr indent="0" marL="0">
+              <a:buNone/>
+            </a:pPr>
+            <a:r>
+              <a:rPr lang="en-US" sz="900" dirty="0">
+                <a:solidFill>
+                  <a:srgbClr val="E8ECF3"/>
+                </a:solidFill>
+                <a:latin typeface="Courier New" pitchFamily="34" charset="0"/>
+                <a:ea typeface="Courier New" pitchFamily="34" charset="-122"/>
+                <a:cs typeface="Courier New" pitchFamily="34" charset="-120"/>
+              </a:rPr>
+              <a:t># MISSION</a:t>
+            </a:r>
+            <a:endParaRPr lang="en-US" sz="900" dirty="0"/>
+          </a:p>
+          <a:p>
+            <a:pPr indent="0" marL="0">
+              <a:buNone/>
+            </a:pPr>
+            <a:r>
+              <a:rPr lang="en-US" sz="900" dirty="0">
+                <a:solidFill>
+                  <a:srgbClr val="E8ECF3"/>
+                </a:solidFill>
+                <a:latin typeface="Courier New" pitchFamily="34" charset="0"/>
+                <a:ea typeface="Courier New" pitchFamily="34" charset="-122"/>
+                <a:cs typeface="Courier New" pitchFamily="34" charset="-120"/>
+              </a:rPr>
+              <a:t>Lis intégralement le Redpaper IBM via web_fetch :</a:t>
+            </a:r>
+            <a:endParaRPr lang="en-US" sz="900" dirty="0"/>
+          </a:p>
+          <a:p>
+            <a:pPr indent="0" marL="0">
+              <a:buNone/>
+            </a:pPr>
+            <a:r>
+              <a:rPr lang="en-US" sz="900" dirty="0">
+                <a:solidFill>
+                  <a:srgbClr val="E8ECF3"/>
+                </a:solidFill>
+                <a:latin typeface="Courier New" pitchFamily="34" charset="0"/>
+                <a:ea typeface="Courier New" pitchFamily="34" charset="-122"/>
+                <a:cs typeface="Courier New" pitchFamily="34" charset="-120"/>
+              </a:rPr>
+              <a:t>https://www.redbooks.ibm.com/redpapers/pdfs/redp5628.pdf</a:t>
+            </a:r>
+            <a:endParaRPr lang="en-US" sz="900" dirty="0"/>
+          </a:p>
+          <a:p>
+            <a:pPr indent="0" marL="0">
+              <a:buNone/>
+            </a:pPr>
+            <a:r>
+              <a:rPr lang="en-US" sz="900" dirty="0">
+                <a:solidFill>
+                  <a:srgbClr val="E8ECF3"/>
+                </a:solidFill>
+                <a:latin typeface="Courier New" pitchFamily="34" charset="0"/>
+                <a:ea typeface="Courier New" pitchFamily="34" charset="-122"/>
+                <a:cs typeface="Courier New" pitchFamily="34" charset="-120"/>
+              </a:rPr>
+              <a:t>Produis une fiche technique en français, dense,</a:t>
+            </a:r>
+            <a:endParaRPr lang="en-US" sz="900" dirty="0"/>
+          </a:p>
+          <a:p>
+            <a:pPr indent="0" marL="0">
+              <a:buNone/>
+            </a:pPr>
+            <a:r>
+              <a:rPr lang="en-US" sz="900" dirty="0">
+                <a:solidFill>
+                  <a:srgbClr val="E8ECF3"/>
+                </a:solidFill>
+                <a:latin typeface="Courier New" pitchFamily="34" charset="0"/>
+                <a:ea typeface="Courier New" pitchFamily="34" charset="-122"/>
+                <a:cs typeface="Courier New" pitchFamily="34" charset="-120"/>
+              </a:rPr>
+              <a:t>exploitable en production.</a:t>
+            </a:r>
+            <a:endParaRPr lang="en-US" sz="900" dirty="0"/>
+          </a:p>
+          <a:p>
+            <a:pPr indent="0" marL="0">
+              <a:buNone/>
+            </a:pPr>
+            <a:endParaRPr lang="en-US" sz="900" dirty="0"/>
+          </a:p>
+          <a:p>
+            <a:pPr indent="0" marL="0">
+              <a:buNone/>
+            </a:pPr>
+            <a:r>
+              <a:rPr lang="en-US" sz="900" dirty="0">
+                <a:solidFill>
+                  <a:srgbClr val="E8ECF3"/>
+                </a:solidFill>
+                <a:latin typeface="Courier New" pitchFamily="34" charset="0"/>
+                <a:ea typeface="Courier New" pitchFamily="34" charset="-122"/>
+                <a:cs typeface="Courier New" pitchFamily="34" charset="-120"/>
+              </a:rPr>
+              <a:t># RÈGLES DE FIDÉLITÉ</a:t>
+            </a:r>
+            <a:endParaRPr lang="en-US" sz="900" dirty="0"/>
+          </a:p>
+          <a:p>
+            <a:pPr indent="0" marL="0">
+              <a:buNone/>
+            </a:pPr>
+            <a:r>
+              <a:rPr lang="en-US" sz="900" dirty="0">
+                <a:solidFill>
+                  <a:srgbClr val="E8ECF3"/>
+                </a:solidFill>
+                <a:latin typeface="Courier New" pitchFamily="34" charset="0"/>
+                <a:ea typeface="Courier New" pitchFamily="34" charset="-122"/>
+                <a:cs typeface="Courier New" pitchFamily="34" charset="-120"/>
+              </a:rPr>
+              <a:t>1. Aucune invention. Si une info manque, écris</a:t>
+            </a:r>
+            <a:endParaRPr lang="en-US" sz="900" dirty="0"/>
+          </a:p>
+          <a:p>
+            <a:pPr indent="0" marL="0">
+              <a:buNone/>
+            </a:pPr>
+            <a:r>
+              <a:rPr lang="en-US" sz="900" dirty="0">
+                <a:solidFill>
+                  <a:srgbClr val="E8ECF3"/>
+                </a:solidFill>
+                <a:latin typeface="Courier New" pitchFamily="34" charset="0"/>
+                <a:ea typeface="Courier New" pitchFamily="34" charset="-122"/>
+                <a:cs typeface="Courier New" pitchFamily="34" charset="-120"/>
+              </a:rPr>
+              <a:t>   "[Non précisé dans le document]".</a:t>
+            </a:r>
+            <a:endParaRPr lang="en-US" sz="900" dirty="0"/>
+          </a:p>
+          <a:p>
+            <a:pPr indent="0" marL="0">
+              <a:buNone/>
+            </a:pPr>
+            <a:r>
+              <a:rPr lang="en-US" sz="900" dirty="0">
+                <a:solidFill>
+                  <a:srgbClr val="E8ECF3"/>
+                </a:solidFill>
+                <a:latin typeface="Courier New" pitchFamily="34" charset="0"/>
+                <a:ea typeface="Courier New" pitchFamily="34" charset="-122"/>
+                <a:cs typeface="Courier New" pitchFamily="34" charset="-120"/>
+              </a:rPr>
+              <a:t>2. Cite les sections précises (§ 3.2, chapitre 4).</a:t>
+            </a:r>
+            <a:endParaRPr lang="en-US" sz="900" dirty="0"/>
+          </a:p>
+          <a:p>
+            <a:pPr indent="0" marL="0">
+              <a:buNone/>
+            </a:pPr>
+            <a:r>
+              <a:rPr lang="en-US" sz="900" dirty="0">
+                <a:solidFill>
+                  <a:srgbClr val="E8ECF3"/>
+                </a:solidFill>
+                <a:latin typeface="Courier New" pitchFamily="34" charset="0"/>
+                <a:ea typeface="Courier New" pitchFamily="34" charset="-122"/>
+                <a:cs typeface="Courier New" pitchFamily="34" charset="-120"/>
+              </a:rPr>
+              <a:t>3. Préserve les valeurs numériques exactes.</a:t>
+            </a:r>
+            <a:endParaRPr lang="en-US" sz="900" dirty="0"/>
+          </a:p>
+          <a:p>
+            <a:pPr indent="0" marL="0">
+              <a:buNone/>
+            </a:pPr>
+            <a:r>
+              <a:rPr lang="en-US" sz="900" dirty="0">
+                <a:solidFill>
+                  <a:srgbClr val="E8ECF3"/>
+                </a:solidFill>
+                <a:latin typeface="Courier New" pitchFamily="34" charset="0"/>
+                <a:ea typeface="Courier New" pitchFamily="34" charset="-122"/>
+                <a:cs typeface="Courier New" pitchFamily="34" charset="-120"/>
+              </a:rPr>
+              <a:t>4. Signale toute divergence slide / transcript.</a:t>
+            </a:r>
+            <a:endParaRPr lang="en-US" sz="900" dirty="0"/>
+          </a:p>
+          <a:p>
+            <a:pPr indent="0" marL="0">
+              <a:buNone/>
+            </a:pPr>
+            <a:endParaRPr lang="en-US" sz="900" dirty="0"/>
+          </a:p>
+          <a:p>
+            <a:pPr indent="0" marL="0">
+              <a:buNone/>
+            </a:pPr>
+            <a:r>
+              <a:rPr lang="en-US" sz="900" dirty="0">
+                <a:solidFill>
+                  <a:srgbClr val="E8ECF3"/>
+                </a:solidFill>
+                <a:latin typeface="Courier New" pitchFamily="34" charset="0"/>
+                <a:ea typeface="Courier New" pitchFamily="34" charset="-122"/>
+                <a:cs typeface="Courier New" pitchFamily="34" charset="-120"/>
+              </a:rPr>
+              <a:t># STRUCTURE DE SORTIE (Markdown strict)</a:t>
+            </a:r>
+            <a:endParaRPr lang="en-US" sz="900" dirty="0"/>
+          </a:p>
+          <a:p>
+            <a:pPr indent="0" marL="0">
+              <a:buNone/>
+            </a:pPr>
+            <a:r>
+              <a:rPr lang="en-US" sz="900" dirty="0">
+                <a:solidFill>
+                  <a:srgbClr val="E8ECF3"/>
+                </a:solidFill>
+                <a:latin typeface="Courier New" pitchFamily="34" charset="0"/>
+                <a:ea typeface="Courier New" pitchFamily="34" charset="-122"/>
+                <a:cs typeface="Courier New" pitchFamily="34" charset="-120"/>
+              </a:rPr>
+              <a:t>## Métadonnées   ## Synthèse exécutive</a:t>
+            </a:r>
+            <a:endParaRPr lang="en-US" sz="900" dirty="0"/>
+          </a:p>
+          <a:p>
+            <a:pPr indent="0" marL="0">
+              <a:buNone/>
+            </a:pPr>
+            <a:r>
+              <a:rPr lang="en-US" sz="900" dirty="0">
+                <a:solidFill>
+                  <a:srgbClr val="E8ECF3"/>
+                </a:solidFill>
+                <a:latin typeface="Courier New" pitchFamily="34" charset="0"/>
+                <a:ea typeface="Courier New" pitchFamily="34" charset="-122"/>
+                <a:cs typeface="Courier New" pitchFamily="34" charset="-120"/>
+              </a:rPr>
+              <a:t>## Concepts fondamentaux   ## Détails techniques</a:t>
+            </a:r>
+            <a:endParaRPr lang="en-US" sz="900" dirty="0"/>
+          </a:p>
+          <a:p>
+            <a:pPr indent="0" marL="0">
+              <a:buNone/>
+            </a:pPr>
+            <a:r>
+              <a:rPr lang="en-US" sz="900" dirty="0">
+                <a:solidFill>
+                  <a:srgbClr val="E8ECF3"/>
+                </a:solidFill>
+                <a:latin typeface="Courier New" pitchFamily="34" charset="0"/>
+                <a:ea typeface="Courier New" pitchFamily="34" charset="-122"/>
+                <a:cs typeface="Courier New" pitchFamily="34" charset="-120"/>
+              </a:rPr>
+              <a:t>## Pièges et non-dits   ## Cheat-sheet finale</a:t>
+            </a:r>
+            <a:endParaRPr lang="en-US" sz="900" dirty="0"/>
+          </a:p>
+          <a:p>
+            <a:pPr indent="0" marL="0">
+              <a:buNone/>
+            </a:pPr>
+            <a:endParaRPr lang="en-US" sz="900" dirty="0"/>
+          </a:p>
+          <a:p>
+            <a:pPr indent="0" marL="0">
+              <a:buNone/>
+            </a:pPr>
+            <a:r>
+              <a:rPr lang="en-US" sz="900" dirty="0">
+                <a:solidFill>
+                  <a:srgbClr val="E8ECF3"/>
+                </a:solidFill>
+                <a:latin typeface="Courier New" pitchFamily="34" charset="0"/>
+                <a:ea typeface="Courier New" pitchFamily="34" charset="-122"/>
+                <a:cs typeface="Courier New" pitchFamily="34" charset="-120"/>
+              </a:rPr>
+              <a:t># CONTRAINTES DE STYLE</a:t>
+            </a:r>
+            <a:endParaRPr lang="en-US" sz="900" dirty="0"/>
+          </a:p>
+          <a:p>
+            <a:pPr indent="0" marL="0">
+              <a:buNone/>
+            </a:pPr>
+            <a:r>
+              <a:rPr lang="en-US" sz="900" dirty="0">
+                <a:solidFill>
+                  <a:srgbClr val="E8ECF3"/>
+                </a:solidFill>
+                <a:latin typeface="Courier New" pitchFamily="34" charset="0"/>
+                <a:ea typeface="Courier New" pitchFamily="34" charset="-122"/>
+                <a:cs typeface="Courier New" pitchFamily="34" charset="-120"/>
+              </a:rPr>
+              <a:t>Français technique. Densité maximale. Blocs code.</a:t>
+            </a:r>
+            <a:endParaRPr lang="en-US" sz="900" dirty="0"/>
+          </a:p>
+        </p:txBody>
+      </p:sp>
+      <p:sp>
+        <p:nvSpPr>
+          <p:cNvPr id="9" name="Text 7"/>
+          <p:cNvSpPr txBox="1"/>
+          <p:nvPr/>
+        </p:nvSpPr>
+        <p:spPr>
+          <a:xfrm>
+            <a:off x="8503920" y="1874520"/>
+            <a:ext cx="3291840" cy="320040"/>
+          </a:xfrm>
+          <a:prstGeom prst="rect">
+            <a:avLst/>
+          </a:prstGeom>
+          <a:noFill/>
+          <a:ln/>
+        </p:spPr>
+        <p:txBody>
+          <a:bodyPr wrap="square" lIns="0" tIns="0" rIns="0" bIns="0" rtlCol="0" anchor="ctr"/>
+          <a:lstStyle/>
+          <a:p>
+            <a:pPr indent="0" marL="0">
+              <a:buNone/>
+            </a:pPr>
+            <a:r>
+              <a:rPr lang="en-US" sz="1100" b="1" spc="300" kern="0" dirty="0">
+                <a:solidFill>
+                  <a:srgbClr val="F5B700"/>
+                </a:solidFill>
+                <a:latin typeface="Calibri" pitchFamily="34" charset="0"/>
+                <a:ea typeface="Calibri" pitchFamily="34" charset="-122"/>
+                <a:cs typeface="Calibri" pitchFamily="34" charset="-120"/>
+              </a:rPr>
+              <a:t>CE QUE CE PROMPT PRODUIT</a:t>
+            </a:r>
+            <a:endParaRPr lang="en-US" sz="1100" dirty="0"/>
+          </a:p>
+        </p:txBody>
+      </p:sp>
+      <p:sp>
+        <p:nvSpPr>
+          <p:cNvPr id="10" name="Shape 8"/>
+          <p:cNvSpPr/>
+          <p:nvPr/>
+        </p:nvSpPr>
+        <p:spPr>
+          <a:xfrm>
+            <a:off x="8503920" y="2377440"/>
+            <a:ext cx="73152" cy="182880"/>
+          </a:xfrm>
+          <a:prstGeom prst="rect">
+            <a:avLst/>
+          </a:prstGeom>
+          <a:solidFill>
+            <a:srgbClr val="F5B700"/>
+          </a:solidFill>
+          <a:ln w="12700">
+            <a:solidFill>
+              <a:srgbClr val="F5B700"/>
+            </a:solidFill>
+            <a:prstDash val="solid"/>
+          </a:ln>
+        </p:spPr>
+      </p:sp>
+      <p:sp>
+        <p:nvSpPr>
+          <p:cNvPr id="11" name="Text 9"/>
+          <p:cNvSpPr txBox="1"/>
+          <p:nvPr/>
+        </p:nvSpPr>
+        <p:spPr>
+          <a:xfrm>
+            <a:off x="8686800" y="2331720"/>
+            <a:ext cx="3108960" cy="274320"/>
+          </a:xfrm>
+          <a:prstGeom prst="rect">
+            <a:avLst/>
+          </a:prstGeom>
+          <a:noFill/>
+          <a:ln/>
+        </p:spPr>
+        <p:txBody>
+          <a:bodyPr wrap="square" lIns="0" tIns="0" rIns="0" bIns="0" rtlCol="0" anchor="ctr"/>
+          <a:lstStyle/>
+          <a:p>
+            <a:pPr indent="0" marL="0">
+              <a:buNone/>
+            </a:pPr>
+            <a:r>
+              <a:rPr lang="en-US" sz="1200" b="1" dirty="0">
+                <a:solidFill>
+                  <a:srgbClr val="003876"/>
+                </a:solidFill>
+                <a:latin typeface="Calibri" pitchFamily="34" charset="0"/>
+                <a:ea typeface="Calibri" pitchFamily="34" charset="-122"/>
+                <a:cs typeface="Calibri" pitchFamily="34" charset="-120"/>
+              </a:rPr>
+              <a:t>Rôle ciblé</a:t>
+            </a:r>
+            <a:endParaRPr lang="en-US" sz="1200" dirty="0"/>
+          </a:p>
+        </p:txBody>
+      </p:sp>
+      <p:sp>
+        <p:nvSpPr>
+          <p:cNvPr id="12" name="Text 10"/>
+          <p:cNvSpPr txBox="1"/>
+          <p:nvPr/>
+        </p:nvSpPr>
+        <p:spPr>
+          <a:xfrm>
+            <a:off x="8686800" y="2606040"/>
+            <a:ext cx="3108960" cy="502920"/>
+          </a:xfrm>
+          <a:prstGeom prst="rect">
+            <a:avLst/>
+          </a:prstGeom>
+          <a:noFill/>
+          <a:ln/>
+        </p:spPr>
+        <p:txBody>
+          <a:bodyPr wrap="square" lIns="0" tIns="0" rIns="0" bIns="0" rtlCol="0" anchor="ctr"/>
+          <a:lstStyle/>
+          <a:p>
+            <a:pPr indent="0" marL="0">
+              <a:buNone/>
+            </a:pPr>
+            <a:r>
+              <a:rPr lang="en-US" sz="1100" dirty="0">
+                <a:solidFill>
+                  <a:srgbClr val="3A4552"/>
+                </a:solidFill>
+                <a:latin typeface="Calibri" pitchFamily="34" charset="0"/>
+                <a:ea typeface="Calibri" pitchFamily="34" charset="-122"/>
+                <a:cs typeface="Calibri" pitchFamily="34" charset="-120"/>
+              </a:rPr>
+              <a:t>L'IA adopte le registre technique attendu.</a:t>
+            </a:r>
+            <a:endParaRPr lang="en-US" sz="1100" dirty="0"/>
+          </a:p>
+        </p:txBody>
+      </p:sp>
+      <p:sp>
+        <p:nvSpPr>
+          <p:cNvPr id="13" name="Shape 11"/>
+          <p:cNvSpPr/>
+          <p:nvPr/>
+        </p:nvSpPr>
+        <p:spPr>
+          <a:xfrm>
+            <a:off x="8503920" y="3172968"/>
+            <a:ext cx="73152" cy="182880"/>
+          </a:xfrm>
+          <a:prstGeom prst="rect">
+            <a:avLst/>
+          </a:prstGeom>
+          <a:solidFill>
+            <a:srgbClr val="F5B700"/>
+          </a:solidFill>
+          <a:ln w="12700">
+            <a:solidFill>
+              <a:srgbClr val="F5B700"/>
+            </a:solidFill>
+            <a:prstDash val="solid"/>
+          </a:ln>
+        </p:spPr>
+      </p:sp>
+      <p:sp>
+        <p:nvSpPr>
+          <p:cNvPr id="14" name="Text 12"/>
+          <p:cNvSpPr txBox="1"/>
+          <p:nvPr/>
+        </p:nvSpPr>
+        <p:spPr>
+          <a:xfrm>
+            <a:off x="8686800" y="3127248"/>
+            <a:ext cx="3108960" cy="274320"/>
+          </a:xfrm>
+          <a:prstGeom prst="rect">
+            <a:avLst/>
+          </a:prstGeom>
+          <a:noFill/>
+          <a:ln/>
+        </p:spPr>
+        <p:txBody>
+          <a:bodyPr wrap="square" lIns="0" tIns="0" rIns="0" bIns="0" rtlCol="0" anchor="ctr"/>
+          <a:lstStyle/>
+          <a:p>
+            <a:pPr indent="0" marL="0">
+              <a:buNone/>
+            </a:pPr>
+            <a:r>
+              <a:rPr lang="en-US" sz="1200" b="1" dirty="0">
+                <a:solidFill>
+                  <a:srgbClr val="003876"/>
+                </a:solidFill>
+                <a:latin typeface="Calibri" pitchFamily="34" charset="0"/>
+                <a:ea typeface="Calibri" pitchFamily="34" charset="-122"/>
+                <a:cs typeface="Calibri" pitchFamily="34" charset="-120"/>
+              </a:rPr>
+              <a:t>Contexte cadré</a:t>
+            </a:r>
+            <a:endParaRPr lang="en-US" sz="1200" dirty="0"/>
+          </a:p>
+        </p:txBody>
+      </p:sp>
+      <p:sp>
+        <p:nvSpPr>
+          <p:cNvPr id="15" name="Text 13"/>
+          <p:cNvSpPr txBox="1"/>
+          <p:nvPr/>
+        </p:nvSpPr>
+        <p:spPr>
+          <a:xfrm>
+            <a:off x="8686800" y="3401568"/>
+            <a:ext cx="3108960" cy="502920"/>
+          </a:xfrm>
+          <a:prstGeom prst="rect">
+            <a:avLst/>
+          </a:prstGeom>
+          <a:noFill/>
+          <a:ln/>
+        </p:spPr>
+        <p:txBody>
+          <a:bodyPr wrap="square" lIns="0" tIns="0" rIns="0" bIns="0" rtlCol="0" anchor="ctr"/>
+          <a:lstStyle/>
+          <a:p>
+            <a:pPr indent="0" marL="0">
+              <a:buNone/>
+            </a:pPr>
+            <a:r>
+              <a:rPr lang="en-US" sz="1100" dirty="0">
+                <a:solidFill>
+                  <a:srgbClr val="3A4552"/>
+                </a:solidFill>
+                <a:latin typeface="Calibri" pitchFamily="34" charset="0"/>
+                <a:ea typeface="Calibri" pitchFamily="34" charset="-122"/>
+                <a:cs typeface="Calibri" pitchFamily="34" charset="-120"/>
+              </a:rPr>
+              <a:t>Vocabulaire aligné sur la stack réelle.</a:t>
+            </a:r>
+            <a:endParaRPr lang="en-US" sz="1100" dirty="0"/>
+          </a:p>
+        </p:txBody>
+      </p:sp>
+      <p:sp>
+        <p:nvSpPr>
+          <p:cNvPr id="16" name="Shape 14"/>
+          <p:cNvSpPr/>
+          <p:nvPr/>
+        </p:nvSpPr>
+        <p:spPr>
+          <a:xfrm>
+            <a:off x="8503920" y="3968496"/>
+            <a:ext cx="73152" cy="182880"/>
+          </a:xfrm>
+          <a:prstGeom prst="rect">
+            <a:avLst/>
+          </a:prstGeom>
+          <a:solidFill>
+            <a:srgbClr val="F5B700"/>
+          </a:solidFill>
+          <a:ln w="12700">
+            <a:solidFill>
+              <a:srgbClr val="F5B700"/>
+            </a:solidFill>
+            <a:prstDash val="solid"/>
+          </a:ln>
+        </p:spPr>
+      </p:sp>
+      <p:sp>
+        <p:nvSpPr>
+          <p:cNvPr id="17" name="Text 15"/>
+          <p:cNvSpPr txBox="1"/>
+          <p:nvPr/>
+        </p:nvSpPr>
+        <p:spPr>
+          <a:xfrm>
+            <a:off x="8686800" y="3922776"/>
+            <a:ext cx="3108960" cy="274320"/>
+          </a:xfrm>
+          <a:prstGeom prst="rect">
+            <a:avLst/>
+          </a:prstGeom>
+          <a:noFill/>
+          <a:ln/>
+        </p:spPr>
+        <p:txBody>
+          <a:bodyPr wrap="square" lIns="0" tIns="0" rIns="0" bIns="0" rtlCol="0" anchor="ctr"/>
+          <a:lstStyle/>
+          <a:p>
+            <a:pPr indent="0" marL="0">
+              <a:buNone/>
+            </a:pPr>
+            <a:r>
+              <a:rPr lang="en-US" sz="1200" b="1" dirty="0">
+                <a:solidFill>
+                  <a:srgbClr val="003876"/>
+                </a:solidFill>
+                <a:latin typeface="Calibri" pitchFamily="34" charset="0"/>
+                <a:ea typeface="Calibri" pitchFamily="34" charset="-122"/>
+                <a:cs typeface="Calibri" pitchFamily="34" charset="-120"/>
+              </a:rPr>
+              <a:t>Mission bornée</a:t>
+            </a:r>
+            <a:endParaRPr lang="en-US" sz="1200" dirty="0"/>
+          </a:p>
+        </p:txBody>
+      </p:sp>
+      <p:sp>
+        <p:nvSpPr>
+          <p:cNvPr id="18" name="Text 16"/>
+          <p:cNvSpPr txBox="1"/>
+          <p:nvPr/>
+        </p:nvSpPr>
+        <p:spPr>
+          <a:xfrm>
+            <a:off x="8686800" y="4197096"/>
+            <a:ext cx="3108960" cy="502920"/>
+          </a:xfrm>
+          <a:prstGeom prst="rect">
+            <a:avLst/>
+          </a:prstGeom>
+          <a:noFill/>
+          <a:ln/>
+        </p:spPr>
+        <p:txBody>
+          <a:bodyPr wrap="square" lIns="0" tIns="0" rIns="0" bIns="0" rtlCol="0" anchor="ctr"/>
+          <a:lstStyle/>
+          <a:p>
+            <a:pPr indent="0" marL="0">
+              <a:buNone/>
+            </a:pPr>
+            <a:r>
+              <a:rPr lang="en-US" sz="1100" dirty="0">
+                <a:solidFill>
+                  <a:srgbClr val="3A4552"/>
+                </a:solidFill>
+                <a:latin typeface="Calibri" pitchFamily="34" charset="0"/>
+                <a:ea typeface="Calibri" pitchFamily="34" charset="-122"/>
+                <a:cs typeface="Calibri" pitchFamily="34" charset="-120"/>
+              </a:rPr>
+              <a:t>Une source précise, un livrable défini.</a:t>
+            </a:r>
+            <a:endParaRPr lang="en-US" sz="1100" dirty="0"/>
+          </a:p>
+        </p:txBody>
+      </p:sp>
+      <p:sp>
+        <p:nvSpPr>
+          <p:cNvPr id="19" name="Shape 17"/>
+          <p:cNvSpPr/>
+          <p:nvPr/>
+        </p:nvSpPr>
+        <p:spPr>
+          <a:xfrm>
+            <a:off x="8503920" y="4764024"/>
+            <a:ext cx="73152" cy="182880"/>
+          </a:xfrm>
+          <a:prstGeom prst="rect">
+            <a:avLst/>
+          </a:prstGeom>
+          <a:solidFill>
+            <a:srgbClr val="F5B700"/>
+          </a:solidFill>
+          <a:ln w="12700">
+            <a:solidFill>
+              <a:srgbClr val="F5B700"/>
+            </a:solidFill>
+            <a:prstDash val="solid"/>
+          </a:ln>
+        </p:spPr>
+      </p:sp>
+      <p:sp>
+        <p:nvSpPr>
           <p:cNvPr id="20" name="Text 18"/>
           <p:cNvSpPr txBox="1"/>
           <p:nvPr/>
         </p:nvSpPr>
         <p:spPr>
           <a:xfrm>
-            <a:off x="6492240" y="2103120"/>
-            <a:ext cx="2743200" cy="365760"/>
-          </a:xfrm>
-          <a:prstGeom prst="rect">
-            <a:avLst/>
-          </a:prstGeom>
-          <a:noFill/>
-          <a:ln/>
-        </p:spPr>
-        <p:txBody>
-          <a:bodyPr wrap="square" lIns="0" tIns="0" rIns="0" bIns="0" rtlCol="0" anchor="ctr"/>
-          <a:lstStyle/>
-          <a:p>
-            <a:pPr indent="0" marL="0">
-              <a:buNone/>
-            </a:pPr>
-            <a:r>
-              <a:rPr lang="en-US" sz="1200" b="1" spc="400" kern="0" dirty="0">
-                <a:solidFill>
-                  <a:srgbClr val="F5B700"/>
-                </a:solidFill>
-                <a:latin typeface="Calibri" pitchFamily="34" charset="0"/>
-                <a:ea typeface="Calibri" pitchFamily="34" charset="-122"/>
-                <a:cs typeface="Calibri" pitchFamily="34" charset="-120"/>
-              </a:rPr>
-              <a:t>APRÈS</a:t>
+            <a:off x="8686800" y="4718304"/>
+            <a:ext cx="3108960" cy="274320"/>
+          </a:xfrm>
+          <a:prstGeom prst="rect">
+            <a:avLst/>
+          </a:prstGeom>
+          <a:noFill/>
+          <a:ln/>
+        </p:spPr>
+        <p:txBody>
+          <a:bodyPr wrap="square" lIns="0" tIns="0" rIns="0" bIns="0" rtlCol="0" anchor="ctr"/>
+          <a:lstStyle/>
+          <a:p>
+            <a:pPr indent="0" marL="0">
+              <a:buNone/>
+            </a:pPr>
+            <a:r>
+              <a:rPr lang="en-US" sz="1200" b="1" dirty="0">
+                <a:solidFill>
+                  <a:srgbClr val="003876"/>
+                </a:solidFill>
+                <a:latin typeface="Calibri" pitchFamily="34" charset="0"/>
+                <a:ea typeface="Calibri" pitchFamily="34" charset="-122"/>
+                <a:cs typeface="Calibri" pitchFamily="34" charset="-120"/>
+              </a:rPr>
+              <a:t>Anti-hallucination</a:t>
             </a:r>
             <a:endParaRPr lang="en-US" sz="1200" dirty="0"/>
           </a:p>
@@ -7206,71 +8693,96 @@
         </p:nvSpPr>
         <p:spPr>
           <a:xfrm>
-            <a:off x="6492240" y="2468880"/>
-            <a:ext cx="4937760" cy="457200"/>
-          </a:xfrm>
-          <a:prstGeom prst="rect">
-            <a:avLst/>
-          </a:prstGeom>
-          <a:noFill/>
-          <a:ln/>
-        </p:spPr>
-        <p:txBody>
-          <a:bodyPr wrap="square" lIns="0" tIns="0" rIns="0" bIns="0" rtlCol="0" anchor="ctr"/>
-          <a:lstStyle/>
-          <a:p>
-            <a:pPr indent="0" marL="0">
-              <a:buNone/>
-            </a:pPr>
-            <a:r>
-              <a:rPr lang="en-US" sz="2200" b="1" dirty="0">
-                <a:solidFill>
-                  <a:srgbClr val="FFFFFF"/>
-                </a:solidFill>
-                <a:latin typeface="Cambria" pitchFamily="34" charset="0"/>
-                <a:ea typeface="Cambria" pitchFamily="34" charset="-122"/>
-                <a:cs typeface="Cambria" pitchFamily="34" charset="-120"/>
-              </a:rPr>
-              <a:t>Fiche structurée par IA</a:t>
-            </a:r>
-            <a:endParaRPr lang="en-US" sz="2200" dirty="0"/>
-          </a:p>
-        </p:txBody>
-      </p:sp>
-      <p:sp>
-        <p:nvSpPr>
-          <p:cNvPr id="22" name="Text 20"/>
-          <p:cNvSpPr txBox="1"/>
-          <p:nvPr/>
-        </p:nvSpPr>
-        <p:spPr>
-          <a:xfrm>
-            <a:off x="6492240" y="3200400"/>
-            <a:ext cx="2011680" cy="320040"/>
-          </a:xfrm>
-          <a:prstGeom prst="rect">
-            <a:avLst/>
-          </a:prstGeom>
-          <a:noFill/>
-          <a:ln/>
-        </p:spPr>
-        <p:txBody>
-          <a:bodyPr wrap="square" lIns="0" tIns="0" rIns="0" bIns="0" rtlCol="0" anchor="ctr"/>
-          <a:lstStyle/>
-          <a:p>
-            <a:pPr indent="0" marL="0">
-              <a:buNone/>
-            </a:pPr>
-            <a:r>
-              <a:rPr lang="en-US" sz="1200" dirty="0">
-                <a:solidFill>
-                  <a:srgbClr val="CADCFC"/>
-                </a:solidFill>
-                <a:latin typeface="Calibri" pitchFamily="34" charset="0"/>
-                <a:ea typeface="Calibri" pitchFamily="34" charset="-122"/>
-                <a:cs typeface="Calibri" pitchFamily="34" charset="-120"/>
-              </a:rPr>
-              <a:t>Volume</a:t>
+            <a:off x="8686800" y="4992624"/>
+            <a:ext cx="3108960" cy="502920"/>
+          </a:xfrm>
+          <a:prstGeom prst="rect">
+            <a:avLst/>
+          </a:prstGeom>
+          <a:noFill/>
+          <a:ln/>
+        </p:spPr>
+        <p:txBody>
+          <a:bodyPr wrap="square" lIns="0" tIns="0" rIns="0" bIns="0" rtlCol="0" anchor="ctr"/>
+          <a:lstStyle/>
+          <a:p>
+            <a:pPr indent="0" marL="0">
+              <a:buNone/>
+            </a:pPr>
+            <a:r>
+              <a:rPr lang="en-US" sz="1100" dirty="0">
+                <a:solidFill>
+                  <a:srgbClr val="3A4552"/>
+                </a:solidFill>
+                <a:latin typeface="Calibri" pitchFamily="34" charset="0"/>
+                <a:ea typeface="Calibri" pitchFamily="34" charset="-122"/>
+                <a:cs typeface="Calibri" pitchFamily="34" charset="-120"/>
+              </a:rPr>
+              <a:t>Inconnues explicites, pas inventées.</a:t>
+            </a:r>
+            <a:endParaRPr lang="en-US" sz="1100" dirty="0"/>
+          </a:p>
+        </p:txBody>
+      </p:sp>
+      <p:sp>
+        <p:nvSpPr>
+          <p:cNvPr id="22" name="Shape 20"/>
+          <p:cNvSpPr/>
+          <p:nvPr/>
+        </p:nvSpPr>
+        <p:spPr>
+          <a:xfrm>
+            <a:off x="8503920" y="5559552"/>
+            <a:ext cx="73152" cy="182880"/>
+          </a:xfrm>
+          <a:prstGeom prst="rect">
+            <a:avLst/>
+          </a:prstGeom>
+          <a:solidFill>
+            <a:srgbClr val="F5B700"/>
+          </a:solidFill>
+          <a:ln w="12700">
+            <a:solidFill>
+              <a:srgbClr val="F5B700"/>
+            </a:solidFill>
+            <a:prstDash val="solid"/>
+          </a:ln>
+        </p:spPr>
+      </p:sp>
+      <p:sp>
+        <p:nvSpPr>
+          <p:cNvPr id="23" name="Text 21"/>
+          <p:cNvSpPr txBox="1"/>
+          <p:nvPr/>
+        </p:nvSpPr>
+        <p:spPr>
+          <a:xfrm>
+            <a:off x="8686800" y="5513832"/>
+            <a:ext cx="3108960" cy="274320"/>
+          </a:xfrm>
+          <a:prstGeom prst="rect">
+            <a:avLst/>
+          </a:prstGeom>
+          <a:noFill/>
+          <a:ln/>
+        </p:spPr>
+        <p:txBody>
+          <a:bodyPr wrap="square" lIns="0" tIns="0" rIns="0" bIns="0" rtlCol="0" anchor="ctr"/>
+          <a:lstStyle/>
+          <a:p>
+            <a:pPr indent="0" marL="0">
+              <a:buNone/>
+            </a:pPr>
+            <a:r>
+              <a:rPr lang="en-US" sz="1200" b="1" dirty="0">
+                <a:solidFill>
+                  <a:srgbClr val="003876"/>
+                </a:solidFill>
+                <a:latin typeface="Calibri" pitchFamily="34" charset="0"/>
+                <a:ea typeface="Calibri" pitchFamily="34" charset="-122"/>
+                <a:cs typeface="Calibri" pitchFamily="34" charset="-120"/>
+              </a:rPr>
+              <a:t>Sortie reproductible</a:t>
             </a:r>
             <a:endParaRPr lang="en-US" sz="1200" dirty="0"/>
           </a:p>
@@ -7278,358 +8790,46 @@
       </p:sp>
       <p:sp>
         <p:nvSpPr>
-          <p:cNvPr id="23" name="Text 21"/>
-          <p:cNvSpPr txBox="1"/>
-          <p:nvPr/>
-        </p:nvSpPr>
-        <p:spPr>
-          <a:xfrm>
-            <a:off x="8503920" y="3200400"/>
-            <a:ext cx="3017520" cy="320040"/>
-          </a:xfrm>
-          <a:prstGeom prst="rect">
-            <a:avLst/>
-          </a:prstGeom>
-          <a:noFill/>
-          <a:ln/>
-        </p:spPr>
-        <p:txBody>
-          <a:bodyPr wrap="square" lIns="0" tIns="0" rIns="0" bIns="0" rtlCol="0" anchor="ctr"/>
-          <a:lstStyle/>
-          <a:p>
-            <a:pPr indent="0" marL="0">
-              <a:buNone/>
-            </a:pPr>
-            <a:r>
-              <a:rPr lang="en-US" sz="1200" b="1" dirty="0">
-                <a:solidFill>
-                  <a:srgbClr val="FFFFFF"/>
-                </a:solidFill>
-                <a:latin typeface="Calibri" pitchFamily="34" charset="0"/>
-                <a:ea typeface="Calibri" pitchFamily="34" charset="-122"/>
-                <a:cs typeface="Calibri" pitchFamily="34" charset="-120"/>
-              </a:rPr>
-              <a:t>2 à 3 pages Markdown</a:t>
-            </a:r>
-            <a:endParaRPr lang="en-US" sz="1200" dirty="0"/>
-          </a:p>
-        </p:txBody>
-      </p:sp>
-      <p:sp>
-        <p:nvSpPr>
           <p:cNvPr id="24" name="Text 22"/>
           <p:cNvSpPr txBox="1"/>
           <p:nvPr/>
         </p:nvSpPr>
         <p:spPr>
           <a:xfrm>
-            <a:off x="6492240" y="3703320"/>
-            <a:ext cx="2011680" cy="320040"/>
-          </a:xfrm>
-          <a:prstGeom prst="rect">
-            <a:avLst/>
-          </a:prstGeom>
-          <a:noFill/>
-          <a:ln/>
-        </p:spPr>
-        <p:txBody>
-          <a:bodyPr wrap="square" lIns="0" tIns="0" rIns="0" bIns="0" rtlCol="0" anchor="ctr"/>
-          <a:lstStyle/>
-          <a:p>
-            <a:pPr indent="0" marL="0">
-              <a:buNone/>
-            </a:pPr>
-            <a:r>
-              <a:rPr lang="en-US" sz="1200" dirty="0">
-                <a:solidFill>
-                  <a:srgbClr val="CADCFC"/>
-                </a:solidFill>
-                <a:latin typeface="Calibri" pitchFamily="34" charset="0"/>
-                <a:ea typeface="Calibri" pitchFamily="34" charset="-122"/>
-                <a:cs typeface="Calibri" pitchFamily="34" charset="-120"/>
-              </a:rPr>
-              <a:t>Temps investi</a:t>
-            </a:r>
-            <a:endParaRPr lang="en-US" sz="1200" dirty="0"/>
-          </a:p>
-        </p:txBody>
-      </p:sp>
-      <p:sp>
-        <p:nvSpPr>
-          <p:cNvPr id="25" name="Text 23"/>
-          <p:cNvSpPr txBox="1"/>
-          <p:nvPr/>
-        </p:nvSpPr>
-        <p:spPr>
-          <a:xfrm>
-            <a:off x="8503920" y="3703320"/>
-            <a:ext cx="3017520" cy="320040"/>
-          </a:xfrm>
-          <a:prstGeom prst="rect">
-            <a:avLst/>
-          </a:prstGeom>
-          <a:noFill/>
-          <a:ln/>
-        </p:spPr>
-        <p:txBody>
-          <a:bodyPr wrap="square" lIns="0" tIns="0" rIns="0" bIns="0" rtlCol="0" anchor="ctr"/>
-          <a:lstStyle/>
-          <a:p>
-            <a:pPr indent="0" marL="0">
-              <a:buNone/>
-            </a:pPr>
-            <a:r>
-              <a:rPr lang="en-US" sz="1200" b="1" dirty="0">
-                <a:solidFill>
-                  <a:srgbClr val="FFFFFF"/>
-                </a:solidFill>
-                <a:latin typeface="Calibri" pitchFamily="34" charset="0"/>
-                <a:ea typeface="Calibri" pitchFamily="34" charset="-122"/>
-                <a:cs typeface="Calibri" pitchFamily="34" charset="-120"/>
-              </a:rPr>
-              <a:t>30 à 45 minutes</a:t>
-            </a:r>
-            <a:endParaRPr lang="en-US" sz="1200" dirty="0"/>
-          </a:p>
-        </p:txBody>
-      </p:sp>
-      <p:sp>
-        <p:nvSpPr>
-          <p:cNvPr id="26" name="Text 24"/>
-          <p:cNvSpPr txBox="1"/>
-          <p:nvPr/>
-        </p:nvSpPr>
-        <p:spPr>
-          <a:xfrm>
-            <a:off x="6492240" y="4206240"/>
-            <a:ext cx="2011680" cy="320040"/>
-          </a:xfrm>
-          <a:prstGeom prst="rect">
-            <a:avLst/>
-          </a:prstGeom>
-          <a:noFill/>
-          <a:ln/>
-        </p:spPr>
-        <p:txBody>
-          <a:bodyPr wrap="square" lIns="0" tIns="0" rIns="0" bIns="0" rtlCol="0" anchor="ctr"/>
-          <a:lstStyle/>
-          <a:p>
-            <a:pPr indent="0" marL="0">
-              <a:buNone/>
-            </a:pPr>
-            <a:r>
-              <a:rPr lang="en-US" sz="1200" dirty="0">
-                <a:solidFill>
-                  <a:srgbClr val="CADCFC"/>
-                </a:solidFill>
-                <a:latin typeface="Calibri" pitchFamily="34" charset="0"/>
-                <a:ea typeface="Calibri" pitchFamily="34" charset="-122"/>
-                <a:cs typeface="Calibri" pitchFamily="34" charset="-120"/>
-              </a:rPr>
-              <a:t>Rétention</a:t>
-            </a:r>
-            <a:endParaRPr lang="en-US" sz="1200" dirty="0"/>
-          </a:p>
-        </p:txBody>
-      </p:sp>
-      <p:sp>
-        <p:nvSpPr>
-          <p:cNvPr id="27" name="Text 25"/>
-          <p:cNvSpPr txBox="1"/>
-          <p:nvPr/>
-        </p:nvSpPr>
-        <p:spPr>
-          <a:xfrm>
-            <a:off x="8503920" y="4206240"/>
-            <a:ext cx="3017520" cy="320040"/>
-          </a:xfrm>
-          <a:prstGeom prst="rect">
-            <a:avLst/>
-          </a:prstGeom>
-          <a:noFill/>
-          <a:ln/>
-        </p:spPr>
-        <p:txBody>
-          <a:bodyPr wrap="square" lIns="0" tIns="0" rIns="0" bIns="0" rtlCol="0" anchor="ctr"/>
-          <a:lstStyle/>
-          <a:p>
-            <a:pPr indent="0" marL="0">
-              <a:buNone/>
-            </a:pPr>
-            <a:r>
-              <a:rPr lang="en-US" sz="1200" b="1" dirty="0">
-                <a:solidFill>
-                  <a:srgbClr val="FFFFFF"/>
-                </a:solidFill>
-                <a:latin typeface="Calibri" pitchFamily="34" charset="0"/>
-                <a:ea typeface="Calibri" pitchFamily="34" charset="-122"/>
-                <a:cs typeface="Calibri" pitchFamily="34" charset="-120"/>
-              </a:rPr>
-              <a:t>Élevée (structure imposée)</a:t>
-            </a:r>
-            <a:endParaRPr lang="en-US" sz="1200" dirty="0"/>
-          </a:p>
-        </p:txBody>
-      </p:sp>
-      <p:sp>
-        <p:nvSpPr>
-          <p:cNvPr id="28" name="Text 26"/>
-          <p:cNvSpPr txBox="1"/>
-          <p:nvPr/>
-        </p:nvSpPr>
-        <p:spPr>
-          <a:xfrm>
-            <a:off x="6492240" y="4709160"/>
-            <a:ext cx="2011680" cy="320040"/>
-          </a:xfrm>
-          <a:prstGeom prst="rect">
-            <a:avLst/>
-          </a:prstGeom>
-          <a:noFill/>
-          <a:ln/>
-        </p:spPr>
-        <p:txBody>
-          <a:bodyPr wrap="square" lIns="0" tIns="0" rIns="0" bIns="0" rtlCol="0" anchor="ctr"/>
-          <a:lstStyle/>
-          <a:p>
-            <a:pPr indent="0" marL="0">
-              <a:buNone/>
-            </a:pPr>
-            <a:r>
-              <a:rPr lang="en-US" sz="1200" dirty="0">
-                <a:solidFill>
-                  <a:srgbClr val="CADCFC"/>
-                </a:solidFill>
-                <a:latin typeface="Calibri" pitchFamily="34" charset="0"/>
-                <a:ea typeface="Calibri" pitchFamily="34" charset="-122"/>
-                <a:cs typeface="Calibri" pitchFamily="34" charset="-120"/>
-              </a:rPr>
-              <a:t>Réutilisabilité</a:t>
-            </a:r>
-            <a:endParaRPr lang="en-US" sz="1200" dirty="0"/>
-          </a:p>
-        </p:txBody>
-      </p:sp>
-      <p:sp>
-        <p:nvSpPr>
-          <p:cNvPr id="29" name="Text 27"/>
-          <p:cNvSpPr txBox="1"/>
-          <p:nvPr/>
-        </p:nvSpPr>
-        <p:spPr>
-          <a:xfrm>
-            <a:off x="8503920" y="4709160"/>
-            <a:ext cx="3017520" cy="320040"/>
-          </a:xfrm>
-          <a:prstGeom prst="rect">
-            <a:avLst/>
-          </a:prstGeom>
-          <a:noFill/>
-          <a:ln/>
-        </p:spPr>
-        <p:txBody>
-          <a:bodyPr wrap="square" lIns="0" tIns="0" rIns="0" bIns="0" rtlCol="0" anchor="ctr"/>
-          <a:lstStyle/>
-          <a:p>
-            <a:pPr indent="0" marL="0">
-              <a:buNone/>
-            </a:pPr>
-            <a:r>
-              <a:rPr lang="en-US" sz="1200" b="1" dirty="0">
-                <a:solidFill>
-                  <a:srgbClr val="FFFFFF"/>
-                </a:solidFill>
-                <a:latin typeface="Calibri" pitchFamily="34" charset="0"/>
-                <a:ea typeface="Calibri" pitchFamily="34" charset="-122"/>
-                <a:cs typeface="Calibri" pitchFamily="34" charset="-120"/>
-              </a:rPr>
-              <a:t>Corpus versionné</a:t>
-            </a:r>
-            <a:endParaRPr lang="en-US" sz="1200" dirty="0"/>
-          </a:p>
-        </p:txBody>
-      </p:sp>
-      <p:sp>
-        <p:nvSpPr>
-          <p:cNvPr id="30" name="Text 28"/>
-          <p:cNvSpPr txBox="1"/>
-          <p:nvPr/>
-        </p:nvSpPr>
-        <p:spPr>
-          <a:xfrm>
-            <a:off x="6492240" y="5212080"/>
-            <a:ext cx="2011680" cy="320040"/>
-          </a:xfrm>
-          <a:prstGeom prst="rect">
-            <a:avLst/>
-          </a:prstGeom>
-          <a:noFill/>
-          <a:ln/>
-        </p:spPr>
-        <p:txBody>
-          <a:bodyPr wrap="square" lIns="0" tIns="0" rIns="0" bIns="0" rtlCol="0" anchor="ctr"/>
-          <a:lstStyle/>
-          <a:p>
-            <a:pPr indent="0" marL="0">
-              <a:buNone/>
-            </a:pPr>
-            <a:r>
-              <a:rPr lang="en-US" sz="1200" dirty="0">
-                <a:solidFill>
-                  <a:srgbClr val="CADCFC"/>
-                </a:solidFill>
-                <a:latin typeface="Calibri" pitchFamily="34" charset="0"/>
-                <a:ea typeface="Calibri" pitchFamily="34" charset="-122"/>
-                <a:cs typeface="Calibri" pitchFamily="34" charset="-120"/>
-              </a:rPr>
-              <a:t>Partage équipe</a:t>
-            </a:r>
-            <a:endParaRPr lang="en-US" sz="1200" dirty="0"/>
-          </a:p>
-        </p:txBody>
-      </p:sp>
-      <p:sp>
-        <p:nvSpPr>
-          <p:cNvPr id="31" name="Text 29"/>
-          <p:cNvSpPr txBox="1"/>
-          <p:nvPr/>
-        </p:nvSpPr>
-        <p:spPr>
-          <a:xfrm>
-            <a:off x="8503920" y="5212080"/>
-            <a:ext cx="3017520" cy="320040"/>
-          </a:xfrm>
-          <a:prstGeom prst="rect">
-            <a:avLst/>
-          </a:prstGeom>
-          <a:noFill/>
-          <a:ln/>
-        </p:spPr>
-        <p:txBody>
-          <a:bodyPr wrap="square" lIns="0" tIns="0" rIns="0" bIns="0" rtlCol="0" anchor="ctr"/>
-          <a:lstStyle/>
-          <a:p>
-            <a:pPr indent="0" marL="0">
-              <a:buNone/>
-            </a:pPr>
-            <a:r>
-              <a:rPr lang="en-US" sz="1200" b="1" dirty="0">
-                <a:solidFill>
-                  <a:srgbClr val="FFFFFF"/>
-                </a:solidFill>
-                <a:latin typeface="Calibri" pitchFamily="34" charset="0"/>
-                <a:ea typeface="Calibri" pitchFamily="34" charset="-122"/>
-                <a:cs typeface="Calibri" pitchFamily="34" charset="-120"/>
-              </a:rPr>
-              <a:t>Immédiat via Git</a:t>
-            </a:r>
-            <a:endParaRPr lang="en-US" sz="1200" dirty="0"/>
-          </a:p>
-        </p:txBody>
-      </p:sp>
-      <p:sp>
-        <p:nvSpPr>
-          <p:cNvPr id="32" name="Shape 30"/>
+            <a:off x="8686800" y="5788152"/>
+            <a:ext cx="3108960" cy="502920"/>
+          </a:xfrm>
+          <a:prstGeom prst="rect">
+            <a:avLst/>
+          </a:prstGeom>
+          <a:noFill/>
+          <a:ln/>
+        </p:spPr>
+        <p:txBody>
+          <a:bodyPr wrap="square" lIns="0" tIns="0" rIns="0" bIns="0" rtlCol="0" anchor="ctr"/>
+          <a:lstStyle/>
+          <a:p>
+            <a:pPr indent="0" marL="0">
+              <a:buNone/>
+            </a:pPr>
+            <a:r>
+              <a:rPr lang="en-US" sz="1100" dirty="0">
+                <a:solidFill>
+                  <a:srgbClr val="3A4552"/>
+                </a:solidFill>
+                <a:latin typeface="Calibri" pitchFamily="34" charset="0"/>
+                <a:ea typeface="Calibri" pitchFamily="34" charset="-122"/>
+                <a:cs typeface="Calibri" pitchFamily="34" charset="-120"/>
+              </a:rPr>
+              <a:t>Même structure d'une fiche à l'autre.</a:t>
+            </a:r>
+            <a:endParaRPr lang="en-US" sz="1100" dirty="0"/>
+          </a:p>
+        </p:txBody>
+      </p:sp>
+      <p:sp>
+        <p:nvSpPr>
+          <p:cNvPr id="25" name="Shape 23"/>
           <p:cNvSpPr/>
           <p:nvPr/>
         </p:nvSpPr>
@@ -7654,7 +8854,7 @@
       </p:sp>
       <p:sp>
         <p:nvSpPr>
-          <p:cNvPr id="33" name="Text 31"/>
+          <p:cNvPr id="26" name="Text 24"/>
           <p:cNvSpPr txBox="1"/>
           <p:nvPr/>
         </p:nvSpPr>
@@ -7693,7 +8893,7 @@
       </p:sp>
       <p:sp>
         <p:nvSpPr>
-          <p:cNvPr id="34" name="Text 32"/>
+          <p:cNvPr id="27" name="Text 25"/>
           <p:cNvSpPr txBox="1"/>
           <p:nvPr/>
         </p:nvSpPr>
@@ -7724,7 +8924,7 @@
                 <a:ea typeface="Calibri" pitchFamily="34" charset="-122"/>
                 <a:cs typeface="Calibri" pitchFamily="34" charset="-120"/>
               </a:rPr>
-              <a:t>6 / 10</a:t>
+              <a:t>6 / 11</a:t>
             </a:r>
             <a:endParaRPr lang="en-US" sz="900" dirty="0"/>
           </a:p>
@@ -7796,7 +8996,7 @@
         <p:spPr>
           <a:xfrm>
             <a:off x="685800" y="457200"/>
-            <a:ext cx="5486400" cy="365760"/>
+            <a:ext cx="7315200" cy="365760"/>
           </a:xfrm>
           <a:prstGeom prst="rect">
             <a:avLst/>
@@ -7820,7 +9020,7 @@
                 <a:ea typeface="Calibri" pitchFamily="34" charset="-122"/>
                 <a:cs typeface="Calibri" pitchFamily="34" charset="-120"/>
               </a:rPr>
-              <a:t>06  ·  CAS D'USAGE</a:t>
+              <a:t>06  ·  DÉMONSTRATION</a:t>
             </a:r>
             <a:endParaRPr lang="en-US" sz="1100" dirty="0"/>
           </a:p>
@@ -7859,7 +9059,7 @@
                 <a:ea typeface="Cambria" pitchFamily="34" charset="-122"/>
                 <a:cs typeface="Cambria" pitchFamily="34" charset="-120"/>
               </a:rPr>
-              <a:t>Application concrète : parcours CICS / Java hybride</a:t>
+              <a:t>Avant / après : le même Redbook, deux expériences</a:t>
             </a:r>
             <a:endParaRPr lang="en-US" sz="3200" dirty="0"/>
           </a:p>
@@ -7873,78 +9073,14 @@
         </p:nvSpPr>
         <p:spPr>
           <a:xfrm>
-            <a:off x="457200" y="2011680"/>
-            <a:ext cx="3657600" cy="457200"/>
+            <a:off x="457200" y="1920240"/>
+            <a:ext cx="5486400" cy="4480560"/>
           </a:xfrm>
           <a:prstGeom prst="rect">
             <a:avLst/>
           </a:prstGeom>
           <a:solidFill>
-            <a:srgbClr val="F5B700"/>
-          </a:solidFill>
-          <a:ln w="12700">
-            <a:solidFill>
-              <a:srgbClr val="F5B700"/>
-            </a:solidFill>
-            <a:prstDash val="solid"/>
-          </a:ln>
-        </p:spPr>
-      </p:sp>
-      <p:sp>
-        <p:nvSpPr>
-          <p:cNvPr id="6" name="Text 4"/>
-          <p:cNvSpPr txBox="1"/>
-          <p:nvPr/>
-        </p:nvSpPr>
-        <p:spPr>
-          <a:xfrm>
-            <a:off x="640080" y="2011680"/>
-            <a:ext cx="3291840" cy="457200"/>
-          </a:xfrm>
-          <a:prstGeom prst="rect">
-            <a:avLst/>
-          </a:prstGeom>
-          <a:noFill/>
-          <a:ln/>
-        </p:spPr>
-        <p:txBody>
-          <a:bodyPr wrap="square" lIns="0" tIns="0" rIns="0" bIns="0" rtlCol="0" anchor="ctr"/>
-          <a:lstStyle/>
-          <a:p>
-            <a:pPr indent="0" marL="0">
-              <a:buNone/>
-            </a:pPr>
-            <a:r>
-              <a:rPr lang="en-US" sz="1100" b="1" spc="400" kern="0" dirty="0">
-                <a:solidFill>
-                  <a:srgbClr val="003876"/>
-                </a:solidFill>
-                <a:latin typeface="Calibri" pitchFamily="34" charset="0"/>
-                <a:ea typeface="Calibri" pitchFamily="34" charset="-122"/>
-                <a:cs typeface="Calibri" pitchFamily="34" charset="-120"/>
-              </a:rPr>
-              <a:t>PHASE 1</a:t>
-            </a:r>
-            <a:endParaRPr lang="en-US" sz="1100" dirty="0"/>
-          </a:p>
-        </p:txBody>
-      </p:sp>
-      <p:sp>
-        <p:nvSpPr>
-          <p:cNvPr id="7" name="Shape 5"/>
-          <p:cNvSpPr/>
-          <p:nvPr/>
-        </p:nvSpPr>
-        <p:spPr>
-          <a:xfrm>
-            <a:off x="457200" y="2468880"/>
-            <a:ext cx="3657600" cy="2011680"/>
-          </a:xfrm>
-          <a:prstGeom prst="rect">
-            <a:avLst/>
-          </a:prstGeom>
-          <a:solidFill>
-            <a:srgbClr val="FFFFFF"/>
+            <a:srgbClr val="F5F5F5"/>
           </a:solidFill>
           <a:ln w="12700">
             <a:solidFill>
@@ -7956,40 +9092,118 @@
       </p:sp>
       <p:sp>
         <p:nvSpPr>
-          <p:cNvPr id="8" name="Text 6"/>
-          <p:cNvSpPr txBox="1"/>
-          <p:nvPr/>
-        </p:nvSpPr>
-        <p:spPr>
-          <a:xfrm>
-            <a:off x="640080" y="2606040"/>
-            <a:ext cx="3291840" cy="457200"/>
-          </a:xfrm>
-          <a:prstGeom prst="rect">
-            <a:avLst/>
-          </a:prstGeom>
-          <a:noFill/>
-          <a:ln/>
-        </p:spPr>
-        <p:txBody>
-          <a:bodyPr wrap="square" lIns="0" tIns="0" rIns="0" bIns="0" rtlCol="0" anchor="ctr"/>
-          <a:lstStyle/>
-          <a:p>
-            <a:pPr indent="0" marL="0">
-              <a:buNone/>
-            </a:pPr>
-            <a:r>
-              <a:rPr lang="en-US" sz="2000" b="1" dirty="0">
-                <a:solidFill>
-                  <a:srgbClr val="003876"/>
+          <p:cNvPr id="6" name="Text 4"/>
+          <p:cNvSpPr txBox="1"/>
+          <p:nvPr/>
+        </p:nvSpPr>
+        <p:spPr>
+          <a:xfrm>
+            <a:off x="731520" y="2103120"/>
+            <a:ext cx="2743200" cy="365760"/>
+          </a:xfrm>
+          <a:prstGeom prst="rect">
+            <a:avLst/>
+          </a:prstGeom>
+          <a:noFill/>
+          <a:ln/>
+        </p:spPr>
+        <p:txBody>
+          <a:bodyPr wrap="square" lIns="0" tIns="0" rIns="0" bIns="0" rtlCol="0" anchor="ctr"/>
+          <a:lstStyle/>
+          <a:p>
+            <a:pPr indent="0" marL="0">
+              <a:buNone/>
+            </a:pPr>
+            <a:r>
+              <a:rPr lang="en-US" sz="1200" b="1" spc="400" kern="0" dirty="0">
+                <a:solidFill>
+                  <a:srgbClr val="6B7683"/>
+                </a:solidFill>
+                <a:latin typeface="Calibri" pitchFamily="34" charset="0"/>
+                <a:ea typeface="Calibri" pitchFamily="34" charset="-122"/>
+                <a:cs typeface="Calibri" pitchFamily="34" charset="-120"/>
+              </a:rPr>
+              <a:t>AVANT</a:t>
+            </a:r>
+            <a:endParaRPr lang="en-US" sz="1200" dirty="0"/>
+          </a:p>
+        </p:txBody>
+      </p:sp>
+      <p:sp>
+        <p:nvSpPr>
+          <p:cNvPr id="7" name="Text 5"/>
+          <p:cNvSpPr txBox="1"/>
+          <p:nvPr/>
+        </p:nvSpPr>
+        <p:spPr>
+          <a:xfrm>
+            <a:off x="731520" y="2468880"/>
+            <a:ext cx="4937760" cy="457200"/>
+          </a:xfrm>
+          <a:prstGeom prst="rect">
+            <a:avLst/>
+          </a:prstGeom>
+          <a:noFill/>
+          <a:ln/>
+        </p:spPr>
+        <p:txBody>
+          <a:bodyPr wrap="square" lIns="0" tIns="0" rIns="0" bIns="0" rtlCol="0" anchor="ctr"/>
+          <a:lstStyle/>
+          <a:p>
+            <a:pPr indent="0" marL="0">
+              <a:buNone/>
+            </a:pPr>
+            <a:r>
+              <a:rPr lang="en-US" sz="2200" b="1" dirty="0">
+                <a:solidFill>
+                  <a:srgbClr val="3A4552"/>
                 </a:solidFill>
                 <a:latin typeface="Cambria" pitchFamily="34" charset="0"/>
                 <a:ea typeface="Cambria" pitchFamily="34" charset="-122"/>
                 <a:cs typeface="Cambria" pitchFamily="34" charset="-120"/>
               </a:rPr>
-              <a:t>Cartographie</a:t>
-            </a:r>
-            <a:endParaRPr lang="en-US" sz="2000" dirty="0"/>
+              <a:t>Lecture linéaire</a:t>
+            </a:r>
+            <a:endParaRPr lang="en-US" sz="2200" dirty="0"/>
+          </a:p>
+        </p:txBody>
+      </p:sp>
+      <p:sp>
+        <p:nvSpPr>
+          <p:cNvPr id="8" name="Text 6"/>
+          <p:cNvSpPr txBox="1"/>
+          <p:nvPr/>
+        </p:nvSpPr>
+        <p:spPr>
+          <a:xfrm>
+            <a:off x="731520" y="3200400"/>
+            <a:ext cx="2011680" cy="320040"/>
+          </a:xfrm>
+          <a:prstGeom prst="rect">
+            <a:avLst/>
+          </a:prstGeom>
+          <a:noFill/>
+          <a:ln/>
+        </p:spPr>
+        <p:txBody>
+          <a:bodyPr wrap="square" lIns="0" tIns="0" rIns="0" bIns="0" rtlCol="0" anchor="ctr"/>
+          <a:lstStyle/>
+          <a:p>
+            <a:pPr indent="0" marL="0">
+              <a:buNone/>
+            </a:pPr>
+            <a:r>
+              <a:rPr lang="en-US" sz="1200" dirty="0">
+                <a:solidFill>
+                  <a:srgbClr val="6B7683"/>
+                </a:solidFill>
+                <a:latin typeface="Calibri" pitchFamily="34" charset="0"/>
+                <a:ea typeface="Calibri" pitchFamily="34" charset="-122"/>
+                <a:cs typeface="Calibri" pitchFamily="34" charset="-120"/>
+              </a:rPr>
+              <a:t>Volume</a:t>
+            </a:r>
+            <a:endParaRPr lang="en-US" sz="1200" dirty="0"/>
           </a:p>
         </p:txBody>
       </p:sp>
@@ -8001,8 +9215,47 @@
         </p:nvSpPr>
         <p:spPr>
           <a:xfrm>
-            <a:off x="640080" y="3154680"/>
-            <a:ext cx="3291840" cy="1234440"/>
+            <a:off x="2743200" y="3200400"/>
+            <a:ext cx="3017520" cy="320040"/>
+          </a:xfrm>
+          <a:prstGeom prst="rect">
+            <a:avLst/>
+          </a:prstGeom>
+          <a:noFill/>
+          <a:ln/>
+        </p:spPr>
+        <p:txBody>
+          <a:bodyPr wrap="square" lIns="0" tIns="0" rIns="0" bIns="0" rtlCol="0" anchor="ctr"/>
+          <a:lstStyle/>
+          <a:p>
+            <a:pPr indent="0" marL="0">
+              <a:buNone/>
+            </a:pPr>
+            <a:r>
+              <a:rPr lang="en-US" sz="1200" b="1" dirty="0">
+                <a:solidFill>
+                  <a:srgbClr val="3A4552"/>
+                </a:solidFill>
+                <a:latin typeface="Calibri" pitchFamily="34" charset="0"/>
+                <a:ea typeface="Calibri" pitchFamily="34" charset="-122"/>
+                <a:cs typeface="Calibri" pitchFamily="34" charset="-120"/>
+              </a:rPr>
+              <a:t>~250 pages PDF</a:t>
+            </a:r>
+            <a:endParaRPr lang="en-US" sz="1200" dirty="0"/>
+          </a:p>
+        </p:txBody>
+      </p:sp>
+      <p:sp>
+        <p:nvSpPr>
+          <p:cNvPr id="10" name="Text 8"/>
+          <p:cNvSpPr txBox="1"/>
+          <p:nvPr/>
+        </p:nvSpPr>
+        <p:spPr>
+          <a:xfrm>
+            <a:off x="731520" y="3703320"/>
+            <a:ext cx="2011680" cy="320040"/>
           </a:xfrm>
           <a:prstGeom prst="rect">
             <a:avLst/>
@@ -8020,13 +9273,52 @@
             <a:r>
               <a:rPr lang="en-US" sz="1200" dirty="0">
                 <a:solidFill>
+                  <a:srgbClr val="6B7683"/>
+                </a:solidFill>
+                <a:latin typeface="Calibri" pitchFamily="34" charset="0"/>
+                <a:ea typeface="Calibri" pitchFamily="34" charset="-122"/>
+                <a:cs typeface="Calibri" pitchFamily="34" charset="-120"/>
+              </a:rPr>
+              <a:t>Temps investi</a:t>
+            </a:r>
+            <a:endParaRPr lang="en-US" sz="1200" dirty="0"/>
+          </a:p>
+        </p:txBody>
+      </p:sp>
+      <p:sp>
+        <p:nvSpPr>
+          <p:cNvPr id="11" name="Text 9"/>
+          <p:cNvSpPr txBox="1"/>
+          <p:nvPr/>
+        </p:nvSpPr>
+        <p:spPr>
+          <a:xfrm>
+            <a:off x="2743200" y="3703320"/>
+            <a:ext cx="3017520" cy="320040"/>
+          </a:xfrm>
+          <a:prstGeom prst="rect">
+            <a:avLst/>
+          </a:prstGeom>
+          <a:noFill/>
+          <a:ln/>
+        </p:spPr>
+        <p:txBody>
+          <a:bodyPr wrap="square" lIns="0" tIns="0" rIns="0" bIns="0" rtlCol="0" anchor="ctr"/>
+          <a:lstStyle/>
+          <a:p>
+            <a:pPr indent="0" marL="0">
+              <a:buNone/>
+            </a:pPr>
+            <a:r>
+              <a:rPr lang="en-US" sz="1200" b="1" dirty="0">
+                <a:solidFill>
                   <a:srgbClr val="3A4552"/>
                 </a:solidFill>
                 <a:latin typeface="Calibri" pitchFamily="34" charset="0"/>
                 <a:ea typeface="Calibri" pitchFamily="34" charset="-122"/>
                 <a:cs typeface="Calibri" pitchFamily="34" charset="-120"/>
               </a:rPr>
-              <a:t>IA identifie les Redbooks et learning paths IBM pertinents. Sortie : plan de lecture priorisé.</a:t>
+              <a:t>6 à 8 heures</a:t>
             </a:r>
             <a:endParaRPr lang="en-US" sz="1200" dirty="0"/>
           </a:p>
@@ -8034,24 +9326,297 @@
       </p:sp>
       <p:sp>
         <p:nvSpPr>
-          <p:cNvPr id="10" name="Shape 8"/>
+          <p:cNvPr id="12" name="Text 10"/>
+          <p:cNvSpPr txBox="1"/>
+          <p:nvPr/>
+        </p:nvSpPr>
+        <p:spPr>
+          <a:xfrm>
+            <a:off x="731520" y="4206240"/>
+            <a:ext cx="2011680" cy="320040"/>
+          </a:xfrm>
+          <a:prstGeom prst="rect">
+            <a:avLst/>
+          </a:prstGeom>
+          <a:noFill/>
+          <a:ln/>
+        </p:spPr>
+        <p:txBody>
+          <a:bodyPr wrap="square" lIns="0" tIns="0" rIns="0" bIns="0" rtlCol="0" anchor="ctr"/>
+          <a:lstStyle/>
+          <a:p>
+            <a:pPr indent="0" marL="0">
+              <a:buNone/>
+            </a:pPr>
+            <a:r>
+              <a:rPr lang="en-US" sz="1200" dirty="0">
+                <a:solidFill>
+                  <a:srgbClr val="6B7683"/>
+                </a:solidFill>
+                <a:latin typeface="Calibri" pitchFamily="34" charset="0"/>
+                <a:ea typeface="Calibri" pitchFamily="34" charset="-122"/>
+                <a:cs typeface="Calibri" pitchFamily="34" charset="-120"/>
+              </a:rPr>
+              <a:t>Rétention</a:t>
+            </a:r>
+            <a:endParaRPr lang="en-US" sz="1200" dirty="0"/>
+          </a:p>
+        </p:txBody>
+      </p:sp>
+      <p:sp>
+        <p:nvSpPr>
+          <p:cNvPr id="13" name="Text 11"/>
+          <p:cNvSpPr txBox="1"/>
+          <p:nvPr/>
+        </p:nvSpPr>
+        <p:spPr>
+          <a:xfrm>
+            <a:off x="2743200" y="4206240"/>
+            <a:ext cx="3017520" cy="320040"/>
+          </a:xfrm>
+          <a:prstGeom prst="rect">
+            <a:avLst/>
+          </a:prstGeom>
+          <a:noFill/>
+          <a:ln/>
+        </p:spPr>
+        <p:txBody>
+          <a:bodyPr wrap="square" lIns="0" tIns="0" rIns="0" bIns="0" rtlCol="0" anchor="ctr"/>
+          <a:lstStyle/>
+          <a:p>
+            <a:pPr indent="0" marL="0">
+              <a:buNone/>
+            </a:pPr>
+            <a:r>
+              <a:rPr lang="en-US" sz="1200" b="1" dirty="0">
+                <a:solidFill>
+                  <a:srgbClr val="3A4552"/>
+                </a:solidFill>
+                <a:latin typeface="Calibri" pitchFamily="34" charset="0"/>
+                <a:ea typeface="Calibri" pitchFamily="34" charset="-122"/>
+                <a:cs typeface="Calibri" pitchFamily="34" charset="-120"/>
+              </a:rPr>
+              <a:t>Faible sans prise de notes</a:t>
+            </a:r>
+            <a:endParaRPr lang="en-US" sz="1200" dirty="0"/>
+          </a:p>
+        </p:txBody>
+      </p:sp>
+      <p:sp>
+        <p:nvSpPr>
+          <p:cNvPr id="14" name="Text 12"/>
+          <p:cNvSpPr txBox="1"/>
+          <p:nvPr/>
+        </p:nvSpPr>
+        <p:spPr>
+          <a:xfrm>
+            <a:off x="731520" y="4709160"/>
+            <a:ext cx="2011680" cy="320040"/>
+          </a:xfrm>
+          <a:prstGeom prst="rect">
+            <a:avLst/>
+          </a:prstGeom>
+          <a:noFill/>
+          <a:ln/>
+        </p:spPr>
+        <p:txBody>
+          <a:bodyPr wrap="square" lIns="0" tIns="0" rIns="0" bIns="0" rtlCol="0" anchor="ctr"/>
+          <a:lstStyle/>
+          <a:p>
+            <a:pPr indent="0" marL="0">
+              <a:buNone/>
+            </a:pPr>
+            <a:r>
+              <a:rPr lang="en-US" sz="1200" dirty="0">
+                <a:solidFill>
+                  <a:srgbClr val="6B7683"/>
+                </a:solidFill>
+                <a:latin typeface="Calibri" pitchFamily="34" charset="0"/>
+                <a:ea typeface="Calibri" pitchFamily="34" charset="-122"/>
+                <a:cs typeface="Calibri" pitchFamily="34" charset="-120"/>
+              </a:rPr>
+              <a:t>Réutilisabilité</a:t>
+            </a:r>
+            <a:endParaRPr lang="en-US" sz="1200" dirty="0"/>
+          </a:p>
+        </p:txBody>
+      </p:sp>
+      <p:sp>
+        <p:nvSpPr>
+          <p:cNvPr id="15" name="Text 13"/>
+          <p:cNvSpPr txBox="1"/>
+          <p:nvPr/>
+        </p:nvSpPr>
+        <p:spPr>
+          <a:xfrm>
+            <a:off x="2743200" y="4709160"/>
+            <a:ext cx="3017520" cy="320040"/>
+          </a:xfrm>
+          <a:prstGeom prst="rect">
+            <a:avLst/>
+          </a:prstGeom>
+          <a:noFill/>
+          <a:ln/>
+        </p:spPr>
+        <p:txBody>
+          <a:bodyPr wrap="square" lIns="0" tIns="0" rIns="0" bIns="0" rtlCol="0" anchor="ctr"/>
+          <a:lstStyle/>
+          <a:p>
+            <a:pPr indent="0" marL="0">
+              <a:buNone/>
+            </a:pPr>
+            <a:r>
+              <a:rPr lang="en-US" sz="1200" b="1" dirty="0">
+                <a:solidFill>
+                  <a:srgbClr val="3A4552"/>
+                </a:solidFill>
+                <a:latin typeface="Calibri" pitchFamily="34" charset="0"/>
+                <a:ea typeface="Calibri" pitchFamily="34" charset="-122"/>
+                <a:cs typeface="Calibri" pitchFamily="34" charset="-120"/>
+              </a:rPr>
+              <a:t>Notes personnelles éparses</a:t>
+            </a:r>
+            <a:endParaRPr lang="en-US" sz="1200" dirty="0"/>
+          </a:p>
+        </p:txBody>
+      </p:sp>
+      <p:sp>
+        <p:nvSpPr>
+          <p:cNvPr id="16" name="Text 14"/>
+          <p:cNvSpPr txBox="1"/>
+          <p:nvPr/>
+        </p:nvSpPr>
+        <p:spPr>
+          <a:xfrm>
+            <a:off x="731520" y="5212080"/>
+            <a:ext cx="2011680" cy="320040"/>
+          </a:xfrm>
+          <a:prstGeom prst="rect">
+            <a:avLst/>
+          </a:prstGeom>
+          <a:noFill/>
+          <a:ln/>
+        </p:spPr>
+        <p:txBody>
+          <a:bodyPr wrap="square" lIns="0" tIns="0" rIns="0" bIns="0" rtlCol="0" anchor="ctr"/>
+          <a:lstStyle/>
+          <a:p>
+            <a:pPr indent="0" marL="0">
+              <a:buNone/>
+            </a:pPr>
+            <a:r>
+              <a:rPr lang="en-US" sz="1200" dirty="0">
+                <a:solidFill>
+                  <a:srgbClr val="6B7683"/>
+                </a:solidFill>
+                <a:latin typeface="Calibri" pitchFamily="34" charset="0"/>
+                <a:ea typeface="Calibri" pitchFamily="34" charset="-122"/>
+                <a:cs typeface="Calibri" pitchFamily="34" charset="-120"/>
+              </a:rPr>
+              <a:t>Partage équipe</a:t>
+            </a:r>
+            <a:endParaRPr lang="en-US" sz="1200" dirty="0"/>
+          </a:p>
+        </p:txBody>
+      </p:sp>
+      <p:sp>
+        <p:nvSpPr>
+          <p:cNvPr id="17" name="Text 15"/>
+          <p:cNvSpPr txBox="1"/>
+          <p:nvPr/>
+        </p:nvSpPr>
+        <p:spPr>
+          <a:xfrm>
+            <a:off x="2743200" y="5212080"/>
+            <a:ext cx="3017520" cy="320040"/>
+          </a:xfrm>
+          <a:prstGeom prst="rect">
+            <a:avLst/>
+          </a:prstGeom>
+          <a:noFill/>
+          <a:ln/>
+        </p:spPr>
+        <p:txBody>
+          <a:bodyPr wrap="square" lIns="0" tIns="0" rIns="0" bIns="0" rtlCol="0" anchor="ctr"/>
+          <a:lstStyle/>
+          <a:p>
+            <a:pPr indent="0" marL="0">
+              <a:buNone/>
+            </a:pPr>
+            <a:r>
+              <a:rPr lang="en-US" sz="1200" b="1" dirty="0">
+                <a:solidFill>
+                  <a:srgbClr val="3A4552"/>
+                </a:solidFill>
+                <a:latin typeface="Calibri" pitchFamily="34" charset="0"/>
+                <a:ea typeface="Calibri" pitchFamily="34" charset="-122"/>
+                <a:cs typeface="Calibri" pitchFamily="34" charset="-120"/>
+              </a:rPr>
+              <a:t>Difficile</a:t>
+            </a:r>
+            <a:endParaRPr lang="en-US" sz="1200" dirty="0"/>
+          </a:p>
+        </p:txBody>
+      </p:sp>
+      <p:sp>
+        <p:nvSpPr>
+          <p:cNvPr id="18" name="Text 16"/>
+          <p:cNvSpPr txBox="1"/>
+          <p:nvPr/>
+        </p:nvSpPr>
+        <p:spPr>
+          <a:xfrm>
+            <a:off x="5943600" y="3794760"/>
+            <a:ext cx="457200" cy="731520"/>
+          </a:xfrm>
+          <a:prstGeom prst="rect">
+            <a:avLst/>
+          </a:prstGeom>
+          <a:noFill/>
+          <a:ln/>
+        </p:spPr>
+        <p:txBody>
+          <a:bodyPr wrap="square" lIns="0" tIns="0" rIns="0" bIns="0" rtlCol="0" anchor="ctr"/>
+          <a:lstStyle/>
+          <a:p>
+            <a:pPr algn="ctr" indent="0" marL="0">
+              <a:buNone/>
+            </a:pPr>
+            <a:r>
+              <a:rPr lang="en-US" sz="5400" b="1" dirty="0">
+                <a:solidFill>
+                  <a:srgbClr val="F5B700"/>
+                </a:solidFill>
+                <a:latin typeface="Arial" pitchFamily="34" charset="0"/>
+                <a:ea typeface="Arial" pitchFamily="34" charset="-122"/>
+                <a:cs typeface="Arial" pitchFamily="34" charset="-120"/>
+              </a:rPr>
+              <a:t>›</a:t>
+            </a:r>
+            <a:endParaRPr lang="en-US" sz="5400" dirty="0"/>
+          </a:p>
+        </p:txBody>
+      </p:sp>
+      <p:sp>
+        <p:nvSpPr>
+          <p:cNvPr id="19" name="Shape 17"/>
           <p:cNvSpPr/>
           <p:nvPr/>
         </p:nvSpPr>
         <p:spPr>
           <a:xfrm>
-            <a:off x="4361688" y="2011680"/>
-            <a:ext cx="3657600" cy="457200"/>
+            <a:off x="6217920" y="1920240"/>
+            <a:ext cx="5486400" cy="4480560"/>
           </a:xfrm>
           <a:prstGeom prst="rect">
             <a:avLst/>
           </a:prstGeom>
           <a:solidFill>
-            <a:srgbClr val="F5B700"/>
+            <a:srgbClr val="003876"/>
           </a:solidFill>
           <a:ln w="12700">
             <a:solidFill>
-              <a:srgbClr val="F5B700"/>
+              <a:srgbClr val="003876"/>
             </a:solidFill>
             <a:prstDash val="solid"/>
           </a:ln>
@@ -8059,117 +9624,92 @@
       </p:sp>
       <p:sp>
         <p:nvSpPr>
-          <p:cNvPr id="11" name="Text 9"/>
-          <p:cNvSpPr txBox="1"/>
-          <p:nvPr/>
-        </p:nvSpPr>
-        <p:spPr>
-          <a:xfrm>
-            <a:off x="4544568" y="2011680"/>
-            <a:ext cx="3291840" cy="457200"/>
-          </a:xfrm>
-          <a:prstGeom prst="rect">
-            <a:avLst/>
-          </a:prstGeom>
-          <a:noFill/>
-          <a:ln/>
-        </p:spPr>
-        <p:txBody>
-          <a:bodyPr wrap="square" lIns="0" tIns="0" rIns="0" bIns="0" rtlCol="0" anchor="ctr"/>
-          <a:lstStyle/>
-          <a:p>
-            <a:pPr indent="0" marL="0">
-              <a:buNone/>
-            </a:pPr>
-            <a:r>
-              <a:rPr lang="en-US" sz="1100" b="1" spc="400" kern="0" dirty="0">
-                <a:solidFill>
-                  <a:srgbClr val="003876"/>
-                </a:solidFill>
-                <a:latin typeface="Calibri" pitchFamily="34" charset="0"/>
-                <a:ea typeface="Calibri" pitchFamily="34" charset="-122"/>
-                <a:cs typeface="Calibri" pitchFamily="34" charset="-120"/>
-              </a:rPr>
-              <a:t>PHASE 2</a:t>
-            </a:r>
-            <a:endParaRPr lang="en-US" sz="1100" dirty="0"/>
-          </a:p>
-        </p:txBody>
-      </p:sp>
-      <p:sp>
-        <p:nvSpPr>
-          <p:cNvPr id="12" name="Shape 10"/>
-          <p:cNvSpPr/>
-          <p:nvPr/>
-        </p:nvSpPr>
-        <p:spPr>
-          <a:xfrm>
-            <a:off x="4361688" y="2468880"/>
-            <a:ext cx="3657600" cy="2011680"/>
-          </a:xfrm>
-          <a:prstGeom prst="rect">
-            <a:avLst/>
-          </a:prstGeom>
-          <a:solidFill>
-            <a:srgbClr val="FFFFFF"/>
-          </a:solidFill>
-          <a:ln w="12700">
-            <a:solidFill>
-              <a:srgbClr val="E5E8EC"/>
-            </a:solidFill>
-            <a:prstDash val="solid"/>
-          </a:ln>
-        </p:spPr>
-      </p:sp>
-      <p:sp>
-        <p:nvSpPr>
-          <p:cNvPr id="13" name="Text 11"/>
-          <p:cNvSpPr txBox="1"/>
-          <p:nvPr/>
-        </p:nvSpPr>
-        <p:spPr>
-          <a:xfrm>
-            <a:off x="4544568" y="2606040"/>
-            <a:ext cx="3291840" cy="457200"/>
-          </a:xfrm>
-          <a:prstGeom prst="rect">
-            <a:avLst/>
-          </a:prstGeom>
-          <a:noFill/>
-          <a:ln/>
-        </p:spPr>
-        <p:txBody>
-          <a:bodyPr wrap="square" lIns="0" tIns="0" rIns="0" bIns="0" rtlCol="0" anchor="ctr"/>
-          <a:lstStyle/>
-          <a:p>
-            <a:pPr indent="0" marL="0">
-              <a:buNone/>
-            </a:pPr>
-            <a:r>
-              <a:rPr lang="en-US" sz="2000" b="1" dirty="0">
-                <a:solidFill>
-                  <a:srgbClr val="003876"/>
+          <p:cNvPr id="20" name="Text 18"/>
+          <p:cNvSpPr txBox="1"/>
+          <p:nvPr/>
+        </p:nvSpPr>
+        <p:spPr>
+          <a:xfrm>
+            <a:off x="6492240" y="2103120"/>
+            <a:ext cx="2743200" cy="365760"/>
+          </a:xfrm>
+          <a:prstGeom prst="rect">
+            <a:avLst/>
+          </a:prstGeom>
+          <a:noFill/>
+          <a:ln/>
+        </p:spPr>
+        <p:txBody>
+          <a:bodyPr wrap="square" lIns="0" tIns="0" rIns="0" bIns="0" rtlCol="0" anchor="ctr"/>
+          <a:lstStyle/>
+          <a:p>
+            <a:pPr indent="0" marL="0">
+              <a:buNone/>
+            </a:pPr>
+            <a:r>
+              <a:rPr lang="en-US" sz="1200" b="1" spc="400" kern="0" dirty="0">
+                <a:solidFill>
+                  <a:srgbClr val="F5B700"/>
+                </a:solidFill>
+                <a:latin typeface="Calibri" pitchFamily="34" charset="0"/>
+                <a:ea typeface="Calibri" pitchFamily="34" charset="-122"/>
+                <a:cs typeface="Calibri" pitchFamily="34" charset="-120"/>
+              </a:rPr>
+              <a:t>APRÈS</a:t>
+            </a:r>
+            <a:endParaRPr lang="en-US" sz="1200" dirty="0"/>
+          </a:p>
+        </p:txBody>
+      </p:sp>
+      <p:sp>
+        <p:nvSpPr>
+          <p:cNvPr id="21" name="Text 19"/>
+          <p:cNvSpPr txBox="1"/>
+          <p:nvPr/>
+        </p:nvSpPr>
+        <p:spPr>
+          <a:xfrm>
+            <a:off x="6492240" y="2468880"/>
+            <a:ext cx="4937760" cy="457200"/>
+          </a:xfrm>
+          <a:prstGeom prst="rect">
+            <a:avLst/>
+          </a:prstGeom>
+          <a:noFill/>
+          <a:ln/>
+        </p:spPr>
+        <p:txBody>
+          <a:bodyPr wrap="square" lIns="0" tIns="0" rIns="0" bIns="0" rtlCol="0" anchor="ctr"/>
+          <a:lstStyle/>
+          <a:p>
+            <a:pPr indent="0" marL="0">
+              <a:buNone/>
+            </a:pPr>
+            <a:r>
+              <a:rPr lang="en-US" sz="2200" b="1" dirty="0">
+                <a:solidFill>
+                  <a:srgbClr val="FFFFFF"/>
                 </a:solidFill>
                 <a:latin typeface="Cambria" pitchFamily="34" charset="0"/>
                 <a:ea typeface="Cambria" pitchFamily="34" charset="-122"/>
                 <a:cs typeface="Cambria" pitchFamily="34" charset="-120"/>
               </a:rPr>
-              <a:t>Digestion</a:t>
-            </a:r>
-            <a:endParaRPr lang="en-US" sz="2000" dirty="0"/>
-          </a:p>
-        </p:txBody>
-      </p:sp>
-      <p:sp>
-        <p:nvSpPr>
-          <p:cNvPr id="14" name="Text 12"/>
-          <p:cNvSpPr txBox="1"/>
-          <p:nvPr/>
-        </p:nvSpPr>
-        <p:spPr>
-          <a:xfrm>
-            <a:off x="4544568" y="3154680"/>
-            <a:ext cx="3291840" cy="1234440"/>
+              <a:t>Fiche structurée par IA</a:t>
+            </a:r>
+            <a:endParaRPr lang="en-US" sz="2200" dirty="0"/>
+          </a:p>
+        </p:txBody>
+      </p:sp>
+      <p:sp>
+        <p:nvSpPr>
+          <p:cNvPr id="22" name="Text 20"/>
+          <p:cNvSpPr txBox="1"/>
+          <p:nvPr/>
+        </p:nvSpPr>
+        <p:spPr>
+          <a:xfrm>
+            <a:off x="6492240" y="3200400"/>
+            <a:ext cx="2011680" cy="320040"/>
           </a:xfrm>
           <a:prstGeom prst="rect">
             <a:avLst/>
@@ -8187,13 +9727,13 @@
             <a:r>
               <a:rPr lang="en-US" sz="1200" dirty="0">
                 <a:solidFill>
-                  <a:srgbClr val="3A4552"/>
-                </a:solidFill>
-                <a:latin typeface="Calibri" pitchFamily="34" charset="0"/>
-                <a:ea typeface="Calibri" pitchFamily="34" charset="-122"/>
-                <a:cs typeface="Calibri" pitchFamily="34" charset="-120"/>
-              </a:rPr>
-              <a:t>Chaque Redbook traité via prompt structuré. Sortie : fiche technique par source.</a:t>
+                  <a:srgbClr val="CADCFC"/>
+                </a:solidFill>
+                <a:latin typeface="Calibri" pitchFamily="34" charset="0"/>
+                <a:ea typeface="Calibri" pitchFamily="34" charset="-122"/>
+                <a:cs typeface="Calibri" pitchFamily="34" charset="-120"/>
+              </a:rPr>
+              <a:t>Volume</a:t>
             </a:r>
             <a:endParaRPr lang="en-US" sz="1200" dirty="0"/>
           </a:p>
@@ -8201,181 +9741,365 @@
       </p:sp>
       <p:sp>
         <p:nvSpPr>
-          <p:cNvPr id="15" name="Shape 13"/>
+          <p:cNvPr id="23" name="Text 21"/>
+          <p:cNvSpPr txBox="1"/>
+          <p:nvPr/>
+        </p:nvSpPr>
+        <p:spPr>
+          <a:xfrm>
+            <a:off x="8503920" y="3200400"/>
+            <a:ext cx="3017520" cy="320040"/>
+          </a:xfrm>
+          <a:prstGeom prst="rect">
+            <a:avLst/>
+          </a:prstGeom>
+          <a:noFill/>
+          <a:ln/>
+        </p:spPr>
+        <p:txBody>
+          <a:bodyPr wrap="square" lIns="0" tIns="0" rIns="0" bIns="0" rtlCol="0" anchor="ctr"/>
+          <a:lstStyle/>
+          <a:p>
+            <a:pPr indent="0" marL="0">
+              <a:buNone/>
+            </a:pPr>
+            <a:r>
+              <a:rPr lang="en-US" sz="1200" b="1" dirty="0">
+                <a:solidFill>
+                  <a:srgbClr val="FFFFFF"/>
+                </a:solidFill>
+                <a:latin typeface="Calibri" pitchFamily="34" charset="0"/>
+                <a:ea typeface="Calibri" pitchFamily="34" charset="-122"/>
+                <a:cs typeface="Calibri" pitchFamily="34" charset="-120"/>
+              </a:rPr>
+              <a:t>2 à 3 pages Markdown</a:t>
+            </a:r>
+            <a:endParaRPr lang="en-US" sz="1200" dirty="0"/>
+          </a:p>
+        </p:txBody>
+      </p:sp>
+      <p:sp>
+        <p:nvSpPr>
+          <p:cNvPr id="24" name="Text 22"/>
+          <p:cNvSpPr txBox="1"/>
+          <p:nvPr/>
+        </p:nvSpPr>
+        <p:spPr>
+          <a:xfrm>
+            <a:off x="6492240" y="3703320"/>
+            <a:ext cx="2011680" cy="320040"/>
+          </a:xfrm>
+          <a:prstGeom prst="rect">
+            <a:avLst/>
+          </a:prstGeom>
+          <a:noFill/>
+          <a:ln/>
+        </p:spPr>
+        <p:txBody>
+          <a:bodyPr wrap="square" lIns="0" tIns="0" rIns="0" bIns="0" rtlCol="0" anchor="ctr"/>
+          <a:lstStyle/>
+          <a:p>
+            <a:pPr indent="0" marL="0">
+              <a:buNone/>
+            </a:pPr>
+            <a:r>
+              <a:rPr lang="en-US" sz="1200" dirty="0">
+                <a:solidFill>
+                  <a:srgbClr val="CADCFC"/>
+                </a:solidFill>
+                <a:latin typeface="Calibri" pitchFamily="34" charset="0"/>
+                <a:ea typeface="Calibri" pitchFamily="34" charset="-122"/>
+                <a:cs typeface="Calibri" pitchFamily="34" charset="-120"/>
+              </a:rPr>
+              <a:t>Temps investi</a:t>
+            </a:r>
+            <a:endParaRPr lang="en-US" sz="1200" dirty="0"/>
+          </a:p>
+        </p:txBody>
+      </p:sp>
+      <p:sp>
+        <p:nvSpPr>
+          <p:cNvPr id="25" name="Text 23"/>
+          <p:cNvSpPr txBox="1"/>
+          <p:nvPr/>
+        </p:nvSpPr>
+        <p:spPr>
+          <a:xfrm>
+            <a:off x="8503920" y="3703320"/>
+            <a:ext cx="3017520" cy="320040"/>
+          </a:xfrm>
+          <a:prstGeom prst="rect">
+            <a:avLst/>
+          </a:prstGeom>
+          <a:noFill/>
+          <a:ln/>
+        </p:spPr>
+        <p:txBody>
+          <a:bodyPr wrap="square" lIns="0" tIns="0" rIns="0" bIns="0" rtlCol="0" anchor="ctr"/>
+          <a:lstStyle/>
+          <a:p>
+            <a:pPr indent="0" marL="0">
+              <a:buNone/>
+            </a:pPr>
+            <a:r>
+              <a:rPr lang="en-US" sz="1200" b="1" dirty="0">
+                <a:solidFill>
+                  <a:srgbClr val="FFFFFF"/>
+                </a:solidFill>
+                <a:latin typeface="Calibri" pitchFamily="34" charset="0"/>
+                <a:ea typeface="Calibri" pitchFamily="34" charset="-122"/>
+                <a:cs typeface="Calibri" pitchFamily="34" charset="-120"/>
+              </a:rPr>
+              <a:t>30 à 45 minutes</a:t>
+            </a:r>
+            <a:endParaRPr lang="en-US" sz="1200" dirty="0"/>
+          </a:p>
+        </p:txBody>
+      </p:sp>
+      <p:sp>
+        <p:nvSpPr>
+          <p:cNvPr id="26" name="Text 24"/>
+          <p:cNvSpPr txBox="1"/>
+          <p:nvPr/>
+        </p:nvSpPr>
+        <p:spPr>
+          <a:xfrm>
+            <a:off x="6492240" y="4206240"/>
+            <a:ext cx="2011680" cy="320040"/>
+          </a:xfrm>
+          <a:prstGeom prst="rect">
+            <a:avLst/>
+          </a:prstGeom>
+          <a:noFill/>
+          <a:ln/>
+        </p:spPr>
+        <p:txBody>
+          <a:bodyPr wrap="square" lIns="0" tIns="0" rIns="0" bIns="0" rtlCol="0" anchor="ctr"/>
+          <a:lstStyle/>
+          <a:p>
+            <a:pPr indent="0" marL="0">
+              <a:buNone/>
+            </a:pPr>
+            <a:r>
+              <a:rPr lang="en-US" sz="1200" dirty="0">
+                <a:solidFill>
+                  <a:srgbClr val="CADCFC"/>
+                </a:solidFill>
+                <a:latin typeface="Calibri" pitchFamily="34" charset="0"/>
+                <a:ea typeface="Calibri" pitchFamily="34" charset="-122"/>
+                <a:cs typeface="Calibri" pitchFamily="34" charset="-120"/>
+              </a:rPr>
+              <a:t>Rétention</a:t>
+            </a:r>
+            <a:endParaRPr lang="en-US" sz="1200" dirty="0"/>
+          </a:p>
+        </p:txBody>
+      </p:sp>
+      <p:sp>
+        <p:nvSpPr>
+          <p:cNvPr id="27" name="Text 25"/>
+          <p:cNvSpPr txBox="1"/>
+          <p:nvPr/>
+        </p:nvSpPr>
+        <p:spPr>
+          <a:xfrm>
+            <a:off x="8503920" y="4206240"/>
+            <a:ext cx="3017520" cy="320040"/>
+          </a:xfrm>
+          <a:prstGeom prst="rect">
+            <a:avLst/>
+          </a:prstGeom>
+          <a:noFill/>
+          <a:ln/>
+        </p:spPr>
+        <p:txBody>
+          <a:bodyPr wrap="square" lIns="0" tIns="0" rIns="0" bIns="0" rtlCol="0" anchor="ctr"/>
+          <a:lstStyle/>
+          <a:p>
+            <a:pPr indent="0" marL="0">
+              <a:buNone/>
+            </a:pPr>
+            <a:r>
+              <a:rPr lang="en-US" sz="1200" b="1" dirty="0">
+                <a:solidFill>
+                  <a:srgbClr val="FFFFFF"/>
+                </a:solidFill>
+                <a:latin typeface="Calibri" pitchFamily="34" charset="0"/>
+                <a:ea typeface="Calibri" pitchFamily="34" charset="-122"/>
+                <a:cs typeface="Calibri" pitchFamily="34" charset="-120"/>
+              </a:rPr>
+              <a:t>Élevée (structure imposée)</a:t>
+            </a:r>
+            <a:endParaRPr lang="en-US" sz="1200" dirty="0"/>
+          </a:p>
+        </p:txBody>
+      </p:sp>
+      <p:sp>
+        <p:nvSpPr>
+          <p:cNvPr id="28" name="Text 26"/>
+          <p:cNvSpPr txBox="1"/>
+          <p:nvPr/>
+        </p:nvSpPr>
+        <p:spPr>
+          <a:xfrm>
+            <a:off x="6492240" y="4709160"/>
+            <a:ext cx="2011680" cy="320040"/>
+          </a:xfrm>
+          <a:prstGeom prst="rect">
+            <a:avLst/>
+          </a:prstGeom>
+          <a:noFill/>
+          <a:ln/>
+        </p:spPr>
+        <p:txBody>
+          <a:bodyPr wrap="square" lIns="0" tIns="0" rIns="0" bIns="0" rtlCol="0" anchor="ctr"/>
+          <a:lstStyle/>
+          <a:p>
+            <a:pPr indent="0" marL="0">
+              <a:buNone/>
+            </a:pPr>
+            <a:r>
+              <a:rPr lang="en-US" sz="1200" dirty="0">
+                <a:solidFill>
+                  <a:srgbClr val="CADCFC"/>
+                </a:solidFill>
+                <a:latin typeface="Calibri" pitchFamily="34" charset="0"/>
+                <a:ea typeface="Calibri" pitchFamily="34" charset="-122"/>
+                <a:cs typeface="Calibri" pitchFamily="34" charset="-120"/>
+              </a:rPr>
+              <a:t>Réutilisabilité</a:t>
+            </a:r>
+            <a:endParaRPr lang="en-US" sz="1200" dirty="0"/>
+          </a:p>
+        </p:txBody>
+      </p:sp>
+      <p:sp>
+        <p:nvSpPr>
+          <p:cNvPr id="29" name="Text 27"/>
+          <p:cNvSpPr txBox="1"/>
+          <p:nvPr/>
+        </p:nvSpPr>
+        <p:spPr>
+          <a:xfrm>
+            <a:off x="8503920" y="4709160"/>
+            <a:ext cx="3017520" cy="320040"/>
+          </a:xfrm>
+          <a:prstGeom prst="rect">
+            <a:avLst/>
+          </a:prstGeom>
+          <a:noFill/>
+          <a:ln/>
+        </p:spPr>
+        <p:txBody>
+          <a:bodyPr wrap="square" lIns="0" tIns="0" rIns="0" bIns="0" rtlCol="0" anchor="ctr"/>
+          <a:lstStyle/>
+          <a:p>
+            <a:pPr indent="0" marL="0">
+              <a:buNone/>
+            </a:pPr>
+            <a:r>
+              <a:rPr lang="en-US" sz="1200" b="1" dirty="0">
+                <a:solidFill>
+                  <a:srgbClr val="FFFFFF"/>
+                </a:solidFill>
+                <a:latin typeface="Calibri" pitchFamily="34" charset="0"/>
+                <a:ea typeface="Calibri" pitchFamily="34" charset="-122"/>
+                <a:cs typeface="Calibri" pitchFamily="34" charset="-120"/>
+              </a:rPr>
+              <a:t>Corpus versionné</a:t>
+            </a:r>
+            <a:endParaRPr lang="en-US" sz="1200" dirty="0"/>
+          </a:p>
+        </p:txBody>
+      </p:sp>
+      <p:sp>
+        <p:nvSpPr>
+          <p:cNvPr id="30" name="Text 28"/>
+          <p:cNvSpPr txBox="1"/>
+          <p:nvPr/>
+        </p:nvSpPr>
+        <p:spPr>
+          <a:xfrm>
+            <a:off x="6492240" y="5212080"/>
+            <a:ext cx="2011680" cy="320040"/>
+          </a:xfrm>
+          <a:prstGeom prst="rect">
+            <a:avLst/>
+          </a:prstGeom>
+          <a:noFill/>
+          <a:ln/>
+        </p:spPr>
+        <p:txBody>
+          <a:bodyPr wrap="square" lIns="0" tIns="0" rIns="0" bIns="0" rtlCol="0" anchor="ctr"/>
+          <a:lstStyle/>
+          <a:p>
+            <a:pPr indent="0" marL="0">
+              <a:buNone/>
+            </a:pPr>
+            <a:r>
+              <a:rPr lang="en-US" sz="1200" dirty="0">
+                <a:solidFill>
+                  <a:srgbClr val="CADCFC"/>
+                </a:solidFill>
+                <a:latin typeface="Calibri" pitchFamily="34" charset="0"/>
+                <a:ea typeface="Calibri" pitchFamily="34" charset="-122"/>
+                <a:cs typeface="Calibri" pitchFamily="34" charset="-120"/>
+              </a:rPr>
+              <a:t>Partage équipe</a:t>
+            </a:r>
+            <a:endParaRPr lang="en-US" sz="1200" dirty="0"/>
+          </a:p>
+        </p:txBody>
+      </p:sp>
+      <p:sp>
+        <p:nvSpPr>
+          <p:cNvPr id="31" name="Text 29"/>
+          <p:cNvSpPr txBox="1"/>
+          <p:nvPr/>
+        </p:nvSpPr>
+        <p:spPr>
+          <a:xfrm>
+            <a:off x="8503920" y="5212080"/>
+            <a:ext cx="3017520" cy="320040"/>
+          </a:xfrm>
+          <a:prstGeom prst="rect">
+            <a:avLst/>
+          </a:prstGeom>
+          <a:noFill/>
+          <a:ln/>
+        </p:spPr>
+        <p:txBody>
+          <a:bodyPr wrap="square" lIns="0" tIns="0" rIns="0" bIns="0" rtlCol="0" anchor="ctr"/>
+          <a:lstStyle/>
+          <a:p>
+            <a:pPr indent="0" marL="0">
+              <a:buNone/>
+            </a:pPr>
+            <a:r>
+              <a:rPr lang="en-US" sz="1200" b="1" dirty="0">
+                <a:solidFill>
+                  <a:srgbClr val="FFFFFF"/>
+                </a:solidFill>
+                <a:latin typeface="Calibri" pitchFamily="34" charset="0"/>
+                <a:ea typeface="Calibri" pitchFamily="34" charset="-122"/>
+                <a:cs typeface="Calibri" pitchFamily="34" charset="-120"/>
+              </a:rPr>
+              <a:t>Immédiat via Git</a:t>
+            </a:r>
+            <a:endParaRPr lang="en-US" sz="1200" dirty="0"/>
+          </a:p>
+        </p:txBody>
+      </p:sp>
+      <p:sp>
+        <p:nvSpPr>
+          <p:cNvPr id="32" name="Shape 30"/>
           <p:cNvSpPr/>
           <p:nvPr/>
         </p:nvSpPr>
         <p:spPr>
           <a:xfrm>
-            <a:off x="8275320" y="2011680"/>
-            <a:ext cx="3657600" cy="457200"/>
-          </a:xfrm>
-          <a:prstGeom prst="rect">
-            <a:avLst/>
-          </a:prstGeom>
-          <a:solidFill>
-            <a:srgbClr val="F5B700"/>
-          </a:solidFill>
-          <a:ln w="12700">
-            <a:solidFill>
-              <a:srgbClr val="F5B700"/>
-            </a:solidFill>
-            <a:prstDash val="solid"/>
-          </a:ln>
-        </p:spPr>
-      </p:sp>
-      <p:sp>
-        <p:nvSpPr>
-          <p:cNvPr id="16" name="Text 14"/>
-          <p:cNvSpPr txBox="1"/>
-          <p:nvPr/>
-        </p:nvSpPr>
-        <p:spPr>
-          <a:xfrm>
-            <a:off x="8458200" y="2011680"/>
-            <a:ext cx="3291840" cy="457200"/>
-          </a:xfrm>
-          <a:prstGeom prst="rect">
-            <a:avLst/>
-          </a:prstGeom>
-          <a:noFill/>
-          <a:ln/>
-        </p:spPr>
-        <p:txBody>
-          <a:bodyPr wrap="square" lIns="0" tIns="0" rIns="0" bIns="0" rtlCol="0" anchor="ctr"/>
-          <a:lstStyle/>
-          <a:p>
-            <a:pPr indent="0" marL="0">
-              <a:buNone/>
-            </a:pPr>
-            <a:r>
-              <a:rPr lang="en-US" sz="1100" b="1" spc="400" kern="0" dirty="0">
-                <a:solidFill>
-                  <a:srgbClr val="003876"/>
-                </a:solidFill>
-                <a:latin typeface="Calibri" pitchFamily="34" charset="0"/>
-                <a:ea typeface="Calibri" pitchFamily="34" charset="-122"/>
-                <a:cs typeface="Calibri" pitchFamily="34" charset="-120"/>
-              </a:rPr>
-              <a:t>PHASE 3</a:t>
-            </a:r>
-            <a:endParaRPr lang="en-US" sz="1100" dirty="0"/>
-          </a:p>
-        </p:txBody>
-      </p:sp>
-      <p:sp>
-        <p:nvSpPr>
-          <p:cNvPr id="17" name="Shape 15"/>
-          <p:cNvSpPr/>
-          <p:nvPr/>
-        </p:nvSpPr>
-        <p:spPr>
-          <a:xfrm>
-            <a:off x="8275320" y="2468880"/>
-            <a:ext cx="3657600" cy="2011680"/>
-          </a:xfrm>
-          <a:prstGeom prst="rect">
-            <a:avLst/>
-          </a:prstGeom>
-          <a:solidFill>
-            <a:srgbClr val="FFFFFF"/>
-          </a:solidFill>
-          <a:ln w="12700">
-            <a:solidFill>
-              <a:srgbClr val="E5E8EC"/>
-            </a:solidFill>
-            <a:prstDash val="solid"/>
-          </a:ln>
-        </p:spPr>
-      </p:sp>
-      <p:sp>
-        <p:nvSpPr>
-          <p:cNvPr id="18" name="Text 16"/>
-          <p:cNvSpPr txBox="1"/>
-          <p:nvPr/>
-        </p:nvSpPr>
-        <p:spPr>
-          <a:xfrm>
-            <a:off x="8458200" y="2606040"/>
-            <a:ext cx="3291840" cy="457200"/>
-          </a:xfrm>
-          <a:prstGeom prst="rect">
-            <a:avLst/>
-          </a:prstGeom>
-          <a:noFill/>
-          <a:ln/>
-        </p:spPr>
-        <p:txBody>
-          <a:bodyPr wrap="square" lIns="0" tIns="0" rIns="0" bIns="0" rtlCol="0" anchor="ctr"/>
-          <a:lstStyle/>
-          <a:p>
-            <a:pPr indent="0" marL="0">
-              <a:buNone/>
-            </a:pPr>
-            <a:r>
-              <a:rPr lang="en-US" sz="2000" b="1" dirty="0">
-                <a:solidFill>
-                  <a:srgbClr val="003876"/>
-                </a:solidFill>
-                <a:latin typeface="Cambria" pitchFamily="34" charset="0"/>
-                <a:ea typeface="Cambria" pitchFamily="34" charset="-122"/>
-                <a:cs typeface="Cambria" pitchFamily="34" charset="-120"/>
-              </a:rPr>
-              <a:t>Consolidation</a:t>
-            </a:r>
-            <a:endParaRPr lang="en-US" sz="2000" dirty="0"/>
-          </a:p>
-        </p:txBody>
-      </p:sp>
-      <p:sp>
-        <p:nvSpPr>
-          <p:cNvPr id="19" name="Text 17"/>
-          <p:cNvSpPr txBox="1"/>
-          <p:nvPr/>
-        </p:nvSpPr>
-        <p:spPr>
-          <a:xfrm>
-            <a:off x="8458200" y="3154680"/>
-            <a:ext cx="3291840" cy="1234440"/>
-          </a:xfrm>
-          <a:prstGeom prst="rect">
-            <a:avLst/>
-          </a:prstGeom>
-          <a:noFill/>
-          <a:ln/>
-        </p:spPr>
-        <p:txBody>
-          <a:bodyPr wrap="square" lIns="0" tIns="0" rIns="0" bIns="0" rtlCol="0" anchor="ctr"/>
-          <a:lstStyle/>
-          <a:p>
-            <a:pPr indent="0" marL="0">
-              <a:buNone/>
-            </a:pPr>
-            <a:r>
-              <a:rPr lang="en-US" sz="1200" dirty="0">
-                <a:solidFill>
-                  <a:srgbClr val="3A4552"/>
-                </a:solidFill>
-                <a:latin typeface="Calibri" pitchFamily="34" charset="0"/>
-                <a:ea typeface="Calibri" pitchFamily="34" charset="-122"/>
-                <a:cs typeface="Calibri" pitchFamily="34" charset="-120"/>
-              </a:rPr>
-              <a:t>Fusion des fiches en corpus thématique CICS/Java. Sortie : cheat-sheet transverse.</a:t>
-            </a:r>
-            <a:endParaRPr lang="en-US" sz="1200" dirty="0"/>
-          </a:p>
-        </p:txBody>
-      </p:sp>
-      <p:sp>
-        <p:nvSpPr>
-          <p:cNvPr id="20" name="Shape 18"/>
-          <p:cNvSpPr/>
-          <p:nvPr/>
-        </p:nvSpPr>
-        <p:spPr>
-          <a:xfrm>
-            <a:off x="457200" y="4937760"/>
-            <a:ext cx="11247120" cy="1463040"/>
+            <a:off x="0" y="6629400"/>
+            <a:ext cx="12161520" cy="18288"/>
           </a:xfrm>
           <a:prstGeom prst="rect">
             <a:avLst/>
@@ -8393,183 +10117,7 @@
       </p:sp>
       <p:sp>
         <p:nvSpPr>
-          <p:cNvPr id="21" name="Text 19"/>
-          <p:cNvSpPr txBox="1"/>
-          <p:nvPr/>
-        </p:nvSpPr>
-        <p:spPr>
-          <a:xfrm>
-            <a:off x="731520" y="5074920"/>
-            <a:ext cx="10972800" cy="320040"/>
-          </a:xfrm>
-          <a:prstGeom prst="rect">
-            <a:avLst/>
-          </a:prstGeom>
-          <a:noFill/>
-          <a:ln/>
-        </p:spPr>
-        <p:txBody>
-          <a:bodyPr wrap="square" lIns="0" tIns="0" rIns="0" bIns="0" rtlCol="0" anchor="ctr"/>
-          <a:lstStyle/>
-          <a:p>
-            <a:pPr indent="0" marL="0">
-              <a:buNone/>
-            </a:pPr>
-            <a:r>
-              <a:rPr lang="en-US" sz="1100" b="1" spc="300" kern="0" dirty="0">
-                <a:solidFill>
-                  <a:srgbClr val="003876"/>
-                </a:solidFill>
-                <a:latin typeface="Calibri" pitchFamily="34" charset="0"/>
-                <a:ea typeface="Calibri" pitchFamily="34" charset="-122"/>
-                <a:cs typeface="Calibri" pitchFamily="34" charset="-120"/>
-              </a:rPr>
-              <a:t>SOURCES EXPLOITÉES POUR CE PARCOURS</a:t>
-            </a:r>
-            <a:endParaRPr lang="en-US" sz="1100" dirty="0"/>
-          </a:p>
-        </p:txBody>
-      </p:sp>
-      <p:sp>
-        <p:nvSpPr>
-          <p:cNvPr id="22" name="Text 20"/>
-          <p:cNvSpPr txBox="1"/>
-          <p:nvPr/>
-        </p:nvSpPr>
-        <p:spPr>
-          <a:xfrm>
-            <a:off x="731520" y="5440680"/>
-            <a:ext cx="5303520" cy="914400"/>
-          </a:xfrm>
-          <a:prstGeom prst="rect">
-            <a:avLst/>
-          </a:prstGeom>
-          <a:noFill/>
-          <a:ln/>
-        </p:spPr>
-        <p:txBody>
-          <a:bodyPr wrap="square" lIns="0" tIns="0" rIns="0" bIns="0" rtlCol="0" anchor="ctr"/>
-          <a:lstStyle/>
-          <a:p>
-            <a:pPr indent="0" marL="0">
-              <a:buNone/>
-            </a:pPr>
-            <a:r>
-              <a:rPr lang="en-US" sz="1200" dirty="0">
-                <a:solidFill>
-                  <a:srgbClr val="3A4552"/>
-                </a:solidFill>
-                <a:latin typeface="Calibri" pitchFamily="34" charset="0"/>
-                <a:ea typeface="Calibri" pitchFamily="34" charset="-122"/>
-                <a:cs typeface="Calibri" pitchFamily="34" charset="-120"/>
-              </a:rPr>
-              <a:t>Redbook IBM REDP-5628 — JVM CICS Performance</a:t>
-            </a:r>
-            <a:endParaRPr lang="en-US" sz="1200" dirty="0"/>
-          </a:p>
-          <a:p>
-            <a:pPr indent="0" marL="0">
-              <a:buNone/>
-            </a:pPr>
-            <a:r>
-              <a:rPr lang="en-US" sz="1200" dirty="0">
-                <a:solidFill>
-                  <a:srgbClr val="3A4552"/>
-                </a:solidFill>
-                <a:latin typeface="Calibri" pitchFamily="34" charset="0"/>
-                <a:ea typeface="Calibri" pitchFamily="34" charset="-122"/>
-                <a:cs typeface="Calibri" pitchFamily="34" charset="-120"/>
-              </a:rPr>
-              <a:t>Redbook « Java Application Development for CICS »</a:t>
-            </a:r>
-            <a:endParaRPr lang="en-US" sz="1200" dirty="0"/>
-          </a:p>
-        </p:txBody>
-      </p:sp>
-      <p:sp>
-        <p:nvSpPr>
-          <p:cNvPr id="23" name="Text 21"/>
-          <p:cNvSpPr txBox="1"/>
-          <p:nvPr/>
-        </p:nvSpPr>
-        <p:spPr>
-          <a:xfrm>
-            <a:off x="6217920" y="5440680"/>
-            <a:ext cx="5303520" cy="914400"/>
-          </a:xfrm>
-          <a:prstGeom prst="rect">
-            <a:avLst/>
-          </a:prstGeom>
-          <a:noFill/>
-          <a:ln/>
-        </p:spPr>
-        <p:txBody>
-          <a:bodyPr wrap="square" lIns="0" tIns="0" rIns="0" bIns="0" rtlCol="0" anchor="ctr"/>
-          <a:lstStyle/>
-          <a:p>
-            <a:pPr indent="0" marL="0">
-              <a:buNone/>
-            </a:pPr>
-            <a:r>
-              <a:rPr lang="en-US" sz="1200" dirty="0">
-                <a:solidFill>
-                  <a:srgbClr val="3A4552"/>
-                </a:solidFill>
-                <a:latin typeface="Calibri" pitchFamily="34" charset="0"/>
-                <a:ea typeface="Calibri" pitchFamily="34" charset="-122"/>
-                <a:cs typeface="Calibri" pitchFamily="34" charset="-120"/>
-              </a:rPr>
-              <a:t>Documentation officielle CICS TS (ibm.com/docs)</a:t>
-            </a:r>
-            <a:endParaRPr lang="en-US" sz="1200" dirty="0"/>
-          </a:p>
-          <a:p>
-            <a:pPr indent="0" marL="0">
-              <a:buNone/>
-            </a:pPr>
-            <a:r>
-              <a:rPr lang="en-US" sz="1200" dirty="0">
-                <a:solidFill>
-                  <a:srgbClr val="3A4552"/>
-                </a:solidFill>
-                <a:latin typeface="Calibri" pitchFamily="34" charset="0"/>
-                <a:ea typeface="Calibri" pitchFamily="34" charset="-122"/>
-                <a:cs typeface="Calibri" pitchFamily="34" charset="-120"/>
-              </a:rPr>
-              <a:t>IBM Developer learning paths (gratuits)</a:t>
-            </a:r>
-            <a:endParaRPr lang="en-US" sz="1200" dirty="0"/>
-          </a:p>
-        </p:txBody>
-      </p:sp>
-      <p:sp>
-        <p:nvSpPr>
-          <p:cNvPr id="24" name="Shape 22"/>
-          <p:cNvSpPr/>
-          <p:nvPr/>
-        </p:nvSpPr>
-        <p:spPr>
-          <a:xfrm>
-            <a:off x="0" y="6629400"/>
-            <a:ext cx="12161520" cy="18288"/>
-          </a:xfrm>
-          <a:prstGeom prst="rect">
-            <a:avLst/>
-          </a:prstGeom>
-          <a:solidFill>
-            <a:srgbClr val="E5E8EC"/>
-          </a:solidFill>
-          <a:ln w="12700">
-            <a:solidFill>
-              <a:srgbClr val="E5E8EC"/>
-            </a:solidFill>
-            <a:prstDash val="solid"/>
-          </a:ln>
-        </p:spPr>
-      </p:sp>
-      <p:sp>
-        <p:nvSpPr>
-          <p:cNvPr id="25" name="Text 23"/>
+          <p:cNvPr id="33" name="Text 31"/>
           <p:cNvSpPr txBox="1"/>
           <p:nvPr/>
         </p:nvSpPr>
@@ -8608,7 +10156,7 @@
       </p:sp>
       <p:sp>
         <p:nvSpPr>
-          <p:cNvPr id="26" name="Text 24"/>
+          <p:cNvPr id="34" name="Text 32"/>
           <p:cNvSpPr txBox="1"/>
           <p:nvPr/>
         </p:nvSpPr>
@@ -8639,7 +10187,7 @@
                 <a:ea typeface="Calibri" pitchFamily="34" charset="-122"/>
                 <a:cs typeface="Calibri" pitchFamily="34" charset="-120"/>
               </a:rPr>
-              <a:t>7 / 10</a:t>
+              <a:t>7 / 11</a:t>
             </a:r>
             <a:endParaRPr lang="en-US" sz="900" dirty="0"/>
           </a:p>
@@ -8711,7 +10259,7 @@
         <p:spPr>
           <a:xfrm>
             <a:off x="685800" y="457200"/>
-            <a:ext cx="5486400" cy="365760"/>
+            <a:ext cx="7315200" cy="365760"/>
           </a:xfrm>
           <a:prstGeom prst="rect">
             <a:avLst/>
@@ -8735,7 +10283,7 @@
                 <a:ea typeface="Calibri" pitchFamily="34" charset="-122"/>
                 <a:cs typeface="Calibri" pitchFamily="34" charset="-120"/>
               </a:rPr>
-              <a:t>07  ·  GARDE-FOUS</a:t>
+              <a:t>07  ·  CAS D'USAGE</a:t>
             </a:r>
             <a:endParaRPr lang="en-US" sz="1100" dirty="0"/>
           </a:p>
@@ -8774,7 +10322,7 @@
                 <a:ea typeface="Cambria" pitchFamily="34" charset="-122"/>
                 <a:cs typeface="Cambria" pitchFamily="34" charset="-120"/>
               </a:rPr>
-              <a:t>Limites assumées et conformité bancaire</a:t>
+              <a:t>Application concrète : parcours CICS / Java hybride</a:t>
             </a:r>
             <a:endParaRPr lang="en-US" sz="3200" dirty="0"/>
           </a:p>
@@ -8782,428 +10330,16 @@
       </p:sp>
       <p:sp>
         <p:nvSpPr>
-          <p:cNvPr id="5" name="Text 3"/>
-          <p:cNvSpPr txBox="1"/>
-          <p:nvPr/>
-        </p:nvSpPr>
-        <p:spPr>
-          <a:xfrm>
-            <a:off x="457200" y="1920240"/>
-            <a:ext cx="5486400" cy="320040"/>
-          </a:xfrm>
-          <a:prstGeom prst="rect">
-            <a:avLst/>
-          </a:prstGeom>
-          <a:noFill/>
-          <a:ln/>
-        </p:spPr>
-        <p:txBody>
-          <a:bodyPr wrap="square" lIns="0" tIns="0" rIns="0" bIns="0" rtlCol="0" anchor="ctr"/>
-          <a:lstStyle/>
-          <a:p>
-            <a:pPr indent="0" marL="0">
-              <a:buNone/>
-            </a:pPr>
-            <a:r>
-              <a:rPr lang="en-US" sz="1200" b="1" spc="300" kern="0" dirty="0">
-                <a:solidFill>
-                  <a:srgbClr val="F5B700"/>
-                </a:solidFill>
-                <a:latin typeface="Calibri" pitchFamily="34" charset="0"/>
-                <a:ea typeface="Calibri" pitchFamily="34" charset="-122"/>
-                <a:cs typeface="Calibri" pitchFamily="34" charset="-120"/>
-              </a:rPr>
-              <a:t>LIMITES DE LA MÉTHODE</a:t>
-            </a:r>
-            <a:endParaRPr lang="en-US" sz="1200" dirty="0"/>
-          </a:p>
-        </p:txBody>
-      </p:sp>
-      <p:sp>
-        <p:nvSpPr>
-          <p:cNvPr id="6" name="Shape 4"/>
+          <p:cNvPr id="5" name="Shape 3"/>
           <p:cNvSpPr/>
           <p:nvPr/>
         </p:nvSpPr>
         <p:spPr>
           <a:xfrm>
-            <a:off x="457200" y="2377440"/>
-            <a:ext cx="73152" cy="201168"/>
-          </a:xfrm>
-          <a:prstGeom prst="rect">
-            <a:avLst/>
-          </a:prstGeom>
-          <a:solidFill>
-            <a:srgbClr val="003876"/>
-          </a:solidFill>
-          <a:ln w="12700">
-            <a:solidFill>
-              <a:srgbClr val="003876"/>
-            </a:solidFill>
-            <a:prstDash val="solid"/>
-          </a:ln>
-        </p:spPr>
-      </p:sp>
-      <p:sp>
-        <p:nvSpPr>
-          <p:cNvPr id="7" name="Text 5"/>
-          <p:cNvSpPr txBox="1"/>
-          <p:nvPr/>
-        </p:nvSpPr>
-        <p:spPr>
-          <a:xfrm>
-            <a:off x="640080" y="2331720"/>
-            <a:ext cx="5303520" cy="274320"/>
-          </a:xfrm>
-          <a:prstGeom prst="rect">
-            <a:avLst/>
-          </a:prstGeom>
-          <a:noFill/>
-          <a:ln/>
-        </p:spPr>
-        <p:txBody>
-          <a:bodyPr wrap="square" lIns="0" tIns="0" rIns="0" bIns="0" rtlCol="0" anchor="ctr"/>
-          <a:lstStyle/>
-          <a:p>
-            <a:pPr indent="0" marL="0">
-              <a:buNone/>
-            </a:pPr>
-            <a:r>
-              <a:rPr lang="en-US" sz="1300" b="1" dirty="0">
-                <a:solidFill>
-                  <a:srgbClr val="1A1F2B"/>
-                </a:solidFill>
-                <a:latin typeface="Calibri" pitchFamily="34" charset="0"/>
-                <a:ea typeface="Calibri" pitchFamily="34" charset="-122"/>
-                <a:cs typeface="Calibri" pitchFamily="34" charset="-120"/>
-              </a:rPr>
-              <a:t>Ne remplace pas la pratique</a:t>
-            </a:r>
-            <a:endParaRPr lang="en-US" sz="1300" dirty="0"/>
-          </a:p>
-        </p:txBody>
-      </p:sp>
-      <p:sp>
-        <p:nvSpPr>
-          <p:cNvPr id="8" name="Text 6"/>
-          <p:cNvSpPr txBox="1"/>
-          <p:nvPr/>
-        </p:nvSpPr>
-        <p:spPr>
-          <a:xfrm>
-            <a:off x="640080" y="2606040"/>
-            <a:ext cx="5303520" cy="822960"/>
-          </a:xfrm>
-          <a:prstGeom prst="rect">
-            <a:avLst/>
-          </a:prstGeom>
-          <a:noFill/>
-          <a:ln/>
-        </p:spPr>
-        <p:txBody>
-          <a:bodyPr wrap="square" lIns="0" tIns="0" rIns="0" bIns="0" rtlCol="0" anchor="ctr"/>
-          <a:lstStyle/>
-          <a:p>
-            <a:pPr indent="0" marL="0">
-              <a:buNone/>
-            </a:pPr>
-            <a:r>
-              <a:rPr lang="en-US" sz="1200" dirty="0">
-                <a:solidFill>
-                  <a:srgbClr val="3A4552"/>
-                </a:solidFill>
-                <a:latin typeface="Calibri" pitchFamily="34" charset="0"/>
-                <a:ea typeface="Calibri" pitchFamily="34" charset="-122"/>
-                <a:cs typeface="Calibri" pitchFamily="34" charset="-120"/>
-              </a:rPr>
-              <a:t>La fiche donne le socle ; le lab, le code, le POC restent indispensables.</a:t>
-            </a:r>
-            <a:endParaRPr lang="en-US" sz="1200" dirty="0"/>
-          </a:p>
-        </p:txBody>
-      </p:sp>
-      <p:sp>
-        <p:nvSpPr>
-          <p:cNvPr id="9" name="Shape 7"/>
-          <p:cNvSpPr/>
-          <p:nvPr/>
-        </p:nvSpPr>
-        <p:spPr>
-          <a:xfrm>
-            <a:off x="457200" y="3566160"/>
-            <a:ext cx="73152" cy="201168"/>
-          </a:xfrm>
-          <a:prstGeom prst="rect">
-            <a:avLst/>
-          </a:prstGeom>
-          <a:solidFill>
-            <a:srgbClr val="003876"/>
-          </a:solidFill>
-          <a:ln w="12700">
-            <a:solidFill>
-              <a:srgbClr val="003876"/>
-            </a:solidFill>
-            <a:prstDash val="solid"/>
-          </a:ln>
-        </p:spPr>
-      </p:sp>
-      <p:sp>
-        <p:nvSpPr>
-          <p:cNvPr id="10" name="Text 8"/>
-          <p:cNvSpPr txBox="1"/>
-          <p:nvPr/>
-        </p:nvSpPr>
-        <p:spPr>
-          <a:xfrm>
-            <a:off x="640080" y="3520440"/>
-            <a:ext cx="5303520" cy="274320"/>
-          </a:xfrm>
-          <a:prstGeom prst="rect">
-            <a:avLst/>
-          </a:prstGeom>
-          <a:noFill/>
-          <a:ln/>
-        </p:spPr>
-        <p:txBody>
-          <a:bodyPr wrap="square" lIns="0" tIns="0" rIns="0" bIns="0" rtlCol="0" anchor="ctr"/>
-          <a:lstStyle/>
-          <a:p>
-            <a:pPr indent="0" marL="0">
-              <a:buNone/>
-            </a:pPr>
-            <a:r>
-              <a:rPr lang="en-US" sz="1300" b="1" dirty="0">
-                <a:solidFill>
-                  <a:srgbClr val="1A1F2B"/>
-                </a:solidFill>
-                <a:latin typeface="Calibri" pitchFamily="34" charset="0"/>
-                <a:ea typeface="Calibri" pitchFamily="34" charset="-122"/>
-                <a:cs typeface="Calibri" pitchFamily="34" charset="-120"/>
-              </a:rPr>
-              <a:t>Risque d'hallucination résiduel</a:t>
-            </a:r>
-            <a:endParaRPr lang="en-US" sz="1300" dirty="0"/>
-          </a:p>
-        </p:txBody>
-      </p:sp>
-      <p:sp>
-        <p:nvSpPr>
-          <p:cNvPr id="11" name="Text 9"/>
-          <p:cNvSpPr txBox="1"/>
-          <p:nvPr/>
-        </p:nvSpPr>
-        <p:spPr>
-          <a:xfrm>
-            <a:off x="640080" y="3794760"/>
-            <a:ext cx="5303520" cy="822960"/>
-          </a:xfrm>
-          <a:prstGeom prst="rect">
-            <a:avLst/>
-          </a:prstGeom>
-          <a:noFill/>
-          <a:ln/>
-        </p:spPr>
-        <p:txBody>
-          <a:bodyPr wrap="square" lIns="0" tIns="0" rIns="0" bIns="0" rtlCol="0" anchor="ctr"/>
-          <a:lstStyle/>
-          <a:p>
-            <a:pPr indent="0" marL="0">
-              <a:buNone/>
-            </a:pPr>
-            <a:r>
-              <a:rPr lang="en-US" sz="1200" dirty="0">
-                <a:solidFill>
-                  <a:srgbClr val="3A4552"/>
-                </a:solidFill>
-                <a:latin typeface="Calibri" pitchFamily="34" charset="0"/>
-                <a:ea typeface="Calibri" pitchFamily="34" charset="-122"/>
-                <a:cs typeface="Calibri" pitchFamily="34" charset="-120"/>
-              </a:rPr>
-              <a:t>Vérification systématique des noms d'API, codes retour, paramètres exacts.</a:t>
-            </a:r>
-            <a:endParaRPr lang="en-US" sz="1200" dirty="0"/>
-          </a:p>
-        </p:txBody>
-      </p:sp>
-      <p:sp>
-        <p:nvSpPr>
-          <p:cNvPr id="12" name="Shape 10"/>
-          <p:cNvSpPr/>
-          <p:nvPr/>
-        </p:nvSpPr>
-        <p:spPr>
-          <a:xfrm>
-            <a:off x="457200" y="4754880"/>
-            <a:ext cx="73152" cy="201168"/>
-          </a:xfrm>
-          <a:prstGeom prst="rect">
-            <a:avLst/>
-          </a:prstGeom>
-          <a:solidFill>
-            <a:srgbClr val="003876"/>
-          </a:solidFill>
-          <a:ln w="12700">
-            <a:solidFill>
-              <a:srgbClr val="003876"/>
-            </a:solidFill>
-            <a:prstDash val="solid"/>
-          </a:ln>
-        </p:spPr>
-      </p:sp>
-      <p:sp>
-        <p:nvSpPr>
-          <p:cNvPr id="13" name="Text 11"/>
-          <p:cNvSpPr txBox="1"/>
-          <p:nvPr/>
-        </p:nvSpPr>
-        <p:spPr>
-          <a:xfrm>
-            <a:off x="640080" y="4709160"/>
-            <a:ext cx="5303520" cy="274320"/>
-          </a:xfrm>
-          <a:prstGeom prst="rect">
-            <a:avLst/>
-          </a:prstGeom>
-          <a:noFill/>
-          <a:ln/>
-        </p:spPr>
-        <p:txBody>
-          <a:bodyPr wrap="square" lIns="0" tIns="0" rIns="0" bIns="0" rtlCol="0" anchor="ctr"/>
-          <a:lstStyle/>
-          <a:p>
-            <a:pPr indent="0" marL="0">
-              <a:buNone/>
-            </a:pPr>
-            <a:r>
-              <a:rPr lang="en-US" sz="1300" b="1" dirty="0">
-                <a:solidFill>
-                  <a:srgbClr val="1A1F2B"/>
-                </a:solidFill>
-                <a:latin typeface="Calibri" pitchFamily="34" charset="0"/>
-                <a:ea typeface="Calibri" pitchFamily="34" charset="-122"/>
-                <a:cs typeface="Calibri" pitchFamily="34" charset="-120"/>
-              </a:rPr>
-              <a:t>Qualité corrélée au prompt</a:t>
-            </a:r>
-            <a:endParaRPr lang="en-US" sz="1300" dirty="0"/>
-          </a:p>
-        </p:txBody>
-      </p:sp>
-      <p:sp>
-        <p:nvSpPr>
-          <p:cNvPr id="14" name="Text 12"/>
-          <p:cNvSpPr txBox="1"/>
-          <p:nvPr/>
-        </p:nvSpPr>
-        <p:spPr>
-          <a:xfrm>
-            <a:off x="640080" y="4983480"/>
-            <a:ext cx="5303520" cy="822960"/>
-          </a:xfrm>
-          <a:prstGeom prst="rect">
-            <a:avLst/>
-          </a:prstGeom>
-          <a:noFill/>
-          <a:ln/>
-        </p:spPr>
-        <p:txBody>
-          <a:bodyPr wrap="square" lIns="0" tIns="0" rIns="0" bIns="0" rtlCol="0" anchor="ctr"/>
-          <a:lstStyle/>
-          <a:p>
-            <a:pPr indent="0" marL="0">
-              <a:buNone/>
-            </a:pPr>
-            <a:r>
-              <a:rPr lang="en-US" sz="1200" dirty="0">
-                <a:solidFill>
-                  <a:srgbClr val="3A4552"/>
-                </a:solidFill>
-                <a:latin typeface="Calibri" pitchFamily="34" charset="0"/>
-                <a:ea typeface="Calibri" pitchFamily="34" charset="-122"/>
-                <a:cs typeface="Calibri" pitchFamily="34" charset="-120"/>
-              </a:rPr>
-              <a:t>Un prompt faible produit une fiche faible. C'est un savoir-faire à construire.</a:t>
-            </a:r>
-            <a:endParaRPr lang="en-US" sz="1200" dirty="0"/>
-          </a:p>
-        </p:txBody>
-      </p:sp>
-      <p:sp>
-        <p:nvSpPr>
-          <p:cNvPr id="15" name="Shape 13"/>
-          <p:cNvSpPr/>
-          <p:nvPr/>
-        </p:nvSpPr>
-        <p:spPr>
-          <a:xfrm>
-            <a:off x="6400800" y="1920240"/>
-            <a:ext cx="5303520" cy="4480560"/>
-          </a:xfrm>
-          <a:prstGeom prst="rect">
-            <a:avLst/>
-          </a:prstGeom>
-          <a:solidFill>
-            <a:srgbClr val="003876"/>
-          </a:solidFill>
-          <a:ln w="12700">
-            <a:solidFill>
-              <a:srgbClr val="003876"/>
-            </a:solidFill>
-            <a:prstDash val="solid"/>
-          </a:ln>
-        </p:spPr>
-      </p:sp>
-      <p:sp>
-        <p:nvSpPr>
-          <p:cNvPr id="16" name="Text 14"/>
-          <p:cNvSpPr txBox="1"/>
-          <p:nvPr/>
-        </p:nvSpPr>
-        <p:spPr>
-          <a:xfrm>
-            <a:off x="6675120" y="2103120"/>
-            <a:ext cx="4937760" cy="320040"/>
-          </a:xfrm>
-          <a:prstGeom prst="rect">
-            <a:avLst/>
-          </a:prstGeom>
-          <a:noFill/>
-          <a:ln/>
-        </p:spPr>
-        <p:txBody>
-          <a:bodyPr wrap="square" lIns="0" tIns="0" rIns="0" bIns="0" rtlCol="0" anchor="ctr"/>
-          <a:lstStyle/>
-          <a:p>
-            <a:pPr indent="0" marL="0">
-              <a:buNone/>
-            </a:pPr>
-            <a:r>
-              <a:rPr lang="en-US" sz="1200" b="1" spc="300" kern="0" dirty="0">
-                <a:solidFill>
-                  <a:srgbClr val="F5B700"/>
-                </a:solidFill>
-                <a:latin typeface="Calibri" pitchFamily="34" charset="0"/>
-                <a:ea typeface="Calibri" pitchFamily="34" charset="-122"/>
-                <a:cs typeface="Calibri" pitchFamily="34" charset="-120"/>
-              </a:rPr>
-              <a:t>CONFORMITÉ &amp; SÉCURITÉ</a:t>
-            </a:r>
-            <a:endParaRPr lang="en-US" sz="1200" dirty="0"/>
-          </a:p>
-        </p:txBody>
-      </p:sp>
-      <p:sp>
-        <p:nvSpPr>
-          <p:cNvPr id="17" name="Shape 15"/>
-          <p:cNvSpPr/>
-          <p:nvPr/>
-        </p:nvSpPr>
-        <p:spPr>
-          <a:xfrm>
-            <a:off x="6675120" y="2697480"/>
-            <a:ext cx="137160" cy="137160"/>
-          </a:xfrm>
-          <a:prstGeom prst="ellipse">
+            <a:off x="457200" y="2011680"/>
+            <a:ext cx="3657600" cy="457200"/>
+          </a:xfrm>
+          <a:prstGeom prst="rect">
             <a:avLst/>
           </a:prstGeom>
           <a:solidFill>
@@ -9219,55 +10355,158 @@
       </p:sp>
       <p:sp>
         <p:nvSpPr>
-          <p:cNvPr id="18" name="Text 16"/>
-          <p:cNvSpPr txBox="1"/>
-          <p:nvPr/>
-        </p:nvSpPr>
-        <p:spPr>
-          <a:xfrm>
-            <a:off x="6949440" y="2606040"/>
-            <a:ext cx="4572000" cy="777240"/>
-          </a:xfrm>
-          <a:prstGeom prst="rect">
-            <a:avLst/>
-          </a:prstGeom>
-          <a:noFill/>
-          <a:ln/>
-        </p:spPr>
-        <p:txBody>
-          <a:bodyPr wrap="square" lIns="0" tIns="0" rIns="0" bIns="0" rtlCol="0" anchor="ctr"/>
-          <a:lstStyle/>
-          <a:p>
-            <a:pPr indent="0" marL="0">
-              <a:buNone/>
-            </a:pPr>
-            <a:r>
-              <a:rPr lang="en-US" sz="1300" dirty="0">
-                <a:solidFill>
-                  <a:srgbClr val="FFFFFF"/>
-                </a:solidFill>
-                <a:latin typeface="Calibri" pitchFamily="34" charset="0"/>
-                <a:ea typeface="Calibri" pitchFamily="34" charset="-122"/>
-                <a:cs typeface="Calibri" pitchFamily="34" charset="-120"/>
-              </a:rPr>
-              <a:t>Aucune donnée client, code source LCL ou information confidentielle transmise à l'IA.</a:t>
-            </a:r>
-            <a:endParaRPr lang="en-US" sz="1300" dirty="0"/>
-          </a:p>
-        </p:txBody>
-      </p:sp>
-      <p:sp>
-        <p:nvSpPr>
-          <p:cNvPr id="19" name="Shape 17"/>
+          <p:cNvPr id="6" name="Text 4"/>
+          <p:cNvSpPr txBox="1"/>
+          <p:nvPr/>
+        </p:nvSpPr>
+        <p:spPr>
+          <a:xfrm>
+            <a:off x="640080" y="2011680"/>
+            <a:ext cx="3291840" cy="457200"/>
+          </a:xfrm>
+          <a:prstGeom prst="rect">
+            <a:avLst/>
+          </a:prstGeom>
+          <a:noFill/>
+          <a:ln/>
+        </p:spPr>
+        <p:txBody>
+          <a:bodyPr wrap="square" lIns="0" tIns="0" rIns="0" bIns="0" rtlCol="0" anchor="ctr"/>
+          <a:lstStyle/>
+          <a:p>
+            <a:pPr indent="0" marL="0">
+              <a:buNone/>
+            </a:pPr>
+            <a:r>
+              <a:rPr lang="en-US" sz="1100" b="1" spc="400" kern="0" dirty="0">
+                <a:solidFill>
+                  <a:srgbClr val="003876"/>
+                </a:solidFill>
+                <a:latin typeface="Calibri" pitchFamily="34" charset="0"/>
+                <a:ea typeface="Calibri" pitchFamily="34" charset="-122"/>
+                <a:cs typeface="Calibri" pitchFamily="34" charset="-120"/>
+              </a:rPr>
+              <a:t>PHASE 1</a:t>
+            </a:r>
+            <a:endParaRPr lang="en-US" sz="1100" dirty="0"/>
+          </a:p>
+        </p:txBody>
+      </p:sp>
+      <p:sp>
+        <p:nvSpPr>
+          <p:cNvPr id="7" name="Shape 5"/>
           <p:cNvSpPr/>
           <p:nvPr/>
         </p:nvSpPr>
         <p:spPr>
           <a:xfrm>
-            <a:off x="6675120" y="3611880"/>
-            <a:ext cx="137160" cy="137160"/>
-          </a:xfrm>
-          <a:prstGeom prst="ellipse">
+            <a:off x="457200" y="2468880"/>
+            <a:ext cx="3657600" cy="2011680"/>
+          </a:xfrm>
+          <a:prstGeom prst="rect">
+            <a:avLst/>
+          </a:prstGeom>
+          <a:solidFill>
+            <a:srgbClr val="FFFFFF"/>
+          </a:solidFill>
+          <a:ln w="12700">
+            <a:solidFill>
+              <a:srgbClr val="E5E8EC"/>
+            </a:solidFill>
+            <a:prstDash val="solid"/>
+          </a:ln>
+        </p:spPr>
+      </p:sp>
+      <p:sp>
+        <p:nvSpPr>
+          <p:cNvPr id="8" name="Text 6"/>
+          <p:cNvSpPr txBox="1"/>
+          <p:nvPr/>
+        </p:nvSpPr>
+        <p:spPr>
+          <a:xfrm>
+            <a:off x="640080" y="2606040"/>
+            <a:ext cx="3291840" cy="457200"/>
+          </a:xfrm>
+          <a:prstGeom prst="rect">
+            <a:avLst/>
+          </a:prstGeom>
+          <a:noFill/>
+          <a:ln/>
+        </p:spPr>
+        <p:txBody>
+          <a:bodyPr wrap="square" lIns="0" tIns="0" rIns="0" bIns="0" rtlCol="0" anchor="ctr"/>
+          <a:lstStyle/>
+          <a:p>
+            <a:pPr indent="0" marL="0">
+              <a:buNone/>
+            </a:pPr>
+            <a:r>
+              <a:rPr lang="en-US" sz="2000" b="1" dirty="0">
+                <a:solidFill>
+                  <a:srgbClr val="003876"/>
+                </a:solidFill>
+                <a:latin typeface="Cambria" pitchFamily="34" charset="0"/>
+                <a:ea typeface="Cambria" pitchFamily="34" charset="-122"/>
+                <a:cs typeface="Cambria" pitchFamily="34" charset="-120"/>
+              </a:rPr>
+              <a:t>Cartographie</a:t>
+            </a:r>
+            <a:endParaRPr lang="en-US" sz="2000" dirty="0"/>
+          </a:p>
+        </p:txBody>
+      </p:sp>
+      <p:sp>
+        <p:nvSpPr>
+          <p:cNvPr id="9" name="Text 7"/>
+          <p:cNvSpPr txBox="1"/>
+          <p:nvPr/>
+        </p:nvSpPr>
+        <p:spPr>
+          <a:xfrm>
+            <a:off x="640080" y="3154680"/>
+            <a:ext cx="3291840" cy="1234440"/>
+          </a:xfrm>
+          <a:prstGeom prst="rect">
+            <a:avLst/>
+          </a:prstGeom>
+          <a:noFill/>
+          <a:ln/>
+        </p:spPr>
+        <p:txBody>
+          <a:bodyPr wrap="square" lIns="0" tIns="0" rIns="0" bIns="0" rtlCol="0" anchor="ctr"/>
+          <a:lstStyle/>
+          <a:p>
+            <a:pPr indent="0" marL="0">
+              <a:buNone/>
+            </a:pPr>
+            <a:r>
+              <a:rPr lang="en-US" sz="1200" dirty="0">
+                <a:solidFill>
+                  <a:srgbClr val="3A4552"/>
+                </a:solidFill>
+                <a:latin typeface="Calibri" pitchFamily="34" charset="0"/>
+                <a:ea typeface="Calibri" pitchFamily="34" charset="-122"/>
+                <a:cs typeface="Calibri" pitchFamily="34" charset="-120"/>
+              </a:rPr>
+              <a:t>IA identifie les Redbooks et learning paths IBM pertinents. Sortie : plan de lecture priorisé.</a:t>
+            </a:r>
+            <a:endParaRPr lang="en-US" sz="1200" dirty="0"/>
+          </a:p>
+        </p:txBody>
+      </p:sp>
+      <p:sp>
+        <p:nvSpPr>
+          <p:cNvPr id="10" name="Shape 8"/>
+          <p:cNvSpPr/>
+          <p:nvPr/>
+        </p:nvSpPr>
+        <p:spPr>
+          <a:xfrm>
+            <a:off x="4361688" y="2011680"/>
+            <a:ext cx="3657600" cy="457200"/>
+          </a:xfrm>
+          <a:prstGeom prst="rect">
             <a:avLst/>
           </a:prstGeom>
           <a:solidFill>
@@ -9283,55 +10522,158 @@
       </p:sp>
       <p:sp>
         <p:nvSpPr>
-          <p:cNvPr id="20" name="Text 18"/>
-          <p:cNvSpPr txBox="1"/>
-          <p:nvPr/>
-        </p:nvSpPr>
-        <p:spPr>
-          <a:xfrm>
-            <a:off x="6949440" y="3520440"/>
-            <a:ext cx="4572000" cy="777240"/>
-          </a:xfrm>
-          <a:prstGeom prst="rect">
-            <a:avLst/>
-          </a:prstGeom>
-          <a:noFill/>
-          <a:ln/>
-        </p:spPr>
-        <p:txBody>
-          <a:bodyPr wrap="square" lIns="0" tIns="0" rIns="0" bIns="0" rtlCol="0" anchor="ctr"/>
-          <a:lstStyle/>
-          <a:p>
-            <a:pPr indent="0" marL="0">
-              <a:buNone/>
-            </a:pPr>
-            <a:r>
-              <a:rPr lang="en-US" sz="1300" dirty="0">
-                <a:solidFill>
-                  <a:srgbClr val="FFFFFF"/>
-                </a:solidFill>
-                <a:latin typeface="Calibri" pitchFamily="34" charset="0"/>
-                <a:ea typeface="Calibri" pitchFamily="34" charset="-122"/>
-                <a:cs typeface="Calibri" pitchFamily="34" charset="-120"/>
-              </a:rPr>
-              <a:t>Sources traitées exclusivement publiques (Redbooks, doc IBM, formations éditeur générales).</a:t>
-            </a:r>
-            <a:endParaRPr lang="en-US" sz="1300" dirty="0"/>
-          </a:p>
-        </p:txBody>
-      </p:sp>
-      <p:sp>
-        <p:nvSpPr>
-          <p:cNvPr id="21" name="Shape 19"/>
+          <p:cNvPr id="11" name="Text 9"/>
+          <p:cNvSpPr txBox="1"/>
+          <p:nvPr/>
+        </p:nvSpPr>
+        <p:spPr>
+          <a:xfrm>
+            <a:off x="4544568" y="2011680"/>
+            <a:ext cx="3291840" cy="457200"/>
+          </a:xfrm>
+          <a:prstGeom prst="rect">
+            <a:avLst/>
+          </a:prstGeom>
+          <a:noFill/>
+          <a:ln/>
+        </p:spPr>
+        <p:txBody>
+          <a:bodyPr wrap="square" lIns="0" tIns="0" rIns="0" bIns="0" rtlCol="0" anchor="ctr"/>
+          <a:lstStyle/>
+          <a:p>
+            <a:pPr indent="0" marL="0">
+              <a:buNone/>
+            </a:pPr>
+            <a:r>
+              <a:rPr lang="en-US" sz="1100" b="1" spc="400" kern="0" dirty="0">
+                <a:solidFill>
+                  <a:srgbClr val="003876"/>
+                </a:solidFill>
+                <a:latin typeface="Calibri" pitchFamily="34" charset="0"/>
+                <a:ea typeface="Calibri" pitchFamily="34" charset="-122"/>
+                <a:cs typeface="Calibri" pitchFamily="34" charset="-120"/>
+              </a:rPr>
+              <a:t>PHASE 2</a:t>
+            </a:r>
+            <a:endParaRPr lang="en-US" sz="1100" dirty="0"/>
+          </a:p>
+        </p:txBody>
+      </p:sp>
+      <p:sp>
+        <p:nvSpPr>
+          <p:cNvPr id="12" name="Shape 10"/>
           <p:cNvSpPr/>
           <p:nvPr/>
         </p:nvSpPr>
         <p:spPr>
           <a:xfrm>
-            <a:off x="6675120" y="4526280"/>
-            <a:ext cx="137160" cy="137160"/>
-          </a:xfrm>
-          <a:prstGeom prst="ellipse">
+            <a:off x="4361688" y="2468880"/>
+            <a:ext cx="3657600" cy="2011680"/>
+          </a:xfrm>
+          <a:prstGeom prst="rect">
+            <a:avLst/>
+          </a:prstGeom>
+          <a:solidFill>
+            <a:srgbClr val="FFFFFF"/>
+          </a:solidFill>
+          <a:ln w="12700">
+            <a:solidFill>
+              <a:srgbClr val="E5E8EC"/>
+            </a:solidFill>
+            <a:prstDash val="solid"/>
+          </a:ln>
+        </p:spPr>
+      </p:sp>
+      <p:sp>
+        <p:nvSpPr>
+          <p:cNvPr id="13" name="Text 11"/>
+          <p:cNvSpPr txBox="1"/>
+          <p:nvPr/>
+        </p:nvSpPr>
+        <p:spPr>
+          <a:xfrm>
+            <a:off x="4544568" y="2606040"/>
+            <a:ext cx="3291840" cy="457200"/>
+          </a:xfrm>
+          <a:prstGeom prst="rect">
+            <a:avLst/>
+          </a:prstGeom>
+          <a:noFill/>
+          <a:ln/>
+        </p:spPr>
+        <p:txBody>
+          <a:bodyPr wrap="square" lIns="0" tIns="0" rIns="0" bIns="0" rtlCol="0" anchor="ctr"/>
+          <a:lstStyle/>
+          <a:p>
+            <a:pPr indent="0" marL="0">
+              <a:buNone/>
+            </a:pPr>
+            <a:r>
+              <a:rPr lang="en-US" sz="2000" b="1" dirty="0">
+                <a:solidFill>
+                  <a:srgbClr val="003876"/>
+                </a:solidFill>
+                <a:latin typeface="Cambria" pitchFamily="34" charset="0"/>
+                <a:ea typeface="Cambria" pitchFamily="34" charset="-122"/>
+                <a:cs typeface="Cambria" pitchFamily="34" charset="-120"/>
+              </a:rPr>
+              <a:t>Digestion</a:t>
+            </a:r>
+            <a:endParaRPr lang="en-US" sz="2000" dirty="0"/>
+          </a:p>
+        </p:txBody>
+      </p:sp>
+      <p:sp>
+        <p:nvSpPr>
+          <p:cNvPr id="14" name="Text 12"/>
+          <p:cNvSpPr txBox="1"/>
+          <p:nvPr/>
+        </p:nvSpPr>
+        <p:spPr>
+          <a:xfrm>
+            <a:off x="4544568" y="3154680"/>
+            <a:ext cx="3291840" cy="1234440"/>
+          </a:xfrm>
+          <a:prstGeom prst="rect">
+            <a:avLst/>
+          </a:prstGeom>
+          <a:noFill/>
+          <a:ln/>
+        </p:spPr>
+        <p:txBody>
+          <a:bodyPr wrap="square" lIns="0" tIns="0" rIns="0" bIns="0" rtlCol="0" anchor="ctr"/>
+          <a:lstStyle/>
+          <a:p>
+            <a:pPr indent="0" marL="0">
+              <a:buNone/>
+            </a:pPr>
+            <a:r>
+              <a:rPr lang="en-US" sz="1200" dirty="0">
+                <a:solidFill>
+                  <a:srgbClr val="3A4552"/>
+                </a:solidFill>
+                <a:latin typeface="Calibri" pitchFamily="34" charset="0"/>
+                <a:ea typeface="Calibri" pitchFamily="34" charset="-122"/>
+                <a:cs typeface="Calibri" pitchFamily="34" charset="-120"/>
+              </a:rPr>
+              <a:t>Chaque Redbook traité via prompt structuré. Sortie : fiche technique par source.</a:t>
+            </a:r>
+            <a:endParaRPr lang="en-US" sz="1200" dirty="0"/>
+          </a:p>
+        </p:txBody>
+      </p:sp>
+      <p:sp>
+        <p:nvSpPr>
+          <p:cNvPr id="15" name="Shape 13"/>
+          <p:cNvSpPr/>
+          <p:nvPr/>
+        </p:nvSpPr>
+        <p:spPr>
+          <a:xfrm>
+            <a:off x="8275320" y="2011680"/>
+            <a:ext cx="3657600" cy="457200"/>
+          </a:xfrm>
+          <a:prstGeom prst="rect">
             <a:avLst/>
           </a:prstGeom>
           <a:solidFill>
@@ -9347,63 +10689,63 @@
       </p:sp>
       <p:sp>
         <p:nvSpPr>
-          <p:cNvPr id="22" name="Text 20"/>
-          <p:cNvSpPr txBox="1"/>
-          <p:nvPr/>
-        </p:nvSpPr>
-        <p:spPr>
-          <a:xfrm>
-            <a:off x="6949440" y="4434840"/>
-            <a:ext cx="4572000" cy="777240"/>
-          </a:xfrm>
-          <a:prstGeom prst="rect">
-            <a:avLst/>
-          </a:prstGeom>
-          <a:noFill/>
-          <a:ln/>
-        </p:spPr>
-        <p:txBody>
-          <a:bodyPr wrap="square" lIns="0" tIns="0" rIns="0" bIns="0" rtlCol="0" anchor="ctr"/>
-          <a:lstStyle/>
-          <a:p>
-            <a:pPr indent="0" marL="0">
-              <a:buNone/>
-            </a:pPr>
-            <a:r>
-              <a:rPr lang="en-US" sz="1300" dirty="0">
-                <a:solidFill>
-                  <a:srgbClr val="FFFFFF"/>
-                </a:solidFill>
-                <a:latin typeface="Calibri" pitchFamily="34" charset="0"/>
-                <a:ea typeface="Calibri" pitchFamily="34" charset="-122"/>
-                <a:cs typeface="Calibri" pitchFamily="34" charset="-120"/>
-              </a:rPr>
-              <a:t>Alignement à valider avec la politique IA du groupe et la sécurité SI.</a:t>
-            </a:r>
-            <a:endParaRPr lang="en-US" sz="1300" dirty="0"/>
-          </a:p>
-        </p:txBody>
-      </p:sp>
-      <p:sp>
-        <p:nvSpPr>
-          <p:cNvPr id="23" name="Shape 21"/>
+          <p:cNvPr id="16" name="Text 14"/>
+          <p:cNvSpPr txBox="1"/>
+          <p:nvPr/>
+        </p:nvSpPr>
+        <p:spPr>
+          <a:xfrm>
+            <a:off x="8458200" y="2011680"/>
+            <a:ext cx="3291840" cy="457200"/>
+          </a:xfrm>
+          <a:prstGeom prst="rect">
+            <a:avLst/>
+          </a:prstGeom>
+          <a:noFill/>
+          <a:ln/>
+        </p:spPr>
+        <p:txBody>
+          <a:bodyPr wrap="square" lIns="0" tIns="0" rIns="0" bIns="0" rtlCol="0" anchor="ctr"/>
+          <a:lstStyle/>
+          <a:p>
+            <a:pPr indent="0" marL="0">
+              <a:buNone/>
+            </a:pPr>
+            <a:r>
+              <a:rPr lang="en-US" sz="1100" b="1" spc="400" kern="0" dirty="0">
+                <a:solidFill>
+                  <a:srgbClr val="003876"/>
+                </a:solidFill>
+                <a:latin typeface="Calibri" pitchFamily="34" charset="0"/>
+                <a:ea typeface="Calibri" pitchFamily="34" charset="-122"/>
+                <a:cs typeface="Calibri" pitchFamily="34" charset="-120"/>
+              </a:rPr>
+              <a:t>PHASE 3</a:t>
+            </a:r>
+            <a:endParaRPr lang="en-US" sz="1100" dirty="0"/>
+          </a:p>
+        </p:txBody>
+      </p:sp>
+      <p:sp>
+        <p:nvSpPr>
+          <p:cNvPr id="17" name="Shape 15"/>
           <p:cNvSpPr/>
           <p:nvPr/>
         </p:nvSpPr>
         <p:spPr>
           <a:xfrm>
-            <a:off x="6675120" y="5440680"/>
-            <a:ext cx="137160" cy="137160"/>
-          </a:xfrm>
-          <a:prstGeom prst="ellipse">
+            <a:off x="8275320" y="2468880"/>
+            <a:ext cx="3657600" cy="2011680"/>
+          </a:xfrm>
+          <a:prstGeom prst="rect">
             <a:avLst/>
           </a:prstGeom>
           <a:solidFill>
-            <a:srgbClr val="F5B700"/>
+            <a:srgbClr val="FFFFFF"/>
           </a:solidFill>
           <a:ln w="12700">
             <a:solidFill>
-              <a:srgbClr val="F5B700"/>
+              <a:srgbClr val="E5E8EC"/>
             </a:solidFill>
             <a:prstDash val="solid"/>
           </a:ln>
@@ -9411,53 +10753,92 @@
       </p:sp>
       <p:sp>
         <p:nvSpPr>
-          <p:cNvPr id="24" name="Text 22"/>
-          <p:cNvSpPr txBox="1"/>
-          <p:nvPr/>
-        </p:nvSpPr>
-        <p:spPr>
-          <a:xfrm>
-            <a:off x="6949440" y="5349240"/>
-            <a:ext cx="4572000" cy="777240"/>
-          </a:xfrm>
-          <a:prstGeom prst="rect">
-            <a:avLst/>
-          </a:prstGeom>
-          <a:noFill/>
-          <a:ln/>
-        </p:spPr>
-        <p:txBody>
-          <a:bodyPr wrap="square" lIns="0" tIns="0" rIns="0" bIns="0" rtlCol="0" anchor="ctr"/>
-          <a:lstStyle/>
-          <a:p>
-            <a:pPr indent="0" marL="0">
-              <a:buNone/>
-            </a:pPr>
-            <a:r>
-              <a:rPr lang="en-US" sz="1300" dirty="0">
-                <a:solidFill>
-                  <a:srgbClr val="FFFFFF"/>
-                </a:solidFill>
-                <a:latin typeface="Calibri" pitchFamily="34" charset="0"/>
-                <a:ea typeface="Calibri" pitchFamily="34" charset="-122"/>
-                <a:cs typeface="Calibri" pitchFamily="34" charset="-120"/>
-              </a:rPr>
-              <a:t>Fiches générées relisibles et versionnables : traçabilité complète.</a:t>
-            </a:r>
-            <a:endParaRPr lang="en-US" sz="1300" dirty="0"/>
-          </a:p>
-        </p:txBody>
-      </p:sp>
-      <p:sp>
-        <p:nvSpPr>
-          <p:cNvPr id="25" name="Shape 23"/>
+          <p:cNvPr id="18" name="Text 16"/>
+          <p:cNvSpPr txBox="1"/>
+          <p:nvPr/>
+        </p:nvSpPr>
+        <p:spPr>
+          <a:xfrm>
+            <a:off x="8458200" y="2606040"/>
+            <a:ext cx="3291840" cy="457200"/>
+          </a:xfrm>
+          <a:prstGeom prst="rect">
+            <a:avLst/>
+          </a:prstGeom>
+          <a:noFill/>
+          <a:ln/>
+        </p:spPr>
+        <p:txBody>
+          <a:bodyPr wrap="square" lIns="0" tIns="0" rIns="0" bIns="0" rtlCol="0" anchor="ctr"/>
+          <a:lstStyle/>
+          <a:p>
+            <a:pPr indent="0" marL="0">
+              <a:buNone/>
+            </a:pPr>
+            <a:r>
+              <a:rPr lang="en-US" sz="2000" b="1" dirty="0">
+                <a:solidFill>
+                  <a:srgbClr val="003876"/>
+                </a:solidFill>
+                <a:latin typeface="Cambria" pitchFamily="34" charset="0"/>
+                <a:ea typeface="Cambria" pitchFamily="34" charset="-122"/>
+                <a:cs typeface="Cambria" pitchFamily="34" charset="-120"/>
+              </a:rPr>
+              <a:t>Consolidation</a:t>
+            </a:r>
+            <a:endParaRPr lang="en-US" sz="2000" dirty="0"/>
+          </a:p>
+        </p:txBody>
+      </p:sp>
+      <p:sp>
+        <p:nvSpPr>
+          <p:cNvPr id="19" name="Text 17"/>
+          <p:cNvSpPr txBox="1"/>
+          <p:nvPr/>
+        </p:nvSpPr>
+        <p:spPr>
+          <a:xfrm>
+            <a:off x="8458200" y="3154680"/>
+            <a:ext cx="3291840" cy="1234440"/>
+          </a:xfrm>
+          <a:prstGeom prst="rect">
+            <a:avLst/>
+          </a:prstGeom>
+          <a:noFill/>
+          <a:ln/>
+        </p:spPr>
+        <p:txBody>
+          <a:bodyPr wrap="square" lIns="0" tIns="0" rIns="0" bIns="0" rtlCol="0" anchor="ctr"/>
+          <a:lstStyle/>
+          <a:p>
+            <a:pPr indent="0" marL="0">
+              <a:buNone/>
+            </a:pPr>
+            <a:r>
+              <a:rPr lang="en-US" sz="1200" dirty="0">
+                <a:solidFill>
+                  <a:srgbClr val="3A4552"/>
+                </a:solidFill>
+                <a:latin typeface="Calibri" pitchFamily="34" charset="0"/>
+                <a:ea typeface="Calibri" pitchFamily="34" charset="-122"/>
+                <a:cs typeface="Calibri" pitchFamily="34" charset="-120"/>
+              </a:rPr>
+              <a:t>Fusion des fiches en corpus thématique CICS/Java. Sortie : cheat-sheet transverse.</a:t>
+            </a:r>
+            <a:endParaRPr lang="en-US" sz="1200" dirty="0"/>
+          </a:p>
+        </p:txBody>
+      </p:sp>
+      <p:sp>
+        <p:nvSpPr>
+          <p:cNvPr id="20" name="Shape 18"/>
           <p:cNvSpPr/>
           <p:nvPr/>
         </p:nvSpPr>
         <p:spPr>
           <a:xfrm>
-            <a:off x="0" y="6629400"/>
-            <a:ext cx="12161520" cy="18288"/>
+            <a:off x="457200" y="4937760"/>
+            <a:ext cx="11247120" cy="1463040"/>
           </a:xfrm>
           <a:prstGeom prst="rect">
             <a:avLst/>
@@ -9475,7 +10856,183 @@
       </p:sp>
       <p:sp>
         <p:nvSpPr>
-          <p:cNvPr id="26" name="Text 24"/>
+          <p:cNvPr id="21" name="Text 19"/>
+          <p:cNvSpPr txBox="1"/>
+          <p:nvPr/>
+        </p:nvSpPr>
+        <p:spPr>
+          <a:xfrm>
+            <a:off x="731520" y="5074920"/>
+            <a:ext cx="10972800" cy="320040"/>
+          </a:xfrm>
+          <a:prstGeom prst="rect">
+            <a:avLst/>
+          </a:prstGeom>
+          <a:noFill/>
+          <a:ln/>
+        </p:spPr>
+        <p:txBody>
+          <a:bodyPr wrap="square" lIns="0" tIns="0" rIns="0" bIns="0" rtlCol="0" anchor="ctr"/>
+          <a:lstStyle/>
+          <a:p>
+            <a:pPr indent="0" marL="0">
+              <a:buNone/>
+            </a:pPr>
+            <a:r>
+              <a:rPr lang="en-US" sz="1100" b="1" spc="300" kern="0" dirty="0">
+                <a:solidFill>
+                  <a:srgbClr val="003876"/>
+                </a:solidFill>
+                <a:latin typeface="Calibri" pitchFamily="34" charset="0"/>
+                <a:ea typeface="Calibri" pitchFamily="34" charset="-122"/>
+                <a:cs typeface="Calibri" pitchFamily="34" charset="-120"/>
+              </a:rPr>
+              <a:t>SOURCES EXPLOITÉES POUR CE PARCOURS</a:t>
+            </a:r>
+            <a:endParaRPr lang="en-US" sz="1100" dirty="0"/>
+          </a:p>
+        </p:txBody>
+      </p:sp>
+      <p:sp>
+        <p:nvSpPr>
+          <p:cNvPr id="22" name="Text 20"/>
+          <p:cNvSpPr txBox="1"/>
+          <p:nvPr/>
+        </p:nvSpPr>
+        <p:spPr>
+          <a:xfrm>
+            <a:off x="731520" y="5440680"/>
+            <a:ext cx="5303520" cy="914400"/>
+          </a:xfrm>
+          <a:prstGeom prst="rect">
+            <a:avLst/>
+          </a:prstGeom>
+          <a:noFill/>
+          <a:ln/>
+        </p:spPr>
+        <p:txBody>
+          <a:bodyPr wrap="square" lIns="0" tIns="0" rIns="0" bIns="0" rtlCol="0" anchor="ctr"/>
+          <a:lstStyle/>
+          <a:p>
+            <a:pPr indent="0" marL="0">
+              <a:buNone/>
+            </a:pPr>
+            <a:r>
+              <a:rPr lang="en-US" sz="1200" dirty="0">
+                <a:solidFill>
+                  <a:srgbClr val="3A4552"/>
+                </a:solidFill>
+                <a:latin typeface="Calibri" pitchFamily="34" charset="0"/>
+                <a:ea typeface="Calibri" pitchFamily="34" charset="-122"/>
+                <a:cs typeface="Calibri" pitchFamily="34" charset="-120"/>
+              </a:rPr>
+              <a:t>Redbook IBM REDP-5628 — JVM CICS Performance</a:t>
+            </a:r>
+            <a:endParaRPr lang="en-US" sz="1200" dirty="0"/>
+          </a:p>
+          <a:p>
+            <a:pPr indent="0" marL="0">
+              <a:buNone/>
+            </a:pPr>
+            <a:r>
+              <a:rPr lang="en-US" sz="1200" dirty="0">
+                <a:solidFill>
+                  <a:srgbClr val="3A4552"/>
+                </a:solidFill>
+                <a:latin typeface="Calibri" pitchFamily="34" charset="0"/>
+                <a:ea typeface="Calibri" pitchFamily="34" charset="-122"/>
+                <a:cs typeface="Calibri" pitchFamily="34" charset="-120"/>
+              </a:rPr>
+              <a:t>Redbook « Java Application Development for CICS »</a:t>
+            </a:r>
+            <a:endParaRPr lang="en-US" sz="1200" dirty="0"/>
+          </a:p>
+        </p:txBody>
+      </p:sp>
+      <p:sp>
+        <p:nvSpPr>
+          <p:cNvPr id="23" name="Text 21"/>
+          <p:cNvSpPr txBox="1"/>
+          <p:nvPr/>
+        </p:nvSpPr>
+        <p:spPr>
+          <a:xfrm>
+            <a:off x="6217920" y="5440680"/>
+            <a:ext cx="5303520" cy="914400"/>
+          </a:xfrm>
+          <a:prstGeom prst="rect">
+            <a:avLst/>
+          </a:prstGeom>
+          <a:noFill/>
+          <a:ln/>
+        </p:spPr>
+        <p:txBody>
+          <a:bodyPr wrap="square" lIns="0" tIns="0" rIns="0" bIns="0" rtlCol="0" anchor="ctr"/>
+          <a:lstStyle/>
+          <a:p>
+            <a:pPr indent="0" marL="0">
+              <a:buNone/>
+            </a:pPr>
+            <a:r>
+              <a:rPr lang="en-US" sz="1200" dirty="0">
+                <a:solidFill>
+                  <a:srgbClr val="3A4552"/>
+                </a:solidFill>
+                <a:latin typeface="Calibri" pitchFamily="34" charset="0"/>
+                <a:ea typeface="Calibri" pitchFamily="34" charset="-122"/>
+                <a:cs typeface="Calibri" pitchFamily="34" charset="-120"/>
+              </a:rPr>
+              <a:t>Documentation officielle CICS TS (ibm.com/docs)</a:t>
+            </a:r>
+            <a:endParaRPr lang="en-US" sz="1200" dirty="0"/>
+          </a:p>
+          <a:p>
+            <a:pPr indent="0" marL="0">
+              <a:buNone/>
+            </a:pPr>
+            <a:r>
+              <a:rPr lang="en-US" sz="1200" dirty="0">
+                <a:solidFill>
+                  <a:srgbClr val="3A4552"/>
+                </a:solidFill>
+                <a:latin typeface="Calibri" pitchFamily="34" charset="0"/>
+                <a:ea typeface="Calibri" pitchFamily="34" charset="-122"/>
+                <a:cs typeface="Calibri" pitchFamily="34" charset="-120"/>
+              </a:rPr>
+              <a:t>IBM Developer learning paths (gratuits)</a:t>
+            </a:r>
+            <a:endParaRPr lang="en-US" sz="1200" dirty="0"/>
+          </a:p>
+        </p:txBody>
+      </p:sp>
+      <p:sp>
+        <p:nvSpPr>
+          <p:cNvPr id="24" name="Shape 22"/>
+          <p:cNvSpPr/>
+          <p:nvPr/>
+        </p:nvSpPr>
+        <p:spPr>
+          <a:xfrm>
+            <a:off x="0" y="6629400"/>
+            <a:ext cx="12161520" cy="18288"/>
+          </a:xfrm>
+          <a:prstGeom prst="rect">
+            <a:avLst/>
+          </a:prstGeom>
+          <a:solidFill>
+            <a:srgbClr val="E5E8EC"/>
+          </a:solidFill>
+          <a:ln w="12700">
+            <a:solidFill>
+              <a:srgbClr val="E5E8EC"/>
+            </a:solidFill>
+            <a:prstDash val="solid"/>
+          </a:ln>
+        </p:spPr>
+      </p:sp>
+      <p:sp>
+        <p:nvSpPr>
+          <p:cNvPr id="25" name="Text 23"/>
           <p:cNvSpPr txBox="1"/>
           <p:nvPr/>
         </p:nvSpPr>
@@ -9514,7 +11071,7 @@
       </p:sp>
       <p:sp>
         <p:nvSpPr>
-          <p:cNvPr id="27" name="Text 25"/>
+          <p:cNvPr id="26" name="Text 24"/>
           <p:cNvSpPr txBox="1"/>
           <p:nvPr/>
         </p:nvSpPr>
@@ -9545,7 +11102,7 @@
                 <a:ea typeface="Calibri" pitchFamily="34" charset="-122"/>
                 <a:cs typeface="Calibri" pitchFamily="34" charset="-120"/>
               </a:rPr>
-              <a:t>8 / 10</a:t>
+              <a:t>8 / 11</a:t>
             </a:r>
             <a:endParaRPr lang="en-US" sz="900" dirty="0"/>
           </a:p>
@@ -9617,7 +11174,7 @@
         <p:spPr>
           <a:xfrm>
             <a:off x="685800" y="457200"/>
-            <a:ext cx="5486400" cy="365760"/>
+            <a:ext cx="7315200" cy="365760"/>
           </a:xfrm>
           <a:prstGeom prst="rect">
             <a:avLst/>
@@ -9641,7 +11198,7 @@
                 <a:ea typeface="Calibri" pitchFamily="34" charset="-122"/>
                 <a:cs typeface="Calibri" pitchFamily="34" charset="-120"/>
               </a:rPr>
-              <a:t>08  ·  PASSAGE À L'ÉCHELLE</a:t>
+              <a:t>08  ·  GARDE-FOUS</a:t>
             </a:r>
             <a:endParaRPr lang="en-US" sz="1100" dirty="0"/>
           </a:p>
@@ -9680,7 +11237,7 @@
                 <a:ea typeface="Cambria" pitchFamily="34" charset="-122"/>
                 <a:cs typeface="Cambria" pitchFamily="34" charset="-120"/>
               </a:rPr>
-              <a:t>D'un usage individuel à un actif d'équipe</a:t>
+              <a:t>Limites assumées et conformité bancaire</a:t>
             </a:r>
             <a:endParaRPr lang="en-US" sz="3200" dirty="0"/>
           </a:p>
@@ -9688,22 +11245,61 @@
       </p:sp>
       <p:sp>
         <p:nvSpPr>
-          <p:cNvPr id="5" name="Shape 3"/>
+          <p:cNvPr id="5" name="Text 3"/>
+          <p:cNvSpPr txBox="1"/>
+          <p:nvPr/>
+        </p:nvSpPr>
+        <p:spPr>
+          <a:xfrm>
+            <a:off x="457200" y="1920240"/>
+            <a:ext cx="5486400" cy="320040"/>
+          </a:xfrm>
+          <a:prstGeom prst="rect">
+            <a:avLst/>
+          </a:prstGeom>
+          <a:noFill/>
+          <a:ln/>
+        </p:spPr>
+        <p:txBody>
+          <a:bodyPr wrap="square" lIns="0" tIns="0" rIns="0" bIns="0" rtlCol="0" anchor="ctr"/>
+          <a:lstStyle/>
+          <a:p>
+            <a:pPr indent="0" marL="0">
+              <a:buNone/>
+            </a:pPr>
+            <a:r>
+              <a:rPr lang="en-US" sz="1200" b="1" spc="300" kern="0" dirty="0">
+                <a:solidFill>
+                  <a:srgbClr val="F5B700"/>
+                </a:solidFill>
+                <a:latin typeface="Calibri" pitchFamily="34" charset="0"/>
+                <a:ea typeface="Calibri" pitchFamily="34" charset="-122"/>
+                <a:cs typeface="Calibri" pitchFamily="34" charset="-120"/>
+              </a:rPr>
+              <a:t>LIMITES DE LA MÉTHODE</a:t>
+            </a:r>
+            <a:endParaRPr lang="en-US" sz="1200" dirty="0"/>
+          </a:p>
+        </p:txBody>
+      </p:sp>
+      <p:sp>
+        <p:nvSpPr>
+          <p:cNvPr id="6" name="Shape 4"/>
           <p:cNvSpPr/>
           <p:nvPr/>
         </p:nvSpPr>
         <p:spPr>
           <a:xfrm>
-            <a:off x="457200" y="1965960"/>
-            <a:ext cx="3657600" cy="4297680"/>
+            <a:off x="457200" y="2377440"/>
+            <a:ext cx="73152" cy="201168"/>
           </a:xfrm>
           <a:prstGeom prst="rect">
             <a:avLst/>
           </a:prstGeom>
           <a:solidFill>
-            <a:srgbClr val="FFFFFF"/>
+            <a:srgbClr val="003876"/>
           </a:solidFill>
-          <a:ln w="25400">
+          <a:ln w="12700">
             <a:solidFill>
               <a:srgbClr val="003876"/>
             </a:solidFill>
@@ -9713,30 +11309,339 @@
       </p:sp>
       <p:sp>
         <p:nvSpPr>
-          <p:cNvPr id="6" name="Text 4"/>
-          <p:cNvSpPr txBox="1"/>
-          <p:nvPr/>
-        </p:nvSpPr>
-        <p:spPr>
-          <a:xfrm>
-            <a:off x="731520" y="2331720"/>
-            <a:ext cx="3108960" cy="365760"/>
-          </a:xfrm>
-          <a:prstGeom prst="rect">
-            <a:avLst/>
-          </a:prstGeom>
-          <a:noFill/>
-          <a:ln/>
-        </p:spPr>
-        <p:txBody>
-          <a:bodyPr wrap="square" lIns="0" tIns="0" rIns="0" bIns="0" rtlCol="0" anchor="ctr"/>
-          <a:lstStyle/>
-          <a:p>
-            <a:pPr indent="0" marL="0">
-              <a:buNone/>
-            </a:pPr>
-            <a:r>
-              <a:rPr lang="en-US" sz="1100" b="1" spc="400" kern="0" dirty="0">
+          <p:cNvPr id="7" name="Text 5"/>
+          <p:cNvSpPr txBox="1"/>
+          <p:nvPr/>
+        </p:nvSpPr>
+        <p:spPr>
+          <a:xfrm>
+            <a:off x="640080" y="2331720"/>
+            <a:ext cx="5303520" cy="274320"/>
+          </a:xfrm>
+          <a:prstGeom prst="rect">
+            <a:avLst/>
+          </a:prstGeom>
+          <a:noFill/>
+          <a:ln/>
+        </p:spPr>
+        <p:txBody>
+          <a:bodyPr wrap="square" lIns="0" tIns="0" rIns="0" bIns="0" rtlCol="0" anchor="ctr"/>
+          <a:lstStyle/>
+          <a:p>
+            <a:pPr indent="0" marL="0">
+              <a:buNone/>
+            </a:pPr>
+            <a:r>
+              <a:rPr lang="en-US" sz="1300" b="1" dirty="0">
+                <a:solidFill>
+                  <a:srgbClr val="1A1F2B"/>
+                </a:solidFill>
+                <a:latin typeface="Calibri" pitchFamily="34" charset="0"/>
+                <a:ea typeface="Calibri" pitchFamily="34" charset="-122"/>
+                <a:cs typeface="Calibri" pitchFamily="34" charset="-120"/>
+              </a:rPr>
+              <a:t>Ne remplace pas la pratique</a:t>
+            </a:r>
+            <a:endParaRPr lang="en-US" sz="1300" dirty="0"/>
+          </a:p>
+        </p:txBody>
+      </p:sp>
+      <p:sp>
+        <p:nvSpPr>
+          <p:cNvPr id="8" name="Text 6"/>
+          <p:cNvSpPr txBox="1"/>
+          <p:nvPr/>
+        </p:nvSpPr>
+        <p:spPr>
+          <a:xfrm>
+            <a:off x="640080" y="2606040"/>
+            <a:ext cx="5303520" cy="822960"/>
+          </a:xfrm>
+          <a:prstGeom prst="rect">
+            <a:avLst/>
+          </a:prstGeom>
+          <a:noFill/>
+          <a:ln/>
+        </p:spPr>
+        <p:txBody>
+          <a:bodyPr wrap="square" lIns="0" tIns="0" rIns="0" bIns="0" rtlCol="0" anchor="ctr"/>
+          <a:lstStyle/>
+          <a:p>
+            <a:pPr indent="0" marL="0">
+              <a:buNone/>
+            </a:pPr>
+            <a:r>
+              <a:rPr lang="en-US" sz="1200" dirty="0">
+                <a:solidFill>
+                  <a:srgbClr val="3A4552"/>
+                </a:solidFill>
+                <a:latin typeface="Calibri" pitchFamily="34" charset="0"/>
+                <a:ea typeface="Calibri" pitchFamily="34" charset="-122"/>
+                <a:cs typeface="Calibri" pitchFamily="34" charset="-120"/>
+              </a:rPr>
+              <a:t>La fiche donne le socle ; le lab, le code, le POC restent indispensables.</a:t>
+            </a:r>
+            <a:endParaRPr lang="en-US" sz="1200" dirty="0"/>
+          </a:p>
+        </p:txBody>
+      </p:sp>
+      <p:sp>
+        <p:nvSpPr>
+          <p:cNvPr id="9" name="Shape 7"/>
+          <p:cNvSpPr/>
+          <p:nvPr/>
+        </p:nvSpPr>
+        <p:spPr>
+          <a:xfrm>
+            <a:off x="457200" y="3566160"/>
+            <a:ext cx="73152" cy="201168"/>
+          </a:xfrm>
+          <a:prstGeom prst="rect">
+            <a:avLst/>
+          </a:prstGeom>
+          <a:solidFill>
+            <a:srgbClr val="003876"/>
+          </a:solidFill>
+          <a:ln w="12700">
+            <a:solidFill>
+              <a:srgbClr val="003876"/>
+            </a:solidFill>
+            <a:prstDash val="solid"/>
+          </a:ln>
+        </p:spPr>
+      </p:sp>
+      <p:sp>
+        <p:nvSpPr>
+          <p:cNvPr id="10" name="Text 8"/>
+          <p:cNvSpPr txBox="1"/>
+          <p:nvPr/>
+        </p:nvSpPr>
+        <p:spPr>
+          <a:xfrm>
+            <a:off x="640080" y="3520440"/>
+            <a:ext cx="5303520" cy="274320"/>
+          </a:xfrm>
+          <a:prstGeom prst="rect">
+            <a:avLst/>
+          </a:prstGeom>
+          <a:noFill/>
+          <a:ln/>
+        </p:spPr>
+        <p:txBody>
+          <a:bodyPr wrap="square" lIns="0" tIns="0" rIns="0" bIns="0" rtlCol="0" anchor="ctr"/>
+          <a:lstStyle/>
+          <a:p>
+            <a:pPr indent="0" marL="0">
+              <a:buNone/>
+            </a:pPr>
+            <a:r>
+              <a:rPr lang="en-US" sz="1300" b="1" dirty="0">
+                <a:solidFill>
+                  <a:srgbClr val="1A1F2B"/>
+                </a:solidFill>
+                <a:latin typeface="Calibri" pitchFamily="34" charset="0"/>
+                <a:ea typeface="Calibri" pitchFamily="34" charset="-122"/>
+                <a:cs typeface="Calibri" pitchFamily="34" charset="-120"/>
+              </a:rPr>
+              <a:t>Risque d'hallucination résiduel</a:t>
+            </a:r>
+            <a:endParaRPr lang="en-US" sz="1300" dirty="0"/>
+          </a:p>
+        </p:txBody>
+      </p:sp>
+      <p:sp>
+        <p:nvSpPr>
+          <p:cNvPr id="11" name="Text 9"/>
+          <p:cNvSpPr txBox="1"/>
+          <p:nvPr/>
+        </p:nvSpPr>
+        <p:spPr>
+          <a:xfrm>
+            <a:off x="640080" y="3794760"/>
+            <a:ext cx="5303520" cy="822960"/>
+          </a:xfrm>
+          <a:prstGeom prst="rect">
+            <a:avLst/>
+          </a:prstGeom>
+          <a:noFill/>
+          <a:ln/>
+        </p:spPr>
+        <p:txBody>
+          <a:bodyPr wrap="square" lIns="0" tIns="0" rIns="0" bIns="0" rtlCol="0" anchor="ctr"/>
+          <a:lstStyle/>
+          <a:p>
+            <a:pPr indent="0" marL="0">
+              <a:buNone/>
+            </a:pPr>
+            <a:r>
+              <a:rPr lang="en-US" sz="1200" dirty="0">
+                <a:solidFill>
+                  <a:srgbClr val="3A4552"/>
+                </a:solidFill>
+                <a:latin typeface="Calibri" pitchFamily="34" charset="0"/>
+                <a:ea typeface="Calibri" pitchFamily="34" charset="-122"/>
+                <a:cs typeface="Calibri" pitchFamily="34" charset="-120"/>
+              </a:rPr>
+              <a:t>Vérification systématique des noms d'API, codes retour, paramètres exacts.</a:t>
+            </a:r>
+            <a:endParaRPr lang="en-US" sz="1200" dirty="0"/>
+          </a:p>
+        </p:txBody>
+      </p:sp>
+      <p:sp>
+        <p:nvSpPr>
+          <p:cNvPr id="12" name="Shape 10"/>
+          <p:cNvSpPr/>
+          <p:nvPr/>
+        </p:nvSpPr>
+        <p:spPr>
+          <a:xfrm>
+            <a:off x="457200" y="4754880"/>
+            <a:ext cx="73152" cy="201168"/>
+          </a:xfrm>
+          <a:prstGeom prst="rect">
+            <a:avLst/>
+          </a:prstGeom>
+          <a:solidFill>
+            <a:srgbClr val="003876"/>
+          </a:solidFill>
+          <a:ln w="12700">
+            <a:solidFill>
+              <a:srgbClr val="003876"/>
+            </a:solidFill>
+            <a:prstDash val="solid"/>
+          </a:ln>
+        </p:spPr>
+      </p:sp>
+      <p:sp>
+        <p:nvSpPr>
+          <p:cNvPr id="13" name="Text 11"/>
+          <p:cNvSpPr txBox="1"/>
+          <p:nvPr/>
+        </p:nvSpPr>
+        <p:spPr>
+          <a:xfrm>
+            <a:off x="640080" y="4709160"/>
+            <a:ext cx="5303520" cy="274320"/>
+          </a:xfrm>
+          <a:prstGeom prst="rect">
+            <a:avLst/>
+          </a:prstGeom>
+          <a:noFill/>
+          <a:ln/>
+        </p:spPr>
+        <p:txBody>
+          <a:bodyPr wrap="square" lIns="0" tIns="0" rIns="0" bIns="0" rtlCol="0" anchor="ctr"/>
+          <a:lstStyle/>
+          <a:p>
+            <a:pPr indent="0" marL="0">
+              <a:buNone/>
+            </a:pPr>
+            <a:r>
+              <a:rPr lang="en-US" sz="1300" b="1" dirty="0">
+                <a:solidFill>
+                  <a:srgbClr val="1A1F2B"/>
+                </a:solidFill>
+                <a:latin typeface="Calibri" pitchFamily="34" charset="0"/>
+                <a:ea typeface="Calibri" pitchFamily="34" charset="-122"/>
+                <a:cs typeface="Calibri" pitchFamily="34" charset="-120"/>
+              </a:rPr>
+              <a:t>Qualité corrélée au prompt</a:t>
+            </a:r>
+            <a:endParaRPr lang="en-US" sz="1300" dirty="0"/>
+          </a:p>
+        </p:txBody>
+      </p:sp>
+      <p:sp>
+        <p:nvSpPr>
+          <p:cNvPr id="14" name="Text 12"/>
+          <p:cNvSpPr txBox="1"/>
+          <p:nvPr/>
+        </p:nvSpPr>
+        <p:spPr>
+          <a:xfrm>
+            <a:off x="640080" y="4983480"/>
+            <a:ext cx="5303520" cy="822960"/>
+          </a:xfrm>
+          <a:prstGeom prst="rect">
+            <a:avLst/>
+          </a:prstGeom>
+          <a:noFill/>
+          <a:ln/>
+        </p:spPr>
+        <p:txBody>
+          <a:bodyPr wrap="square" lIns="0" tIns="0" rIns="0" bIns="0" rtlCol="0" anchor="ctr"/>
+          <a:lstStyle/>
+          <a:p>
+            <a:pPr indent="0" marL="0">
+              <a:buNone/>
+            </a:pPr>
+            <a:r>
+              <a:rPr lang="en-US" sz="1200" dirty="0">
+                <a:solidFill>
+                  <a:srgbClr val="3A4552"/>
+                </a:solidFill>
+                <a:latin typeface="Calibri" pitchFamily="34" charset="0"/>
+                <a:ea typeface="Calibri" pitchFamily="34" charset="-122"/>
+                <a:cs typeface="Calibri" pitchFamily="34" charset="-120"/>
+              </a:rPr>
+              <a:t>Un prompt faible produit une fiche faible. C'est un savoir-faire à construire.</a:t>
+            </a:r>
+            <a:endParaRPr lang="en-US" sz="1200" dirty="0"/>
+          </a:p>
+        </p:txBody>
+      </p:sp>
+      <p:sp>
+        <p:nvSpPr>
+          <p:cNvPr id="15" name="Shape 13"/>
+          <p:cNvSpPr/>
+          <p:nvPr/>
+        </p:nvSpPr>
+        <p:spPr>
+          <a:xfrm>
+            <a:off x="6400800" y="1920240"/>
+            <a:ext cx="5303520" cy="4480560"/>
+          </a:xfrm>
+          <a:prstGeom prst="rect">
+            <a:avLst/>
+          </a:prstGeom>
+          <a:solidFill>
+            <a:srgbClr val="003876"/>
+          </a:solidFill>
+          <a:ln w="12700">
+            <a:solidFill>
+              <a:srgbClr val="003876"/>
+            </a:solidFill>
+            <a:prstDash val="solid"/>
+          </a:ln>
+        </p:spPr>
+      </p:sp>
+      <p:sp>
+        <p:nvSpPr>
+          <p:cNvPr id="16" name="Text 14"/>
+          <p:cNvSpPr txBox="1"/>
+          <p:nvPr/>
+        </p:nvSpPr>
+        <p:spPr>
+          <a:xfrm>
+            <a:off x="6675120" y="2103120"/>
+            <a:ext cx="4937760" cy="320040"/>
+          </a:xfrm>
+          <a:prstGeom prst="rect">
+            <a:avLst/>
+          </a:prstGeom>
+          <a:noFill/>
+          <a:ln/>
+        </p:spPr>
+        <p:txBody>
+          <a:bodyPr wrap="square" lIns="0" tIns="0" rIns="0" bIns="0" rtlCol="0" anchor="ctr"/>
+          <a:lstStyle/>
+          <a:p>
+            <a:pPr indent="0" marL="0">
+              <a:buNone/>
+            </a:pPr>
+            <a:r>
+              <a:rPr lang="en-US" sz="1200" b="1" spc="300" kern="0" dirty="0">
                 <a:solidFill>
                   <a:srgbClr val="F5B700"/>
                 </a:solidFill>
@@ -9744,24 +11649,24 @@
                 <a:ea typeface="Calibri" pitchFamily="34" charset="-122"/>
                 <a:cs typeface="Calibri" pitchFamily="34" charset="-120"/>
               </a:rPr>
-              <a:t>BIBLIOTHÈQUE</a:t>
-            </a:r>
-            <a:endParaRPr lang="en-US" sz="1100" dirty="0"/>
-          </a:p>
-        </p:txBody>
-      </p:sp>
-      <p:sp>
-        <p:nvSpPr>
-          <p:cNvPr id="7" name="Shape 5"/>
+              <a:t>CONFORMITÉ &amp; SÉCURITÉ</a:t>
+            </a:r>
+            <a:endParaRPr lang="en-US" sz="1200" dirty="0"/>
+          </a:p>
+        </p:txBody>
+      </p:sp>
+      <p:sp>
+        <p:nvSpPr>
+          <p:cNvPr id="17" name="Shape 15"/>
           <p:cNvSpPr/>
           <p:nvPr/>
         </p:nvSpPr>
         <p:spPr>
           <a:xfrm>
-            <a:off x="731520" y="2743200"/>
-            <a:ext cx="457200" cy="45720"/>
-          </a:xfrm>
-          <a:prstGeom prst="rect">
+            <a:off x="6675120" y="2715768"/>
+            <a:ext cx="137160" cy="137160"/>
+          </a:xfrm>
+          <a:prstGeom prst="ellipse">
             <a:avLst/>
           </a:prstGeom>
           <a:solidFill>
@@ -9777,53 +11682,14 @@
       </p:sp>
       <p:sp>
         <p:nvSpPr>
-          <p:cNvPr id="8" name="Text 6"/>
-          <p:cNvSpPr txBox="1"/>
-          <p:nvPr/>
-        </p:nvSpPr>
-        <p:spPr>
-          <a:xfrm>
-            <a:off x="731520" y="2880360"/>
-            <a:ext cx="3108960" cy="822960"/>
-          </a:xfrm>
-          <a:prstGeom prst="rect">
-            <a:avLst/>
-          </a:prstGeom>
-          <a:noFill/>
-          <a:ln/>
-        </p:spPr>
-        <p:txBody>
-          <a:bodyPr wrap="square" lIns="0" tIns="0" rIns="0" bIns="0" rtlCol="0" anchor="ctr"/>
-          <a:lstStyle/>
-          <a:p>
-            <a:pPr indent="0" marL="0">
-              <a:buNone/>
-            </a:pPr>
-            <a:r>
-              <a:rPr lang="en-US" sz="2200" b="1" dirty="0">
-                <a:solidFill>
-                  <a:srgbClr val="003876"/>
-                </a:solidFill>
-                <a:latin typeface="Cambria" pitchFamily="34" charset="0"/>
-                <a:ea typeface="Cambria" pitchFamily="34" charset="-122"/>
-                <a:cs typeface="Cambria" pitchFamily="34" charset="-120"/>
-              </a:rPr>
-              <a:t>Prompts partagés</a:t>
-            </a:r>
-            <a:endParaRPr lang="en-US" sz="2200" dirty="0"/>
-          </a:p>
-        </p:txBody>
-      </p:sp>
-      <p:sp>
-        <p:nvSpPr>
-          <p:cNvPr id="9" name="Text 7"/>
-          <p:cNvSpPr txBox="1"/>
-          <p:nvPr/>
-        </p:nvSpPr>
-        <p:spPr>
-          <a:xfrm>
-            <a:off x="731520" y="3977640"/>
-            <a:ext cx="3108960" cy="2103120"/>
+          <p:cNvPr id="18" name="Text 16"/>
+          <p:cNvSpPr txBox="1"/>
+          <p:nvPr/>
+        </p:nvSpPr>
+        <p:spPr>
+          <a:xfrm>
+            <a:off x="6949440" y="2606040"/>
+            <a:ext cx="4572000" cy="777240"/>
           </a:xfrm>
           <a:prstGeom prst="rect">
             <a:avLst/>
@@ -9841,13 +11707,13 @@
             <a:r>
               <a:rPr lang="en-US" sz="1300" dirty="0">
                 <a:solidFill>
-                  <a:srgbClr val="3A4552"/>
-                </a:solidFill>
-                <a:latin typeface="Calibri" pitchFamily="34" charset="0"/>
-                <a:ea typeface="Calibri" pitchFamily="34" charset="-122"/>
-                <a:cs typeface="Calibri" pitchFamily="34" charset="-120"/>
-              </a:rPr>
-              <a:t>Catalogue de prompts optimisés par domaine — CICS, Kafka, Spring Boot, VOP, SEPA. Réutilisables, améliorables collectivement.</a:t>
+                  <a:srgbClr val="FFFFFF"/>
+                </a:solidFill>
+                <a:latin typeface="Calibri" pitchFamily="34" charset="0"/>
+                <a:ea typeface="Calibri" pitchFamily="34" charset="-122"/>
+                <a:cs typeface="Calibri" pitchFamily="34" charset="-120"/>
+              </a:rPr>
+              <a:t>Aucune donnée client, code source LCL ou information confidentielle transmise à l'IA.</a:t>
             </a:r>
             <a:endParaRPr lang="en-US" sz="1300" dirty="0"/>
           </a:p>
@@ -9855,80 +11721,16 @@
       </p:sp>
       <p:sp>
         <p:nvSpPr>
-          <p:cNvPr id="10" name="Shape 8"/>
+          <p:cNvPr id="19" name="Shape 17"/>
           <p:cNvSpPr/>
           <p:nvPr/>
         </p:nvSpPr>
         <p:spPr>
           <a:xfrm>
-            <a:off x="4361688" y="1965960"/>
-            <a:ext cx="3657600" cy="4297680"/>
-          </a:xfrm>
-          <a:prstGeom prst="rect">
-            <a:avLst/>
-          </a:prstGeom>
-          <a:solidFill>
-            <a:srgbClr val="FFFFFF"/>
-          </a:solidFill>
-          <a:ln w="25400">
-            <a:solidFill>
-              <a:srgbClr val="003876"/>
-            </a:solidFill>
-            <a:prstDash val="solid"/>
-          </a:ln>
-        </p:spPr>
-      </p:sp>
-      <p:sp>
-        <p:nvSpPr>
-          <p:cNvPr id="11" name="Text 9"/>
-          <p:cNvSpPr txBox="1"/>
-          <p:nvPr/>
-        </p:nvSpPr>
-        <p:spPr>
-          <a:xfrm>
-            <a:off x="4636008" y="2331720"/>
-            <a:ext cx="3108960" cy="365760"/>
-          </a:xfrm>
-          <a:prstGeom prst="rect">
-            <a:avLst/>
-          </a:prstGeom>
-          <a:noFill/>
-          <a:ln/>
-        </p:spPr>
-        <p:txBody>
-          <a:bodyPr wrap="square" lIns="0" tIns="0" rIns="0" bIns="0" rtlCol="0" anchor="ctr"/>
-          <a:lstStyle/>
-          <a:p>
-            <a:pPr indent="0" marL="0">
-              <a:buNone/>
-            </a:pPr>
-            <a:r>
-              <a:rPr lang="en-US" sz="1100" b="1" spc="400" kern="0" dirty="0">
-                <a:solidFill>
-                  <a:srgbClr val="F5B700"/>
-                </a:solidFill>
-                <a:latin typeface="Calibri" pitchFamily="34" charset="0"/>
-                <a:ea typeface="Calibri" pitchFamily="34" charset="-122"/>
-                <a:cs typeface="Calibri" pitchFamily="34" charset="-120"/>
-              </a:rPr>
-              <a:t>CORPUS</a:t>
-            </a:r>
-            <a:endParaRPr lang="en-US" sz="1100" dirty="0"/>
-          </a:p>
-        </p:txBody>
-      </p:sp>
-      <p:sp>
-        <p:nvSpPr>
-          <p:cNvPr id="12" name="Shape 10"/>
-          <p:cNvSpPr/>
-          <p:nvPr/>
-        </p:nvSpPr>
-        <p:spPr>
-          <a:xfrm>
-            <a:off x="4636008" y="2743200"/>
-            <a:ext cx="457200" cy="45720"/>
-          </a:xfrm>
-          <a:prstGeom prst="rect">
+            <a:off x="6675120" y="3630168"/>
+            <a:ext cx="137160" cy="137160"/>
+          </a:xfrm>
+          <a:prstGeom prst="ellipse">
             <a:avLst/>
           </a:prstGeom>
           <a:solidFill>
@@ -9944,53 +11746,14 @@
       </p:sp>
       <p:sp>
         <p:nvSpPr>
-          <p:cNvPr id="13" name="Text 11"/>
-          <p:cNvSpPr txBox="1"/>
-          <p:nvPr/>
-        </p:nvSpPr>
-        <p:spPr>
-          <a:xfrm>
-            <a:off x="4636008" y="2880360"/>
-            <a:ext cx="3108960" cy="822960"/>
-          </a:xfrm>
-          <a:prstGeom prst="rect">
-            <a:avLst/>
-          </a:prstGeom>
-          <a:noFill/>
-          <a:ln/>
-        </p:spPr>
-        <p:txBody>
-          <a:bodyPr wrap="square" lIns="0" tIns="0" rIns="0" bIns="0" rtlCol="0" anchor="ctr"/>
-          <a:lstStyle/>
-          <a:p>
-            <a:pPr indent="0" marL="0">
-              <a:buNone/>
-            </a:pPr>
-            <a:r>
-              <a:rPr lang="en-US" sz="2200" b="1" dirty="0">
-                <a:solidFill>
-                  <a:srgbClr val="003876"/>
-                </a:solidFill>
-                <a:latin typeface="Cambria" pitchFamily="34" charset="0"/>
-                <a:ea typeface="Cambria" pitchFamily="34" charset="-122"/>
-                <a:cs typeface="Cambria" pitchFamily="34" charset="-120"/>
-              </a:rPr>
-              <a:t>Fiches versionnées</a:t>
-            </a:r>
-            <a:endParaRPr lang="en-US" sz="2200" dirty="0"/>
-          </a:p>
-        </p:txBody>
-      </p:sp>
-      <p:sp>
-        <p:nvSpPr>
-          <p:cNvPr id="14" name="Text 12"/>
-          <p:cNvSpPr txBox="1"/>
-          <p:nvPr/>
-        </p:nvSpPr>
-        <p:spPr>
-          <a:xfrm>
-            <a:off x="4636008" y="3977640"/>
-            <a:ext cx="3108960" cy="2103120"/>
+          <p:cNvPr id="20" name="Text 18"/>
+          <p:cNvSpPr txBox="1"/>
+          <p:nvPr/>
+        </p:nvSpPr>
+        <p:spPr>
+          <a:xfrm>
+            <a:off x="6949440" y="3520440"/>
+            <a:ext cx="4572000" cy="777240"/>
           </a:xfrm>
           <a:prstGeom prst="rect">
             <a:avLst/>
@@ -10008,13 +11771,13 @@
             <a:r>
               <a:rPr lang="en-US" sz="1300" dirty="0">
                 <a:solidFill>
-                  <a:srgbClr val="3A4552"/>
-                </a:solidFill>
-                <a:latin typeface="Calibri" pitchFamily="34" charset="0"/>
-                <a:ea typeface="Calibri" pitchFamily="34" charset="-122"/>
-                <a:cs typeface="Calibri" pitchFamily="34" charset="-120"/>
-              </a:rPr>
-              <a:t>Repository Git interne de fiches Markdown. Recherche transverse, mise à jour continue, capitalisation entre équipes.</a:t>
+                  <a:srgbClr val="FFFFFF"/>
+                </a:solidFill>
+                <a:latin typeface="Calibri" pitchFamily="34" charset="0"/>
+                <a:ea typeface="Calibri" pitchFamily="34" charset="-122"/>
+                <a:cs typeface="Calibri" pitchFamily="34" charset="-120"/>
+              </a:rPr>
+              <a:t>Sources traitées exclusivement publiques (Redbooks, doc IBM, formations éditeur générales).</a:t>
             </a:r>
             <a:endParaRPr lang="en-US" sz="1300" dirty="0"/>
           </a:p>
@@ -10022,80 +11785,16 @@
       </p:sp>
       <p:sp>
         <p:nvSpPr>
-          <p:cNvPr id="15" name="Shape 13"/>
+          <p:cNvPr id="21" name="Shape 19"/>
           <p:cNvSpPr/>
           <p:nvPr/>
         </p:nvSpPr>
         <p:spPr>
           <a:xfrm>
-            <a:off x="8275320" y="1965960"/>
-            <a:ext cx="3657600" cy="4297680"/>
-          </a:xfrm>
-          <a:prstGeom prst="rect">
-            <a:avLst/>
-          </a:prstGeom>
-          <a:solidFill>
-            <a:srgbClr val="FFFFFF"/>
-          </a:solidFill>
-          <a:ln w="25400">
-            <a:solidFill>
-              <a:srgbClr val="003876"/>
-            </a:solidFill>
-            <a:prstDash val="solid"/>
-          </a:ln>
-        </p:spPr>
-      </p:sp>
-      <p:sp>
-        <p:nvSpPr>
-          <p:cNvPr id="16" name="Text 14"/>
-          <p:cNvSpPr txBox="1"/>
-          <p:nvPr/>
-        </p:nvSpPr>
-        <p:spPr>
-          <a:xfrm>
-            <a:off x="8549640" y="2331720"/>
-            <a:ext cx="3108960" cy="365760"/>
-          </a:xfrm>
-          <a:prstGeom prst="rect">
-            <a:avLst/>
-          </a:prstGeom>
-          <a:noFill/>
-          <a:ln/>
-        </p:spPr>
-        <p:txBody>
-          <a:bodyPr wrap="square" lIns="0" tIns="0" rIns="0" bIns="0" rtlCol="0" anchor="ctr"/>
-          <a:lstStyle/>
-          <a:p>
-            <a:pPr indent="0" marL="0">
-              <a:buNone/>
-            </a:pPr>
-            <a:r>
-              <a:rPr lang="en-US" sz="1100" b="1" spc="400" kern="0" dirty="0">
-                <a:solidFill>
-                  <a:srgbClr val="F5B700"/>
-                </a:solidFill>
-                <a:latin typeface="Calibri" pitchFamily="34" charset="0"/>
-                <a:ea typeface="Calibri" pitchFamily="34" charset="-122"/>
-                <a:cs typeface="Calibri" pitchFamily="34" charset="-120"/>
-              </a:rPr>
-              <a:t>ONBOARDING</a:t>
-            </a:r>
-            <a:endParaRPr lang="en-US" sz="1100" dirty="0"/>
-          </a:p>
-        </p:txBody>
-      </p:sp>
-      <p:sp>
-        <p:nvSpPr>
-          <p:cNvPr id="17" name="Shape 15"/>
-          <p:cNvSpPr/>
-          <p:nvPr/>
-        </p:nvSpPr>
-        <p:spPr>
-          <a:xfrm>
-            <a:off x="8549640" y="2743200"/>
-            <a:ext cx="457200" cy="45720"/>
-          </a:xfrm>
-          <a:prstGeom prst="rect">
+            <a:off x="6675120" y="4544568"/>
+            <a:ext cx="137160" cy="137160"/>
+          </a:xfrm>
+          <a:prstGeom prst="ellipse">
             <a:avLst/>
           </a:prstGeom>
           <a:solidFill>
@@ -10111,53 +11810,14 @@
       </p:sp>
       <p:sp>
         <p:nvSpPr>
-          <p:cNvPr id="18" name="Text 16"/>
-          <p:cNvSpPr txBox="1"/>
-          <p:nvPr/>
-        </p:nvSpPr>
-        <p:spPr>
-          <a:xfrm>
-            <a:off x="8549640" y="2880360"/>
-            <a:ext cx="3108960" cy="822960"/>
-          </a:xfrm>
-          <a:prstGeom prst="rect">
-            <a:avLst/>
-          </a:prstGeom>
-          <a:noFill/>
-          <a:ln/>
-        </p:spPr>
-        <p:txBody>
-          <a:bodyPr wrap="square" lIns="0" tIns="0" rIns="0" bIns="0" rtlCol="0" anchor="ctr"/>
-          <a:lstStyle/>
-          <a:p>
-            <a:pPr indent="0" marL="0">
-              <a:buNone/>
-            </a:pPr>
-            <a:r>
-              <a:rPr lang="en-US" sz="2200" b="1" dirty="0">
-                <a:solidFill>
-                  <a:srgbClr val="003876"/>
-                </a:solidFill>
-                <a:latin typeface="Cambria" pitchFamily="34" charset="0"/>
-                <a:ea typeface="Cambria" pitchFamily="34" charset="-122"/>
-                <a:cs typeface="Cambria" pitchFamily="34" charset="-120"/>
-              </a:rPr>
-              <a:t>Accélération nouveaux</a:t>
-            </a:r>
-            <a:endParaRPr lang="en-US" sz="2200" dirty="0"/>
-          </a:p>
-        </p:txBody>
-      </p:sp>
-      <p:sp>
-        <p:nvSpPr>
-          <p:cNvPr id="19" name="Text 17"/>
-          <p:cNvSpPr txBox="1"/>
-          <p:nvPr/>
-        </p:nvSpPr>
-        <p:spPr>
-          <a:xfrm>
-            <a:off x="8549640" y="3977640"/>
-            <a:ext cx="3108960" cy="2103120"/>
+          <p:cNvPr id="22" name="Text 20"/>
+          <p:cNvSpPr txBox="1"/>
+          <p:nvPr/>
+        </p:nvSpPr>
+        <p:spPr>
+          <a:xfrm>
+            <a:off x="6949440" y="4434840"/>
+            <a:ext cx="4572000" cy="777240"/>
           </a:xfrm>
           <a:prstGeom prst="rect">
             <a:avLst/>
@@ -10175,13 +11835,13 @@
             <a:r>
               <a:rPr lang="en-US" sz="1300" dirty="0">
                 <a:solidFill>
-                  <a:srgbClr val="3A4552"/>
-                </a:solidFill>
-                <a:latin typeface="Calibri" pitchFamily="34" charset="0"/>
-                <a:ea typeface="Calibri" pitchFamily="34" charset="-122"/>
-                <a:cs typeface="Calibri" pitchFamily="34" charset="-120"/>
-              </a:rPr>
-              <a:t>Un nouvel arrivant accède au corpus dès le premier jour. Réduction significative du délai de montée en compétence.</a:t>
+                  <a:srgbClr val="FFFFFF"/>
+                </a:solidFill>
+                <a:latin typeface="Calibri" pitchFamily="34" charset="0"/>
+                <a:ea typeface="Calibri" pitchFamily="34" charset="-122"/>
+                <a:cs typeface="Calibri" pitchFamily="34" charset="-120"/>
+              </a:rPr>
+              <a:t>Alignement à valider avec la politique IA du groupe et la sécurité SI.</a:t>
             </a:r>
             <a:endParaRPr lang="en-US" sz="1300" dirty="0"/>
           </a:p>
@@ -10189,7 +11849,71 @@
       </p:sp>
       <p:sp>
         <p:nvSpPr>
-          <p:cNvPr id="20" name="Shape 18"/>
+          <p:cNvPr id="23" name="Shape 21"/>
+          <p:cNvSpPr/>
+          <p:nvPr/>
+        </p:nvSpPr>
+        <p:spPr>
+          <a:xfrm>
+            <a:off x="6675120" y="5458968"/>
+            <a:ext cx="137160" cy="137160"/>
+          </a:xfrm>
+          <a:prstGeom prst="ellipse">
+            <a:avLst/>
+          </a:prstGeom>
+          <a:solidFill>
+            <a:srgbClr val="F5B700"/>
+          </a:solidFill>
+          <a:ln w="12700">
+            <a:solidFill>
+              <a:srgbClr val="F5B700"/>
+            </a:solidFill>
+            <a:prstDash val="solid"/>
+          </a:ln>
+        </p:spPr>
+      </p:sp>
+      <p:sp>
+        <p:nvSpPr>
+          <p:cNvPr id="24" name="Text 22"/>
+          <p:cNvSpPr txBox="1"/>
+          <p:nvPr/>
+        </p:nvSpPr>
+        <p:spPr>
+          <a:xfrm>
+            <a:off x="6949440" y="5349240"/>
+            <a:ext cx="4572000" cy="777240"/>
+          </a:xfrm>
+          <a:prstGeom prst="rect">
+            <a:avLst/>
+          </a:prstGeom>
+          <a:noFill/>
+          <a:ln/>
+        </p:spPr>
+        <p:txBody>
+          <a:bodyPr wrap="square" lIns="0" tIns="0" rIns="0" bIns="0" rtlCol="0" anchor="ctr"/>
+          <a:lstStyle/>
+          <a:p>
+            <a:pPr indent="0" marL="0">
+              <a:buNone/>
+            </a:pPr>
+            <a:r>
+              <a:rPr lang="en-US" sz="1300" dirty="0">
+                <a:solidFill>
+                  <a:srgbClr val="FFFFFF"/>
+                </a:solidFill>
+                <a:latin typeface="Calibri" pitchFamily="34" charset="0"/>
+                <a:ea typeface="Calibri" pitchFamily="34" charset="-122"/>
+                <a:cs typeface="Calibri" pitchFamily="34" charset="-120"/>
+              </a:rPr>
+              <a:t>Fiches générées relisibles et versionnables : traçabilité complète.</a:t>
+            </a:r>
+            <a:endParaRPr lang="en-US" sz="1300" dirty="0"/>
+          </a:p>
+        </p:txBody>
+      </p:sp>
+      <p:sp>
+        <p:nvSpPr>
+          <p:cNvPr id="25" name="Shape 23"/>
           <p:cNvSpPr/>
           <p:nvPr/>
         </p:nvSpPr>
@@ -10214,7 +11938,7 @@
       </p:sp>
       <p:sp>
         <p:nvSpPr>
-          <p:cNvPr id="21" name="Text 19"/>
+          <p:cNvPr id="26" name="Text 24"/>
           <p:cNvSpPr txBox="1"/>
           <p:nvPr/>
         </p:nvSpPr>
@@ -10253,7 +11977,7 @@
       </p:sp>
       <p:sp>
         <p:nvSpPr>
-          <p:cNvPr id="22" name="Text 20"/>
+          <p:cNvPr id="27" name="Text 25"/>
           <p:cNvSpPr txBox="1"/>
           <p:nvPr/>
         </p:nvSpPr>
@@ -10284,7 +12008,7 @@
                 <a:ea typeface="Calibri" pitchFamily="34" charset="-122"/>
                 <a:cs typeface="Calibri" pitchFamily="34" charset="-120"/>
               </a:rPr>
-              <a:t>9 / 10</a:t>
+              <a:t>9 / 11</a:t>
             </a:r>
             <a:endParaRPr lang="en-US" sz="900" dirty="0"/>
           </a:p>
